--- a/plots/flow_non_ah.pptx
+++ b/plots/flow_non_ah.pptx
@@ -2236,7 +2236,7 @@
           <a:p>
             <a:r>
               <a:rPr/>
-              <a:t>Flow diagram: non-alcoholic hepatitis (etoh_hepatitis = 0)</a:t>
+              <a:t>Flow diagram: non-AH (etoh_hepatitis = 0)</a:t>
             </a:r>
           </a:p>
         </p:txBody>
@@ -2257,37 +2257,388 @@
         </p:grpSpPr>
         <p:sp>
           <p:nvSpPr>
-            <p:cNvPr id="4" name="pl3"/>
+            <p:cNvPr id="4" name="pg3"/>
             <p:cNvSpPr/>
             <p:nvPr/>
           </p:nvSpPr>
           <p:spPr>
             <a:xfrm>
-              <a:off x="2523384" y="2120571"/>
-              <a:ext cx="1453856" cy="842926"/>
+              <a:off x="1656665" y="2509950"/>
+              <a:ext cx="719835" cy="1180530"/>
             </a:xfrm>
             <a:custGeom>
               <a:avLst/>
               <a:pathLst>
-                <a:path w="1453856" h="842926">
+                <a:path w="719835" h="1180530">
                   <a:moveTo>
-                    <a:pt x="1453856" y="0"/>
+                    <a:pt x="0" y="863802"/>
                   </a:moveTo>
                   <a:lnTo>
-                    <a:pt x="0" y="842926"/>
-                  </a:lnTo>
+                    <a:pt x="12200" y="863066"/>
+                  </a:lnTo>
+                  <a:lnTo>
+                    <a:pt x="24401" y="860892"/>
+                  </a:lnTo>
+                  <a:lnTo>
+                    <a:pt x="36601" y="857329"/>
+                  </a:lnTo>
+                  <a:lnTo>
+                    <a:pt x="48802" y="852429"/>
+                  </a:lnTo>
+                  <a:lnTo>
+                    <a:pt x="61003" y="846243"/>
+                  </a:lnTo>
+                  <a:lnTo>
+                    <a:pt x="73203" y="838819"/>
+                  </a:lnTo>
+                  <a:lnTo>
+                    <a:pt x="85404" y="830210"/>
+                  </a:lnTo>
+                  <a:lnTo>
+                    <a:pt x="97604" y="820465"/>
+                  </a:lnTo>
+                  <a:lnTo>
+                    <a:pt x="109805" y="809634"/>
+                  </a:lnTo>
+                  <a:lnTo>
+                    <a:pt x="122006" y="797770"/>
+                  </a:lnTo>
+                  <a:lnTo>
+                    <a:pt x="134206" y="784921"/>
+                  </a:lnTo>
+                  <a:lnTo>
+                    <a:pt x="146407" y="771138"/>
+                  </a:lnTo>
+                  <a:lnTo>
+                    <a:pt x="158607" y="756472"/>
+                  </a:lnTo>
+                  <a:lnTo>
+                    <a:pt x="170808" y="740973"/>
+                  </a:lnTo>
+                  <a:lnTo>
+                    <a:pt x="183009" y="724692"/>
+                  </a:lnTo>
+                  <a:lnTo>
+                    <a:pt x="195209" y="707679"/>
+                  </a:lnTo>
+                  <a:lnTo>
+                    <a:pt x="207410" y="689985"/>
+                  </a:lnTo>
+                  <a:lnTo>
+                    <a:pt x="219610" y="671660"/>
+                  </a:lnTo>
+                  <a:lnTo>
+                    <a:pt x="231811" y="652755"/>
+                  </a:lnTo>
+                  <a:lnTo>
+                    <a:pt x="244012" y="633319"/>
+                  </a:lnTo>
+                  <a:lnTo>
+                    <a:pt x="256212" y="613404"/>
+                  </a:lnTo>
+                  <a:lnTo>
+                    <a:pt x="268413" y="593060"/>
+                  </a:lnTo>
+                  <a:lnTo>
+                    <a:pt x="280613" y="572338"/>
+                  </a:lnTo>
+                  <a:lnTo>
+                    <a:pt x="292814" y="551287"/>
+                  </a:lnTo>
+                  <a:lnTo>
+                    <a:pt x="305015" y="529959"/>
+                  </a:lnTo>
+                  <a:lnTo>
+                    <a:pt x="317215" y="508404"/>
+                  </a:lnTo>
+                  <a:lnTo>
+                    <a:pt x="329416" y="486672"/>
+                  </a:lnTo>
+                  <a:lnTo>
+                    <a:pt x="341616" y="464814"/>
+                  </a:lnTo>
+                  <a:lnTo>
+                    <a:pt x="353817" y="442880"/>
+                  </a:lnTo>
+                  <a:lnTo>
+                    <a:pt x="366018" y="420921"/>
+                  </a:lnTo>
+                  <a:lnTo>
+                    <a:pt x="378218" y="398988"/>
+                  </a:lnTo>
+                  <a:lnTo>
+                    <a:pt x="390419" y="377130"/>
+                  </a:lnTo>
+                  <a:lnTo>
+                    <a:pt x="402619" y="355398"/>
+                  </a:lnTo>
+                  <a:lnTo>
+                    <a:pt x="414820" y="333842"/>
+                  </a:lnTo>
+                  <a:lnTo>
+                    <a:pt x="427021" y="312514"/>
+                  </a:lnTo>
+                  <a:lnTo>
+                    <a:pt x="439221" y="291464"/>
+                  </a:lnTo>
+                  <a:lnTo>
+                    <a:pt x="451422" y="270741"/>
+                  </a:lnTo>
+                  <a:lnTo>
+                    <a:pt x="463622" y="250398"/>
+                  </a:lnTo>
+                  <a:lnTo>
+                    <a:pt x="475823" y="230483"/>
+                  </a:lnTo>
+                  <a:lnTo>
+                    <a:pt x="488024" y="211047"/>
+                  </a:lnTo>
+                  <a:lnTo>
+                    <a:pt x="500224" y="192142"/>
+                  </a:lnTo>
+                  <a:lnTo>
+                    <a:pt x="512425" y="173817"/>
+                  </a:lnTo>
+                  <a:lnTo>
+                    <a:pt x="524625" y="156122"/>
+                  </a:lnTo>
+                  <a:lnTo>
+                    <a:pt x="536826" y="139110"/>
+                  </a:lnTo>
+                  <a:lnTo>
+                    <a:pt x="549027" y="122828"/>
+                  </a:lnTo>
+                  <a:lnTo>
+                    <a:pt x="561227" y="107330"/>
+                  </a:lnTo>
+                  <a:lnTo>
+                    <a:pt x="573428" y="92664"/>
+                  </a:lnTo>
+                  <a:lnTo>
+                    <a:pt x="585628" y="78881"/>
+                  </a:lnTo>
+                  <a:lnTo>
+                    <a:pt x="597829" y="66032"/>
+                  </a:lnTo>
+                  <a:lnTo>
+                    <a:pt x="610030" y="54167"/>
+                  </a:lnTo>
+                  <a:lnTo>
+                    <a:pt x="622230" y="43337"/>
+                  </a:lnTo>
+                  <a:lnTo>
+                    <a:pt x="634431" y="33592"/>
+                  </a:lnTo>
+                  <a:lnTo>
+                    <a:pt x="646631" y="24983"/>
+                  </a:lnTo>
+                  <a:lnTo>
+                    <a:pt x="658832" y="17559"/>
+                  </a:lnTo>
+                  <a:lnTo>
+                    <a:pt x="671033" y="11372"/>
+                  </a:lnTo>
+                  <a:lnTo>
+                    <a:pt x="683233" y="6472"/>
+                  </a:lnTo>
+                  <a:lnTo>
+                    <a:pt x="695434" y="2910"/>
+                  </a:lnTo>
+                  <a:lnTo>
+                    <a:pt x="707634" y="736"/>
+                  </a:lnTo>
+                  <a:lnTo>
+                    <a:pt x="719835" y="0"/>
+                  </a:lnTo>
+                  <a:lnTo>
+                    <a:pt x="719835" y="316727"/>
+                  </a:lnTo>
+                  <a:lnTo>
+                    <a:pt x="707634" y="317463"/>
+                  </a:lnTo>
+                  <a:lnTo>
+                    <a:pt x="695434" y="319638"/>
+                  </a:lnTo>
+                  <a:lnTo>
+                    <a:pt x="683233" y="323200"/>
+                  </a:lnTo>
+                  <a:lnTo>
+                    <a:pt x="671033" y="328100"/>
+                  </a:lnTo>
+                  <a:lnTo>
+                    <a:pt x="658832" y="334287"/>
+                  </a:lnTo>
+                  <a:lnTo>
+                    <a:pt x="646631" y="341710"/>
+                  </a:lnTo>
+                  <a:lnTo>
+                    <a:pt x="634431" y="350320"/>
+                  </a:lnTo>
+                  <a:lnTo>
+                    <a:pt x="622230" y="360065"/>
+                  </a:lnTo>
+                  <a:lnTo>
+                    <a:pt x="610030" y="370895"/>
+                  </a:lnTo>
+                  <a:lnTo>
+                    <a:pt x="597829" y="382760"/>
+                  </a:lnTo>
+                  <a:lnTo>
+                    <a:pt x="585628" y="395609"/>
+                  </a:lnTo>
+                  <a:lnTo>
+                    <a:pt x="573428" y="409391"/>
+                  </a:lnTo>
+                  <a:lnTo>
+                    <a:pt x="561227" y="424057"/>
+                  </a:lnTo>
+                  <a:lnTo>
+                    <a:pt x="549027" y="439556"/>
+                  </a:lnTo>
+                  <a:lnTo>
+                    <a:pt x="536826" y="455837"/>
+                  </a:lnTo>
+                  <a:lnTo>
+                    <a:pt x="524625" y="472850"/>
+                  </a:lnTo>
+                  <a:lnTo>
+                    <a:pt x="512425" y="490544"/>
+                  </a:lnTo>
+                  <a:lnTo>
+                    <a:pt x="500224" y="508869"/>
+                  </a:lnTo>
+                  <a:lnTo>
+                    <a:pt x="488024" y="527775"/>
+                  </a:lnTo>
+                  <a:lnTo>
+                    <a:pt x="475823" y="547210"/>
+                  </a:lnTo>
+                  <a:lnTo>
+                    <a:pt x="463622" y="567125"/>
+                  </a:lnTo>
+                  <a:lnTo>
+                    <a:pt x="451422" y="587469"/>
+                  </a:lnTo>
+                  <a:lnTo>
+                    <a:pt x="439221" y="608192"/>
+                  </a:lnTo>
+                  <a:lnTo>
+                    <a:pt x="427021" y="629242"/>
+                  </a:lnTo>
+                  <a:lnTo>
+                    <a:pt x="414820" y="650570"/>
+                  </a:lnTo>
+                  <a:lnTo>
+                    <a:pt x="402619" y="672125"/>
+                  </a:lnTo>
+                  <a:lnTo>
+                    <a:pt x="390419" y="693857"/>
+                  </a:lnTo>
+                  <a:lnTo>
+                    <a:pt x="378218" y="715715"/>
+                  </a:lnTo>
+                  <a:lnTo>
+                    <a:pt x="366018" y="737649"/>
+                  </a:lnTo>
+                  <a:lnTo>
+                    <a:pt x="353817" y="759608"/>
+                  </a:lnTo>
+                  <a:lnTo>
+                    <a:pt x="341616" y="781542"/>
+                  </a:lnTo>
+                  <a:lnTo>
+                    <a:pt x="329416" y="803400"/>
+                  </a:lnTo>
+                  <a:lnTo>
+                    <a:pt x="317215" y="825132"/>
+                  </a:lnTo>
+                  <a:lnTo>
+                    <a:pt x="305015" y="846687"/>
+                  </a:lnTo>
+                  <a:lnTo>
+                    <a:pt x="292814" y="868015"/>
+                  </a:lnTo>
+                  <a:lnTo>
+                    <a:pt x="280613" y="889065"/>
+                  </a:lnTo>
+                  <a:lnTo>
+                    <a:pt x="268413" y="909788"/>
+                  </a:lnTo>
+                  <a:lnTo>
+                    <a:pt x="256212" y="930132"/>
+                  </a:lnTo>
+                  <a:lnTo>
+                    <a:pt x="244012" y="950047"/>
+                  </a:lnTo>
+                  <a:lnTo>
+                    <a:pt x="231811" y="969482"/>
+                  </a:lnTo>
+                  <a:lnTo>
+                    <a:pt x="219610" y="988388"/>
+                  </a:lnTo>
+                  <a:lnTo>
+                    <a:pt x="207410" y="1006713"/>
+                  </a:lnTo>
+                  <a:lnTo>
+                    <a:pt x="195209" y="1024407"/>
+                  </a:lnTo>
+                  <a:lnTo>
+                    <a:pt x="183009" y="1041420"/>
+                  </a:lnTo>
+                  <a:lnTo>
+                    <a:pt x="170808" y="1057701"/>
+                  </a:lnTo>
+                  <a:lnTo>
+                    <a:pt x="158607" y="1073200"/>
+                  </a:lnTo>
+                  <a:lnTo>
+                    <a:pt x="146407" y="1087866"/>
+                  </a:lnTo>
+                  <a:lnTo>
+                    <a:pt x="134206" y="1101648"/>
+                  </a:lnTo>
+                  <a:lnTo>
+                    <a:pt x="122006" y="1114497"/>
+                  </a:lnTo>
+                  <a:lnTo>
+                    <a:pt x="109805" y="1126362"/>
+                  </a:lnTo>
+                  <a:lnTo>
+                    <a:pt x="97604" y="1137192"/>
+                  </a:lnTo>
+                  <a:lnTo>
+                    <a:pt x="85404" y="1146937"/>
+                  </a:lnTo>
+                  <a:lnTo>
+                    <a:pt x="73203" y="1155547"/>
+                  </a:lnTo>
+                  <a:lnTo>
+                    <a:pt x="61003" y="1162970"/>
+                  </a:lnTo>
+                  <a:lnTo>
+                    <a:pt x="48802" y="1169157"/>
+                  </a:lnTo>
+                  <a:lnTo>
+                    <a:pt x="36601" y="1174057"/>
+                  </a:lnTo>
+                  <a:lnTo>
+                    <a:pt x="24401" y="1177619"/>
+                  </a:lnTo>
+                  <a:lnTo>
+                    <a:pt x="12200" y="1179794"/>
+                  </a:lnTo>
+                  <a:lnTo>
+                    <a:pt x="0" y="1180530"/>
+                  </a:lnTo>
+                  <a:close/>
                 </a:path>
               </a:pathLst>
             </a:custGeom>
-            <a:ln w="16260" cap="flat">
-              <a:solidFill>
-                <a:srgbClr val="256F9C">
-                  <a:alpha val="100000"/>
-                </a:srgbClr>
-              </a:solidFill>
-              <a:prstDash val="solid"/>
-              <a:round/>
-            </a:ln>
+            <a:solidFill>
+              <a:srgbClr val="A1B7D7">
+                <a:alpha val="100000"/>
+              </a:srgbClr>
+            </a:solidFill>
           </p:spPr>
           <p:txBody>
             <a:bodyPr/>
@@ -2303,40 +2654,382 @@
           </p:nvSpPr>
           <p:spPr>
             <a:xfrm>
-              <a:off x="2523384" y="2894836"/>
-              <a:ext cx="79199" cy="68661"/>
+              <a:off x="1656665" y="3805654"/>
+              <a:ext cx="719835" cy="1180530"/>
             </a:xfrm>
             <a:custGeom>
               <a:avLst/>
               <a:pathLst>
-                <a:path w="79199" h="68661">
+                <a:path w="719835" h="1180530">
                   <a:moveTo>
-                    <a:pt x="39474" y="0"/>
+                    <a:pt x="0" y="0"/>
                   </a:moveTo>
                   <a:lnTo>
-                    <a:pt x="0" y="68661"/>
-                  </a:lnTo>
-                  <a:lnTo>
-                    <a:pt x="79199" y="68516"/>
+                    <a:pt x="12200" y="736"/>
+                  </a:lnTo>
+                  <a:lnTo>
+                    <a:pt x="24401" y="2910"/>
+                  </a:lnTo>
+                  <a:lnTo>
+                    <a:pt x="36601" y="6472"/>
+                  </a:lnTo>
+                  <a:lnTo>
+                    <a:pt x="48802" y="11372"/>
+                  </a:lnTo>
+                  <a:lnTo>
+                    <a:pt x="61003" y="17559"/>
+                  </a:lnTo>
+                  <a:lnTo>
+                    <a:pt x="73203" y="24983"/>
+                  </a:lnTo>
+                  <a:lnTo>
+                    <a:pt x="85404" y="33592"/>
+                  </a:lnTo>
+                  <a:lnTo>
+                    <a:pt x="97604" y="43337"/>
+                  </a:lnTo>
+                  <a:lnTo>
+                    <a:pt x="109805" y="54167"/>
+                  </a:lnTo>
+                  <a:lnTo>
+                    <a:pt x="122006" y="66032"/>
+                  </a:lnTo>
+                  <a:lnTo>
+                    <a:pt x="134206" y="78881"/>
+                  </a:lnTo>
+                  <a:lnTo>
+                    <a:pt x="146407" y="92664"/>
+                  </a:lnTo>
+                  <a:lnTo>
+                    <a:pt x="158607" y="107330"/>
+                  </a:lnTo>
+                  <a:lnTo>
+                    <a:pt x="170808" y="122828"/>
+                  </a:lnTo>
+                  <a:lnTo>
+                    <a:pt x="183009" y="139110"/>
+                  </a:lnTo>
+                  <a:lnTo>
+                    <a:pt x="195209" y="156122"/>
+                  </a:lnTo>
+                  <a:lnTo>
+                    <a:pt x="207410" y="173817"/>
+                  </a:lnTo>
+                  <a:lnTo>
+                    <a:pt x="219610" y="192142"/>
+                  </a:lnTo>
+                  <a:lnTo>
+                    <a:pt x="231811" y="211047"/>
+                  </a:lnTo>
+                  <a:lnTo>
+                    <a:pt x="244012" y="230483"/>
+                  </a:lnTo>
+                  <a:lnTo>
+                    <a:pt x="256212" y="250398"/>
+                  </a:lnTo>
+                  <a:lnTo>
+                    <a:pt x="268413" y="270741"/>
+                  </a:lnTo>
+                  <a:lnTo>
+                    <a:pt x="280613" y="291464"/>
+                  </a:lnTo>
+                  <a:lnTo>
+                    <a:pt x="292814" y="312514"/>
+                  </a:lnTo>
+                  <a:lnTo>
+                    <a:pt x="305015" y="333842"/>
+                  </a:lnTo>
+                  <a:lnTo>
+                    <a:pt x="317215" y="355398"/>
+                  </a:lnTo>
+                  <a:lnTo>
+                    <a:pt x="329416" y="377130"/>
+                  </a:lnTo>
+                  <a:lnTo>
+                    <a:pt x="341616" y="398988"/>
+                  </a:lnTo>
+                  <a:lnTo>
+                    <a:pt x="353817" y="420921"/>
+                  </a:lnTo>
+                  <a:lnTo>
+                    <a:pt x="366018" y="442880"/>
+                  </a:lnTo>
+                  <a:lnTo>
+                    <a:pt x="378218" y="464814"/>
+                  </a:lnTo>
+                  <a:lnTo>
+                    <a:pt x="390419" y="486672"/>
+                  </a:lnTo>
+                  <a:lnTo>
+                    <a:pt x="402619" y="508404"/>
+                  </a:lnTo>
+                  <a:lnTo>
+                    <a:pt x="414820" y="529959"/>
+                  </a:lnTo>
+                  <a:lnTo>
+                    <a:pt x="427021" y="551287"/>
+                  </a:lnTo>
+                  <a:lnTo>
+                    <a:pt x="439221" y="572338"/>
+                  </a:lnTo>
+                  <a:lnTo>
+                    <a:pt x="451422" y="593060"/>
+                  </a:lnTo>
+                  <a:lnTo>
+                    <a:pt x="463622" y="613404"/>
+                  </a:lnTo>
+                  <a:lnTo>
+                    <a:pt x="475823" y="633319"/>
+                  </a:lnTo>
+                  <a:lnTo>
+                    <a:pt x="488024" y="652755"/>
+                  </a:lnTo>
+                  <a:lnTo>
+                    <a:pt x="500224" y="671660"/>
+                  </a:lnTo>
+                  <a:lnTo>
+                    <a:pt x="512425" y="689985"/>
+                  </a:lnTo>
+                  <a:lnTo>
+                    <a:pt x="524625" y="707679"/>
+                  </a:lnTo>
+                  <a:lnTo>
+                    <a:pt x="536826" y="724692"/>
+                  </a:lnTo>
+                  <a:lnTo>
+                    <a:pt x="549027" y="740973"/>
+                  </a:lnTo>
+                  <a:lnTo>
+                    <a:pt x="561227" y="756472"/>
+                  </a:lnTo>
+                  <a:lnTo>
+                    <a:pt x="573428" y="771138"/>
+                  </a:lnTo>
+                  <a:lnTo>
+                    <a:pt x="585628" y="784921"/>
+                  </a:lnTo>
+                  <a:lnTo>
+                    <a:pt x="597829" y="797770"/>
+                  </a:lnTo>
+                  <a:lnTo>
+                    <a:pt x="610030" y="809634"/>
+                  </a:lnTo>
+                  <a:lnTo>
+                    <a:pt x="622230" y="820465"/>
+                  </a:lnTo>
+                  <a:lnTo>
+                    <a:pt x="634431" y="830210"/>
+                  </a:lnTo>
+                  <a:lnTo>
+                    <a:pt x="646631" y="838819"/>
+                  </a:lnTo>
+                  <a:lnTo>
+                    <a:pt x="658832" y="846243"/>
+                  </a:lnTo>
+                  <a:lnTo>
+                    <a:pt x="671033" y="852429"/>
+                  </a:lnTo>
+                  <a:lnTo>
+                    <a:pt x="683233" y="857329"/>
+                  </a:lnTo>
+                  <a:lnTo>
+                    <a:pt x="695434" y="860892"/>
+                  </a:lnTo>
+                  <a:lnTo>
+                    <a:pt x="707634" y="863066"/>
+                  </a:lnTo>
+                  <a:lnTo>
+                    <a:pt x="719835" y="863802"/>
+                  </a:lnTo>
+                  <a:lnTo>
+                    <a:pt x="719835" y="1180530"/>
+                  </a:lnTo>
+                  <a:lnTo>
+                    <a:pt x="707634" y="1179794"/>
+                  </a:lnTo>
+                  <a:lnTo>
+                    <a:pt x="695434" y="1177619"/>
+                  </a:lnTo>
+                  <a:lnTo>
+                    <a:pt x="683233" y="1174057"/>
+                  </a:lnTo>
+                  <a:lnTo>
+                    <a:pt x="671033" y="1169157"/>
+                  </a:lnTo>
+                  <a:lnTo>
+                    <a:pt x="658832" y="1162970"/>
+                  </a:lnTo>
+                  <a:lnTo>
+                    <a:pt x="646631" y="1155547"/>
+                  </a:lnTo>
+                  <a:lnTo>
+                    <a:pt x="634431" y="1146937"/>
+                  </a:lnTo>
+                  <a:lnTo>
+                    <a:pt x="622230" y="1137192"/>
+                  </a:lnTo>
+                  <a:lnTo>
+                    <a:pt x="610030" y="1126362"/>
+                  </a:lnTo>
+                  <a:lnTo>
+                    <a:pt x="597829" y="1114497"/>
+                  </a:lnTo>
+                  <a:lnTo>
+                    <a:pt x="585628" y="1101648"/>
+                  </a:lnTo>
+                  <a:lnTo>
+                    <a:pt x="573428" y="1087866"/>
+                  </a:lnTo>
+                  <a:lnTo>
+                    <a:pt x="561227" y="1073200"/>
+                  </a:lnTo>
+                  <a:lnTo>
+                    <a:pt x="549027" y="1057701"/>
+                  </a:lnTo>
+                  <a:lnTo>
+                    <a:pt x="536826" y="1041420"/>
+                  </a:lnTo>
+                  <a:lnTo>
+                    <a:pt x="524625" y="1024407"/>
+                  </a:lnTo>
+                  <a:lnTo>
+                    <a:pt x="512425" y="1006713"/>
+                  </a:lnTo>
+                  <a:lnTo>
+                    <a:pt x="500224" y="988388"/>
+                  </a:lnTo>
+                  <a:lnTo>
+                    <a:pt x="488024" y="969482"/>
+                  </a:lnTo>
+                  <a:lnTo>
+                    <a:pt x="475823" y="950047"/>
+                  </a:lnTo>
+                  <a:lnTo>
+                    <a:pt x="463622" y="930132"/>
+                  </a:lnTo>
+                  <a:lnTo>
+                    <a:pt x="451422" y="909788"/>
+                  </a:lnTo>
+                  <a:lnTo>
+                    <a:pt x="439221" y="889065"/>
+                  </a:lnTo>
+                  <a:lnTo>
+                    <a:pt x="427021" y="868015"/>
+                  </a:lnTo>
+                  <a:lnTo>
+                    <a:pt x="414820" y="846687"/>
+                  </a:lnTo>
+                  <a:lnTo>
+                    <a:pt x="402619" y="825132"/>
+                  </a:lnTo>
+                  <a:lnTo>
+                    <a:pt x="390419" y="803400"/>
+                  </a:lnTo>
+                  <a:lnTo>
+                    <a:pt x="378218" y="781542"/>
+                  </a:lnTo>
+                  <a:lnTo>
+                    <a:pt x="366018" y="759608"/>
+                  </a:lnTo>
+                  <a:lnTo>
+                    <a:pt x="353817" y="737649"/>
+                  </a:lnTo>
+                  <a:lnTo>
+                    <a:pt x="341616" y="715715"/>
+                  </a:lnTo>
+                  <a:lnTo>
+                    <a:pt x="329416" y="693857"/>
+                  </a:lnTo>
+                  <a:lnTo>
+                    <a:pt x="317215" y="672125"/>
+                  </a:lnTo>
+                  <a:lnTo>
+                    <a:pt x="305015" y="650570"/>
+                  </a:lnTo>
+                  <a:lnTo>
+                    <a:pt x="292814" y="629242"/>
+                  </a:lnTo>
+                  <a:lnTo>
+                    <a:pt x="280613" y="608192"/>
+                  </a:lnTo>
+                  <a:lnTo>
+                    <a:pt x="268413" y="587469"/>
+                  </a:lnTo>
+                  <a:lnTo>
+                    <a:pt x="256212" y="567125"/>
+                  </a:lnTo>
+                  <a:lnTo>
+                    <a:pt x="244012" y="547210"/>
+                  </a:lnTo>
+                  <a:lnTo>
+                    <a:pt x="231811" y="527775"/>
+                  </a:lnTo>
+                  <a:lnTo>
+                    <a:pt x="219610" y="508869"/>
+                  </a:lnTo>
+                  <a:lnTo>
+                    <a:pt x="207410" y="490544"/>
+                  </a:lnTo>
+                  <a:lnTo>
+                    <a:pt x="195209" y="472850"/>
+                  </a:lnTo>
+                  <a:lnTo>
+                    <a:pt x="183009" y="455837"/>
+                  </a:lnTo>
+                  <a:lnTo>
+                    <a:pt x="170808" y="439556"/>
+                  </a:lnTo>
+                  <a:lnTo>
+                    <a:pt x="158607" y="424057"/>
+                  </a:lnTo>
+                  <a:lnTo>
+                    <a:pt x="146407" y="409391"/>
+                  </a:lnTo>
+                  <a:lnTo>
+                    <a:pt x="134206" y="395609"/>
+                  </a:lnTo>
+                  <a:lnTo>
+                    <a:pt x="122006" y="382760"/>
+                  </a:lnTo>
+                  <a:lnTo>
+                    <a:pt x="109805" y="370895"/>
+                  </a:lnTo>
+                  <a:lnTo>
+                    <a:pt x="97604" y="360065"/>
+                  </a:lnTo>
+                  <a:lnTo>
+                    <a:pt x="85404" y="350320"/>
+                  </a:lnTo>
+                  <a:lnTo>
+                    <a:pt x="73203" y="341710"/>
+                  </a:lnTo>
+                  <a:lnTo>
+                    <a:pt x="61003" y="334287"/>
+                  </a:lnTo>
+                  <a:lnTo>
+                    <a:pt x="48802" y="328100"/>
+                  </a:lnTo>
+                  <a:lnTo>
+                    <a:pt x="36601" y="323200"/>
+                  </a:lnTo>
+                  <a:lnTo>
+                    <a:pt x="24401" y="319638"/>
+                  </a:lnTo>
+                  <a:lnTo>
+                    <a:pt x="12200" y="317463"/>
+                  </a:lnTo>
+                  <a:lnTo>
+                    <a:pt x="0" y="316727"/>
                   </a:lnTo>
                   <a:close/>
                 </a:path>
               </a:pathLst>
             </a:custGeom>
             <a:solidFill>
-              <a:srgbClr val="256F9C">
+              <a:srgbClr val="A0C4A2">
                 <a:alpha val="100000"/>
               </a:srgbClr>
             </a:solidFill>
-            <a:ln w="16260" cap="flat">
-              <a:solidFill>
-                <a:srgbClr val="256F9C">
-                  <a:alpha val="100000"/>
-                </a:srgbClr>
-              </a:solidFill>
-              <a:prstDash val="solid"/>
-              <a:round/>
-            </a:ln>
           </p:spPr>
           <p:txBody>
             <a:bodyPr/>
@@ -2346,37 +3039,388 @@
         </p:sp>
         <p:sp>
           <p:nvSpPr>
-            <p:cNvPr id="6" name="pl5"/>
+            <p:cNvPr id="6" name="pg5"/>
             <p:cNvSpPr/>
             <p:nvPr/>
           </p:nvSpPr>
           <p:spPr>
             <a:xfrm>
-              <a:off x="5166759" y="2120571"/>
-              <a:ext cx="1453856" cy="842926"/>
+              <a:off x="3600221" y="1970074"/>
+              <a:ext cx="647852" cy="662248"/>
             </a:xfrm>
             <a:custGeom>
               <a:avLst/>
               <a:pathLst>
-                <a:path w="1453856" h="842926">
+                <a:path w="647852" h="662248">
                   <a:moveTo>
-                    <a:pt x="0" y="0"/>
+                    <a:pt x="0" y="345521"/>
                   </a:moveTo>
                   <a:lnTo>
-                    <a:pt x="1453856" y="842926"/>
-                  </a:lnTo>
+                    <a:pt x="10980" y="345226"/>
+                  </a:lnTo>
+                  <a:lnTo>
+                    <a:pt x="21961" y="344356"/>
+                  </a:lnTo>
+                  <a:lnTo>
+                    <a:pt x="32941" y="342931"/>
+                  </a:lnTo>
+                  <a:lnTo>
+                    <a:pt x="43922" y="340971"/>
+                  </a:lnTo>
+                  <a:lnTo>
+                    <a:pt x="54902" y="338497"/>
+                  </a:lnTo>
+                  <a:lnTo>
+                    <a:pt x="65883" y="335527"/>
+                  </a:lnTo>
+                  <a:lnTo>
+                    <a:pt x="76863" y="332084"/>
+                  </a:lnTo>
+                  <a:lnTo>
+                    <a:pt x="87844" y="328186"/>
+                  </a:lnTo>
+                  <a:lnTo>
+                    <a:pt x="98824" y="323853"/>
+                  </a:lnTo>
+                  <a:lnTo>
+                    <a:pt x="109805" y="319108"/>
+                  </a:lnTo>
+                  <a:lnTo>
+                    <a:pt x="120785" y="313968"/>
+                  </a:lnTo>
+                  <a:lnTo>
+                    <a:pt x="131766" y="308455"/>
+                  </a:lnTo>
+                  <a:lnTo>
+                    <a:pt x="142747" y="302588"/>
+                  </a:lnTo>
+                  <a:lnTo>
+                    <a:pt x="153727" y="296389"/>
+                  </a:lnTo>
+                  <a:lnTo>
+                    <a:pt x="164708" y="289877"/>
+                  </a:lnTo>
+                  <a:lnTo>
+                    <a:pt x="175688" y="283071"/>
+                  </a:lnTo>
+                  <a:lnTo>
+                    <a:pt x="186669" y="275994"/>
+                  </a:lnTo>
+                  <a:lnTo>
+                    <a:pt x="197649" y="268664"/>
+                  </a:lnTo>
+                  <a:lnTo>
+                    <a:pt x="208630" y="261102"/>
+                  </a:lnTo>
+                  <a:lnTo>
+                    <a:pt x="219610" y="253327"/>
+                  </a:lnTo>
+                  <a:lnTo>
+                    <a:pt x="230591" y="245361"/>
+                  </a:lnTo>
+                  <a:lnTo>
+                    <a:pt x="241571" y="237224"/>
+                  </a:lnTo>
+                  <a:lnTo>
+                    <a:pt x="252552" y="228935"/>
+                  </a:lnTo>
+                  <a:lnTo>
+                    <a:pt x="263533" y="220515"/>
+                  </a:lnTo>
+                  <a:lnTo>
+                    <a:pt x="274513" y="211983"/>
+                  </a:lnTo>
+                  <a:lnTo>
+                    <a:pt x="285494" y="203361"/>
+                  </a:lnTo>
+                  <a:lnTo>
+                    <a:pt x="296474" y="194669"/>
+                  </a:lnTo>
+                  <a:lnTo>
+                    <a:pt x="307455" y="185925"/>
+                  </a:lnTo>
+                  <a:lnTo>
+                    <a:pt x="318435" y="177152"/>
+                  </a:lnTo>
+                  <a:lnTo>
+                    <a:pt x="329416" y="168368"/>
+                  </a:lnTo>
+                  <a:lnTo>
+                    <a:pt x="340396" y="159595"/>
+                  </a:lnTo>
+                  <a:lnTo>
+                    <a:pt x="351377" y="150852"/>
+                  </a:lnTo>
+                  <a:lnTo>
+                    <a:pt x="362357" y="142159"/>
+                  </a:lnTo>
+                  <a:lnTo>
+                    <a:pt x="373338" y="133537"/>
+                  </a:lnTo>
+                  <a:lnTo>
+                    <a:pt x="384318" y="125005"/>
+                  </a:lnTo>
+                  <a:lnTo>
+                    <a:pt x="395299" y="116585"/>
+                  </a:lnTo>
+                  <a:lnTo>
+                    <a:pt x="406280" y="108296"/>
+                  </a:lnTo>
+                  <a:lnTo>
+                    <a:pt x="417260" y="100159"/>
+                  </a:lnTo>
+                  <a:lnTo>
+                    <a:pt x="428241" y="92193"/>
+                  </a:lnTo>
+                  <a:lnTo>
+                    <a:pt x="439221" y="84419"/>
+                  </a:lnTo>
+                  <a:lnTo>
+                    <a:pt x="450202" y="76856"/>
+                  </a:lnTo>
+                  <a:lnTo>
+                    <a:pt x="461182" y="69526"/>
+                  </a:lnTo>
+                  <a:lnTo>
+                    <a:pt x="472163" y="62449"/>
+                  </a:lnTo>
+                  <a:lnTo>
+                    <a:pt x="483143" y="55644"/>
+                  </a:lnTo>
+                  <a:lnTo>
+                    <a:pt x="494124" y="49131"/>
+                  </a:lnTo>
+                  <a:lnTo>
+                    <a:pt x="505104" y="42932"/>
+                  </a:lnTo>
+                  <a:lnTo>
+                    <a:pt x="516085" y="37065"/>
+                  </a:lnTo>
+                  <a:lnTo>
+                    <a:pt x="527066" y="31552"/>
+                  </a:lnTo>
+                  <a:lnTo>
+                    <a:pt x="538046" y="26413"/>
+                  </a:lnTo>
+                  <a:lnTo>
+                    <a:pt x="549027" y="21667"/>
+                  </a:lnTo>
+                  <a:lnTo>
+                    <a:pt x="560007" y="17335"/>
+                  </a:lnTo>
+                  <a:lnTo>
+                    <a:pt x="570988" y="13436"/>
+                  </a:lnTo>
+                  <a:lnTo>
+                    <a:pt x="581968" y="9993"/>
+                  </a:lnTo>
+                  <a:lnTo>
+                    <a:pt x="592949" y="7023"/>
+                  </a:lnTo>
+                  <a:lnTo>
+                    <a:pt x="603929" y="4549"/>
+                  </a:lnTo>
+                  <a:lnTo>
+                    <a:pt x="614910" y="2589"/>
+                  </a:lnTo>
+                  <a:lnTo>
+                    <a:pt x="625890" y="1164"/>
+                  </a:lnTo>
+                  <a:lnTo>
+                    <a:pt x="636871" y="294"/>
+                  </a:lnTo>
+                  <a:lnTo>
+                    <a:pt x="647852" y="0"/>
+                  </a:lnTo>
+                  <a:lnTo>
+                    <a:pt x="647852" y="316727"/>
+                  </a:lnTo>
+                  <a:lnTo>
+                    <a:pt x="636871" y="317022"/>
+                  </a:lnTo>
+                  <a:lnTo>
+                    <a:pt x="625890" y="317891"/>
+                  </a:lnTo>
+                  <a:lnTo>
+                    <a:pt x="614910" y="319316"/>
+                  </a:lnTo>
+                  <a:lnTo>
+                    <a:pt x="603929" y="321276"/>
+                  </a:lnTo>
+                  <a:lnTo>
+                    <a:pt x="592949" y="323751"/>
+                  </a:lnTo>
+                  <a:lnTo>
+                    <a:pt x="581968" y="326720"/>
+                  </a:lnTo>
+                  <a:lnTo>
+                    <a:pt x="570988" y="330164"/>
+                  </a:lnTo>
+                  <a:lnTo>
+                    <a:pt x="560007" y="334062"/>
+                  </a:lnTo>
+                  <a:lnTo>
+                    <a:pt x="549027" y="338394"/>
+                  </a:lnTo>
+                  <a:lnTo>
+                    <a:pt x="538046" y="343140"/>
+                  </a:lnTo>
+                  <a:lnTo>
+                    <a:pt x="527066" y="348280"/>
+                  </a:lnTo>
+                  <a:lnTo>
+                    <a:pt x="516085" y="353793"/>
+                  </a:lnTo>
+                  <a:lnTo>
+                    <a:pt x="505104" y="359659"/>
+                  </a:lnTo>
+                  <a:lnTo>
+                    <a:pt x="494124" y="365859"/>
+                  </a:lnTo>
+                  <a:lnTo>
+                    <a:pt x="483143" y="372371"/>
+                  </a:lnTo>
+                  <a:lnTo>
+                    <a:pt x="472163" y="379176"/>
+                  </a:lnTo>
+                  <a:lnTo>
+                    <a:pt x="461182" y="386254"/>
+                  </a:lnTo>
+                  <a:lnTo>
+                    <a:pt x="450202" y="393584"/>
+                  </a:lnTo>
+                  <a:lnTo>
+                    <a:pt x="439221" y="401146"/>
+                  </a:lnTo>
+                  <a:lnTo>
+                    <a:pt x="428241" y="408920"/>
+                  </a:lnTo>
+                  <a:lnTo>
+                    <a:pt x="417260" y="416886"/>
+                  </a:lnTo>
+                  <a:lnTo>
+                    <a:pt x="406280" y="425024"/>
+                  </a:lnTo>
+                  <a:lnTo>
+                    <a:pt x="395299" y="433313"/>
+                  </a:lnTo>
+                  <a:lnTo>
+                    <a:pt x="384318" y="441733"/>
+                  </a:lnTo>
+                  <a:lnTo>
+                    <a:pt x="373338" y="450264"/>
+                  </a:lnTo>
+                  <a:lnTo>
+                    <a:pt x="362357" y="458886"/>
+                  </a:lnTo>
+                  <a:lnTo>
+                    <a:pt x="351377" y="467579"/>
+                  </a:lnTo>
+                  <a:lnTo>
+                    <a:pt x="340396" y="476322"/>
+                  </a:lnTo>
+                  <a:lnTo>
+                    <a:pt x="329416" y="485096"/>
+                  </a:lnTo>
+                  <a:lnTo>
+                    <a:pt x="318435" y="493879"/>
+                  </a:lnTo>
+                  <a:lnTo>
+                    <a:pt x="307455" y="502653"/>
+                  </a:lnTo>
+                  <a:lnTo>
+                    <a:pt x="296474" y="511396"/>
+                  </a:lnTo>
+                  <a:lnTo>
+                    <a:pt x="285494" y="520089"/>
+                  </a:lnTo>
+                  <a:lnTo>
+                    <a:pt x="274513" y="528711"/>
+                  </a:lnTo>
+                  <a:lnTo>
+                    <a:pt x="263533" y="537242"/>
+                  </a:lnTo>
+                  <a:lnTo>
+                    <a:pt x="252552" y="545662"/>
+                  </a:lnTo>
+                  <a:lnTo>
+                    <a:pt x="241571" y="553951"/>
+                  </a:lnTo>
+                  <a:lnTo>
+                    <a:pt x="230591" y="562089"/>
+                  </a:lnTo>
+                  <a:lnTo>
+                    <a:pt x="219610" y="570055"/>
+                  </a:lnTo>
+                  <a:lnTo>
+                    <a:pt x="208630" y="577829"/>
+                  </a:lnTo>
+                  <a:lnTo>
+                    <a:pt x="197649" y="585391"/>
+                  </a:lnTo>
+                  <a:lnTo>
+                    <a:pt x="186669" y="592721"/>
+                  </a:lnTo>
+                  <a:lnTo>
+                    <a:pt x="175688" y="599799"/>
+                  </a:lnTo>
+                  <a:lnTo>
+                    <a:pt x="164708" y="606604"/>
+                  </a:lnTo>
+                  <a:lnTo>
+                    <a:pt x="153727" y="613117"/>
+                  </a:lnTo>
+                  <a:lnTo>
+                    <a:pt x="142747" y="619316"/>
+                  </a:lnTo>
+                  <a:lnTo>
+                    <a:pt x="131766" y="625182"/>
+                  </a:lnTo>
+                  <a:lnTo>
+                    <a:pt x="120785" y="630696"/>
+                  </a:lnTo>
+                  <a:lnTo>
+                    <a:pt x="109805" y="635835"/>
+                  </a:lnTo>
+                  <a:lnTo>
+                    <a:pt x="98824" y="640581"/>
+                  </a:lnTo>
+                  <a:lnTo>
+                    <a:pt x="87844" y="644913"/>
+                  </a:lnTo>
+                  <a:lnTo>
+                    <a:pt x="76863" y="648811"/>
+                  </a:lnTo>
+                  <a:lnTo>
+                    <a:pt x="65883" y="652255"/>
+                  </a:lnTo>
+                  <a:lnTo>
+                    <a:pt x="54902" y="655224"/>
+                  </a:lnTo>
+                  <a:lnTo>
+                    <a:pt x="43922" y="657699"/>
+                  </a:lnTo>
+                  <a:lnTo>
+                    <a:pt x="32941" y="659659"/>
+                  </a:lnTo>
+                  <a:lnTo>
+                    <a:pt x="21961" y="661084"/>
+                  </a:lnTo>
+                  <a:lnTo>
+                    <a:pt x="10980" y="661954"/>
+                  </a:lnTo>
+                  <a:lnTo>
+                    <a:pt x="0" y="662248"/>
+                  </a:lnTo>
+                  <a:close/>
                 </a:path>
               </a:pathLst>
             </a:custGeom>
-            <a:ln w="16260" cap="flat">
-              <a:solidFill>
-                <a:srgbClr val="256F9C">
-                  <a:alpha val="100000"/>
-                </a:srgbClr>
-              </a:solidFill>
-              <a:prstDash val="solid"/>
-              <a:round/>
-            </a:ln>
+            <a:solidFill>
+              <a:srgbClr val="EDB1AD">
+                <a:alpha val="100000"/>
+              </a:srgbClr>
+            </a:solidFill>
           </p:spPr>
           <p:txBody>
             <a:bodyPr/>
@@ -2392,40 +3436,382 @@
           </p:nvSpPr>
           <p:spPr>
             <a:xfrm>
-              <a:off x="6541416" y="2894836"/>
-              <a:ext cx="79199" cy="68661"/>
+              <a:off x="3600221" y="2704306"/>
+              <a:ext cx="647852" cy="662248"/>
             </a:xfrm>
             <a:custGeom>
               <a:avLst/>
               <a:pathLst>
-                <a:path w="79199" h="68661">
+                <a:path w="647852" h="662248">
                   <a:moveTo>
-                    <a:pt x="0" y="68516"/>
+                    <a:pt x="0" y="0"/>
                   </a:moveTo>
                   <a:lnTo>
-                    <a:pt x="79199" y="68661"/>
-                  </a:lnTo>
-                  <a:lnTo>
-                    <a:pt x="39725" y="0"/>
+                    <a:pt x="10980" y="294"/>
+                  </a:lnTo>
+                  <a:lnTo>
+                    <a:pt x="21961" y="1164"/>
+                  </a:lnTo>
+                  <a:lnTo>
+                    <a:pt x="32941" y="2589"/>
+                  </a:lnTo>
+                  <a:lnTo>
+                    <a:pt x="43922" y="4549"/>
+                  </a:lnTo>
+                  <a:lnTo>
+                    <a:pt x="54902" y="7023"/>
+                  </a:lnTo>
+                  <a:lnTo>
+                    <a:pt x="65883" y="9993"/>
+                  </a:lnTo>
+                  <a:lnTo>
+                    <a:pt x="76863" y="13436"/>
+                  </a:lnTo>
+                  <a:lnTo>
+                    <a:pt x="87844" y="17335"/>
+                  </a:lnTo>
+                  <a:lnTo>
+                    <a:pt x="98824" y="21667"/>
+                  </a:lnTo>
+                  <a:lnTo>
+                    <a:pt x="109805" y="26413"/>
+                  </a:lnTo>
+                  <a:lnTo>
+                    <a:pt x="120785" y="31552"/>
+                  </a:lnTo>
+                  <a:lnTo>
+                    <a:pt x="131766" y="37065"/>
+                  </a:lnTo>
+                  <a:lnTo>
+                    <a:pt x="142747" y="42932"/>
+                  </a:lnTo>
+                  <a:lnTo>
+                    <a:pt x="153727" y="49131"/>
+                  </a:lnTo>
+                  <a:lnTo>
+                    <a:pt x="164708" y="55644"/>
+                  </a:lnTo>
+                  <a:lnTo>
+                    <a:pt x="175688" y="62449"/>
+                  </a:lnTo>
+                  <a:lnTo>
+                    <a:pt x="186669" y="69526"/>
+                  </a:lnTo>
+                  <a:lnTo>
+                    <a:pt x="197649" y="76856"/>
+                  </a:lnTo>
+                  <a:lnTo>
+                    <a:pt x="208630" y="84419"/>
+                  </a:lnTo>
+                  <a:lnTo>
+                    <a:pt x="219610" y="92193"/>
+                  </a:lnTo>
+                  <a:lnTo>
+                    <a:pt x="230591" y="100159"/>
+                  </a:lnTo>
+                  <a:lnTo>
+                    <a:pt x="241571" y="108296"/>
+                  </a:lnTo>
+                  <a:lnTo>
+                    <a:pt x="252552" y="116585"/>
+                  </a:lnTo>
+                  <a:lnTo>
+                    <a:pt x="263533" y="125005"/>
+                  </a:lnTo>
+                  <a:lnTo>
+                    <a:pt x="274513" y="133537"/>
+                  </a:lnTo>
+                  <a:lnTo>
+                    <a:pt x="285494" y="142159"/>
+                  </a:lnTo>
+                  <a:lnTo>
+                    <a:pt x="296474" y="150852"/>
+                  </a:lnTo>
+                  <a:lnTo>
+                    <a:pt x="307455" y="159595"/>
+                  </a:lnTo>
+                  <a:lnTo>
+                    <a:pt x="318435" y="168368"/>
+                  </a:lnTo>
+                  <a:lnTo>
+                    <a:pt x="329416" y="177152"/>
+                  </a:lnTo>
+                  <a:lnTo>
+                    <a:pt x="340396" y="185925"/>
+                  </a:lnTo>
+                  <a:lnTo>
+                    <a:pt x="351377" y="194669"/>
+                  </a:lnTo>
+                  <a:lnTo>
+                    <a:pt x="362357" y="203361"/>
+                  </a:lnTo>
+                  <a:lnTo>
+                    <a:pt x="373338" y="211983"/>
+                  </a:lnTo>
+                  <a:lnTo>
+                    <a:pt x="384318" y="220515"/>
+                  </a:lnTo>
+                  <a:lnTo>
+                    <a:pt x="395299" y="228935"/>
+                  </a:lnTo>
+                  <a:lnTo>
+                    <a:pt x="406280" y="237224"/>
+                  </a:lnTo>
+                  <a:lnTo>
+                    <a:pt x="417260" y="245361"/>
+                  </a:lnTo>
+                  <a:lnTo>
+                    <a:pt x="428241" y="253327"/>
+                  </a:lnTo>
+                  <a:lnTo>
+                    <a:pt x="439221" y="261102"/>
+                  </a:lnTo>
+                  <a:lnTo>
+                    <a:pt x="450202" y="268664"/>
+                  </a:lnTo>
+                  <a:lnTo>
+                    <a:pt x="461182" y="275994"/>
+                  </a:lnTo>
+                  <a:lnTo>
+                    <a:pt x="472163" y="283071"/>
+                  </a:lnTo>
+                  <a:lnTo>
+                    <a:pt x="483143" y="289877"/>
+                  </a:lnTo>
+                  <a:lnTo>
+                    <a:pt x="494124" y="296389"/>
+                  </a:lnTo>
+                  <a:lnTo>
+                    <a:pt x="505104" y="302588"/>
+                  </a:lnTo>
+                  <a:lnTo>
+                    <a:pt x="516085" y="308455"/>
+                  </a:lnTo>
+                  <a:lnTo>
+                    <a:pt x="527066" y="313968"/>
+                  </a:lnTo>
+                  <a:lnTo>
+                    <a:pt x="538046" y="319108"/>
+                  </a:lnTo>
+                  <a:lnTo>
+                    <a:pt x="549027" y="323853"/>
+                  </a:lnTo>
+                  <a:lnTo>
+                    <a:pt x="560007" y="328186"/>
+                  </a:lnTo>
+                  <a:lnTo>
+                    <a:pt x="570988" y="332084"/>
+                  </a:lnTo>
+                  <a:lnTo>
+                    <a:pt x="581968" y="335527"/>
+                  </a:lnTo>
+                  <a:lnTo>
+                    <a:pt x="592949" y="338497"/>
+                  </a:lnTo>
+                  <a:lnTo>
+                    <a:pt x="603929" y="340971"/>
+                  </a:lnTo>
+                  <a:lnTo>
+                    <a:pt x="614910" y="342931"/>
+                  </a:lnTo>
+                  <a:lnTo>
+                    <a:pt x="625890" y="344356"/>
+                  </a:lnTo>
+                  <a:lnTo>
+                    <a:pt x="636871" y="345226"/>
+                  </a:lnTo>
+                  <a:lnTo>
+                    <a:pt x="647852" y="345521"/>
+                  </a:lnTo>
+                  <a:lnTo>
+                    <a:pt x="647852" y="662248"/>
+                  </a:lnTo>
+                  <a:lnTo>
+                    <a:pt x="636871" y="661954"/>
+                  </a:lnTo>
+                  <a:lnTo>
+                    <a:pt x="625890" y="661084"/>
+                  </a:lnTo>
+                  <a:lnTo>
+                    <a:pt x="614910" y="659659"/>
+                  </a:lnTo>
+                  <a:lnTo>
+                    <a:pt x="603929" y="657699"/>
+                  </a:lnTo>
+                  <a:lnTo>
+                    <a:pt x="592949" y="655224"/>
+                  </a:lnTo>
+                  <a:lnTo>
+                    <a:pt x="581968" y="652255"/>
+                  </a:lnTo>
+                  <a:lnTo>
+                    <a:pt x="570988" y="648811"/>
+                  </a:lnTo>
+                  <a:lnTo>
+                    <a:pt x="560007" y="644913"/>
+                  </a:lnTo>
+                  <a:lnTo>
+                    <a:pt x="549027" y="640581"/>
+                  </a:lnTo>
+                  <a:lnTo>
+                    <a:pt x="538046" y="635835"/>
+                  </a:lnTo>
+                  <a:lnTo>
+                    <a:pt x="527066" y="630696"/>
+                  </a:lnTo>
+                  <a:lnTo>
+                    <a:pt x="516085" y="625182"/>
+                  </a:lnTo>
+                  <a:lnTo>
+                    <a:pt x="505104" y="619316"/>
+                  </a:lnTo>
+                  <a:lnTo>
+                    <a:pt x="494124" y="613117"/>
+                  </a:lnTo>
+                  <a:lnTo>
+                    <a:pt x="483143" y="606604"/>
+                  </a:lnTo>
+                  <a:lnTo>
+                    <a:pt x="472163" y="599799"/>
+                  </a:lnTo>
+                  <a:lnTo>
+                    <a:pt x="461182" y="592721"/>
+                  </a:lnTo>
+                  <a:lnTo>
+                    <a:pt x="450202" y="585391"/>
+                  </a:lnTo>
+                  <a:lnTo>
+                    <a:pt x="439221" y="577829"/>
+                  </a:lnTo>
+                  <a:lnTo>
+                    <a:pt x="428241" y="570055"/>
+                  </a:lnTo>
+                  <a:lnTo>
+                    <a:pt x="417260" y="562089"/>
+                  </a:lnTo>
+                  <a:lnTo>
+                    <a:pt x="406280" y="553951"/>
+                  </a:lnTo>
+                  <a:lnTo>
+                    <a:pt x="395299" y="545662"/>
+                  </a:lnTo>
+                  <a:lnTo>
+                    <a:pt x="384318" y="537242"/>
+                  </a:lnTo>
+                  <a:lnTo>
+                    <a:pt x="373338" y="528711"/>
+                  </a:lnTo>
+                  <a:lnTo>
+                    <a:pt x="362357" y="520089"/>
+                  </a:lnTo>
+                  <a:lnTo>
+                    <a:pt x="351377" y="511396"/>
+                  </a:lnTo>
+                  <a:lnTo>
+                    <a:pt x="340396" y="502653"/>
+                  </a:lnTo>
+                  <a:lnTo>
+                    <a:pt x="329416" y="493879"/>
+                  </a:lnTo>
+                  <a:lnTo>
+                    <a:pt x="318435" y="485096"/>
+                  </a:lnTo>
+                  <a:lnTo>
+                    <a:pt x="307455" y="476322"/>
+                  </a:lnTo>
+                  <a:lnTo>
+                    <a:pt x="296474" y="467579"/>
+                  </a:lnTo>
+                  <a:lnTo>
+                    <a:pt x="285494" y="458886"/>
+                  </a:lnTo>
+                  <a:lnTo>
+                    <a:pt x="274513" y="450264"/>
+                  </a:lnTo>
+                  <a:lnTo>
+                    <a:pt x="263533" y="441733"/>
+                  </a:lnTo>
+                  <a:lnTo>
+                    <a:pt x="252552" y="433313"/>
+                  </a:lnTo>
+                  <a:lnTo>
+                    <a:pt x="241571" y="425024"/>
+                  </a:lnTo>
+                  <a:lnTo>
+                    <a:pt x="230591" y="416886"/>
+                  </a:lnTo>
+                  <a:lnTo>
+                    <a:pt x="219610" y="408920"/>
+                  </a:lnTo>
+                  <a:lnTo>
+                    <a:pt x="208630" y="401146"/>
+                  </a:lnTo>
+                  <a:lnTo>
+                    <a:pt x="197649" y="393584"/>
+                  </a:lnTo>
+                  <a:lnTo>
+                    <a:pt x="186669" y="386254"/>
+                  </a:lnTo>
+                  <a:lnTo>
+                    <a:pt x="175688" y="379176"/>
+                  </a:lnTo>
+                  <a:lnTo>
+                    <a:pt x="164708" y="372371"/>
+                  </a:lnTo>
+                  <a:lnTo>
+                    <a:pt x="153727" y="365859"/>
+                  </a:lnTo>
+                  <a:lnTo>
+                    <a:pt x="142747" y="359659"/>
+                  </a:lnTo>
+                  <a:lnTo>
+                    <a:pt x="131766" y="353793"/>
+                  </a:lnTo>
+                  <a:lnTo>
+                    <a:pt x="120785" y="348280"/>
+                  </a:lnTo>
+                  <a:lnTo>
+                    <a:pt x="109805" y="343140"/>
+                  </a:lnTo>
+                  <a:lnTo>
+                    <a:pt x="98824" y="338394"/>
+                  </a:lnTo>
+                  <a:lnTo>
+                    <a:pt x="87844" y="334062"/>
+                  </a:lnTo>
+                  <a:lnTo>
+                    <a:pt x="76863" y="330164"/>
+                  </a:lnTo>
+                  <a:lnTo>
+                    <a:pt x="65883" y="326720"/>
+                  </a:lnTo>
+                  <a:lnTo>
+                    <a:pt x="54902" y="323751"/>
+                  </a:lnTo>
+                  <a:lnTo>
+                    <a:pt x="43922" y="321276"/>
+                  </a:lnTo>
+                  <a:lnTo>
+                    <a:pt x="32941" y="319316"/>
+                  </a:lnTo>
+                  <a:lnTo>
+                    <a:pt x="21961" y="317891"/>
+                  </a:lnTo>
+                  <a:lnTo>
+                    <a:pt x="10980" y="317022"/>
+                  </a:lnTo>
+                  <a:lnTo>
+                    <a:pt x="0" y="316727"/>
                   </a:lnTo>
                   <a:close/>
                 </a:path>
               </a:pathLst>
             </a:custGeom>
             <a:solidFill>
-              <a:srgbClr val="256F9C">
+              <a:srgbClr val="ADC7EC">
                 <a:alpha val="100000"/>
               </a:srgbClr>
             </a:solidFill>
-            <a:ln w="16260" cap="flat">
-              <a:solidFill>
-                <a:srgbClr val="256F9C">
-                  <a:alpha val="100000"/>
-                </a:srgbClr>
-              </a:solidFill>
-              <a:prstDash val="solid"/>
-              <a:round/>
-            </a:ln>
           </p:spPr>
           <p:txBody>
             <a:bodyPr/>
@@ -2435,37 +3821,388 @@
         </p:sp>
         <p:sp>
           <p:nvSpPr>
-            <p:cNvPr id="8" name="pl7"/>
+            <p:cNvPr id="8" name="pg7"/>
             <p:cNvSpPr/>
             <p:nvPr/>
           </p:nvSpPr>
           <p:spPr>
             <a:xfrm>
-              <a:off x="1234738" y="3806424"/>
-              <a:ext cx="0" cy="881241"/>
+              <a:off x="3600221" y="4129580"/>
+              <a:ext cx="647852" cy="662248"/>
             </a:xfrm>
             <a:custGeom>
               <a:avLst/>
               <a:pathLst>
-                <a:path w="0" h="881241">
+                <a:path w="647852" h="662248">
                   <a:moveTo>
-                    <a:pt x="0" y="0"/>
+                    <a:pt x="0" y="345521"/>
                   </a:moveTo>
                   <a:lnTo>
-                    <a:pt x="0" y="881241"/>
-                  </a:lnTo>
+                    <a:pt x="10980" y="345226"/>
+                  </a:lnTo>
+                  <a:lnTo>
+                    <a:pt x="21961" y="344356"/>
+                  </a:lnTo>
+                  <a:lnTo>
+                    <a:pt x="32941" y="342931"/>
+                  </a:lnTo>
+                  <a:lnTo>
+                    <a:pt x="43922" y="340971"/>
+                  </a:lnTo>
+                  <a:lnTo>
+                    <a:pt x="54902" y="338497"/>
+                  </a:lnTo>
+                  <a:lnTo>
+                    <a:pt x="65883" y="335527"/>
+                  </a:lnTo>
+                  <a:lnTo>
+                    <a:pt x="76863" y="332084"/>
+                  </a:lnTo>
+                  <a:lnTo>
+                    <a:pt x="87844" y="328186"/>
+                  </a:lnTo>
+                  <a:lnTo>
+                    <a:pt x="98824" y="323853"/>
+                  </a:lnTo>
+                  <a:lnTo>
+                    <a:pt x="109805" y="319108"/>
+                  </a:lnTo>
+                  <a:lnTo>
+                    <a:pt x="120785" y="313968"/>
+                  </a:lnTo>
+                  <a:lnTo>
+                    <a:pt x="131766" y="308455"/>
+                  </a:lnTo>
+                  <a:lnTo>
+                    <a:pt x="142747" y="302588"/>
+                  </a:lnTo>
+                  <a:lnTo>
+                    <a:pt x="153727" y="296389"/>
+                  </a:lnTo>
+                  <a:lnTo>
+                    <a:pt x="164708" y="289877"/>
+                  </a:lnTo>
+                  <a:lnTo>
+                    <a:pt x="175688" y="283071"/>
+                  </a:lnTo>
+                  <a:lnTo>
+                    <a:pt x="186669" y="275994"/>
+                  </a:lnTo>
+                  <a:lnTo>
+                    <a:pt x="197649" y="268664"/>
+                  </a:lnTo>
+                  <a:lnTo>
+                    <a:pt x="208630" y="261102"/>
+                  </a:lnTo>
+                  <a:lnTo>
+                    <a:pt x="219610" y="253327"/>
+                  </a:lnTo>
+                  <a:lnTo>
+                    <a:pt x="230591" y="245361"/>
+                  </a:lnTo>
+                  <a:lnTo>
+                    <a:pt x="241571" y="237224"/>
+                  </a:lnTo>
+                  <a:lnTo>
+                    <a:pt x="252552" y="228935"/>
+                  </a:lnTo>
+                  <a:lnTo>
+                    <a:pt x="263533" y="220515"/>
+                  </a:lnTo>
+                  <a:lnTo>
+                    <a:pt x="274513" y="211983"/>
+                  </a:lnTo>
+                  <a:lnTo>
+                    <a:pt x="285494" y="203361"/>
+                  </a:lnTo>
+                  <a:lnTo>
+                    <a:pt x="296474" y="194669"/>
+                  </a:lnTo>
+                  <a:lnTo>
+                    <a:pt x="307455" y="185925"/>
+                  </a:lnTo>
+                  <a:lnTo>
+                    <a:pt x="318435" y="177152"/>
+                  </a:lnTo>
+                  <a:lnTo>
+                    <a:pt x="329416" y="168368"/>
+                  </a:lnTo>
+                  <a:lnTo>
+                    <a:pt x="340396" y="159595"/>
+                  </a:lnTo>
+                  <a:lnTo>
+                    <a:pt x="351377" y="150852"/>
+                  </a:lnTo>
+                  <a:lnTo>
+                    <a:pt x="362357" y="142159"/>
+                  </a:lnTo>
+                  <a:lnTo>
+                    <a:pt x="373338" y="133537"/>
+                  </a:lnTo>
+                  <a:lnTo>
+                    <a:pt x="384318" y="125005"/>
+                  </a:lnTo>
+                  <a:lnTo>
+                    <a:pt x="395299" y="116585"/>
+                  </a:lnTo>
+                  <a:lnTo>
+                    <a:pt x="406280" y="108296"/>
+                  </a:lnTo>
+                  <a:lnTo>
+                    <a:pt x="417260" y="100159"/>
+                  </a:lnTo>
+                  <a:lnTo>
+                    <a:pt x="428241" y="92193"/>
+                  </a:lnTo>
+                  <a:lnTo>
+                    <a:pt x="439221" y="84419"/>
+                  </a:lnTo>
+                  <a:lnTo>
+                    <a:pt x="450202" y="76856"/>
+                  </a:lnTo>
+                  <a:lnTo>
+                    <a:pt x="461182" y="69526"/>
+                  </a:lnTo>
+                  <a:lnTo>
+                    <a:pt x="472163" y="62449"/>
+                  </a:lnTo>
+                  <a:lnTo>
+                    <a:pt x="483143" y="55644"/>
+                  </a:lnTo>
+                  <a:lnTo>
+                    <a:pt x="494124" y="49131"/>
+                  </a:lnTo>
+                  <a:lnTo>
+                    <a:pt x="505104" y="42932"/>
+                  </a:lnTo>
+                  <a:lnTo>
+                    <a:pt x="516085" y="37065"/>
+                  </a:lnTo>
+                  <a:lnTo>
+                    <a:pt x="527066" y="31552"/>
+                  </a:lnTo>
+                  <a:lnTo>
+                    <a:pt x="538046" y="26413"/>
+                  </a:lnTo>
+                  <a:lnTo>
+                    <a:pt x="549027" y="21667"/>
+                  </a:lnTo>
+                  <a:lnTo>
+                    <a:pt x="560007" y="17335"/>
+                  </a:lnTo>
+                  <a:lnTo>
+                    <a:pt x="570988" y="13436"/>
+                  </a:lnTo>
+                  <a:lnTo>
+                    <a:pt x="581968" y="9993"/>
+                  </a:lnTo>
+                  <a:lnTo>
+                    <a:pt x="592949" y="7023"/>
+                  </a:lnTo>
+                  <a:lnTo>
+                    <a:pt x="603929" y="4549"/>
+                  </a:lnTo>
+                  <a:lnTo>
+                    <a:pt x="614910" y="2589"/>
+                  </a:lnTo>
+                  <a:lnTo>
+                    <a:pt x="625890" y="1164"/>
+                  </a:lnTo>
+                  <a:lnTo>
+                    <a:pt x="636871" y="294"/>
+                  </a:lnTo>
+                  <a:lnTo>
+                    <a:pt x="647852" y="0"/>
+                  </a:lnTo>
+                  <a:lnTo>
+                    <a:pt x="647852" y="316727"/>
+                  </a:lnTo>
+                  <a:lnTo>
+                    <a:pt x="636871" y="317022"/>
+                  </a:lnTo>
+                  <a:lnTo>
+                    <a:pt x="625890" y="317891"/>
+                  </a:lnTo>
+                  <a:lnTo>
+                    <a:pt x="614910" y="319316"/>
+                  </a:lnTo>
+                  <a:lnTo>
+                    <a:pt x="603929" y="321276"/>
+                  </a:lnTo>
+                  <a:lnTo>
+                    <a:pt x="592949" y="323751"/>
+                  </a:lnTo>
+                  <a:lnTo>
+                    <a:pt x="581968" y="326720"/>
+                  </a:lnTo>
+                  <a:lnTo>
+                    <a:pt x="570988" y="330164"/>
+                  </a:lnTo>
+                  <a:lnTo>
+                    <a:pt x="560007" y="334062"/>
+                  </a:lnTo>
+                  <a:lnTo>
+                    <a:pt x="549027" y="338394"/>
+                  </a:lnTo>
+                  <a:lnTo>
+                    <a:pt x="538046" y="343140"/>
+                  </a:lnTo>
+                  <a:lnTo>
+                    <a:pt x="527066" y="348280"/>
+                  </a:lnTo>
+                  <a:lnTo>
+                    <a:pt x="516085" y="353793"/>
+                  </a:lnTo>
+                  <a:lnTo>
+                    <a:pt x="505104" y="359659"/>
+                  </a:lnTo>
+                  <a:lnTo>
+                    <a:pt x="494124" y="365859"/>
+                  </a:lnTo>
+                  <a:lnTo>
+                    <a:pt x="483143" y="372371"/>
+                  </a:lnTo>
+                  <a:lnTo>
+                    <a:pt x="472163" y="379176"/>
+                  </a:lnTo>
+                  <a:lnTo>
+                    <a:pt x="461182" y="386254"/>
+                  </a:lnTo>
+                  <a:lnTo>
+                    <a:pt x="450202" y="393584"/>
+                  </a:lnTo>
+                  <a:lnTo>
+                    <a:pt x="439221" y="401146"/>
+                  </a:lnTo>
+                  <a:lnTo>
+                    <a:pt x="428241" y="408920"/>
+                  </a:lnTo>
+                  <a:lnTo>
+                    <a:pt x="417260" y="416886"/>
+                  </a:lnTo>
+                  <a:lnTo>
+                    <a:pt x="406280" y="425024"/>
+                  </a:lnTo>
+                  <a:lnTo>
+                    <a:pt x="395299" y="433313"/>
+                  </a:lnTo>
+                  <a:lnTo>
+                    <a:pt x="384318" y="441733"/>
+                  </a:lnTo>
+                  <a:lnTo>
+                    <a:pt x="373338" y="450264"/>
+                  </a:lnTo>
+                  <a:lnTo>
+                    <a:pt x="362357" y="458886"/>
+                  </a:lnTo>
+                  <a:lnTo>
+                    <a:pt x="351377" y="467579"/>
+                  </a:lnTo>
+                  <a:lnTo>
+                    <a:pt x="340396" y="476322"/>
+                  </a:lnTo>
+                  <a:lnTo>
+                    <a:pt x="329416" y="485096"/>
+                  </a:lnTo>
+                  <a:lnTo>
+                    <a:pt x="318435" y="493879"/>
+                  </a:lnTo>
+                  <a:lnTo>
+                    <a:pt x="307455" y="502653"/>
+                  </a:lnTo>
+                  <a:lnTo>
+                    <a:pt x="296474" y="511396"/>
+                  </a:lnTo>
+                  <a:lnTo>
+                    <a:pt x="285494" y="520089"/>
+                  </a:lnTo>
+                  <a:lnTo>
+                    <a:pt x="274513" y="528711"/>
+                  </a:lnTo>
+                  <a:lnTo>
+                    <a:pt x="263533" y="537242"/>
+                  </a:lnTo>
+                  <a:lnTo>
+                    <a:pt x="252552" y="545662"/>
+                  </a:lnTo>
+                  <a:lnTo>
+                    <a:pt x="241571" y="553951"/>
+                  </a:lnTo>
+                  <a:lnTo>
+                    <a:pt x="230591" y="562089"/>
+                  </a:lnTo>
+                  <a:lnTo>
+                    <a:pt x="219610" y="570055"/>
+                  </a:lnTo>
+                  <a:lnTo>
+                    <a:pt x="208630" y="577829"/>
+                  </a:lnTo>
+                  <a:lnTo>
+                    <a:pt x="197649" y="585391"/>
+                  </a:lnTo>
+                  <a:lnTo>
+                    <a:pt x="186669" y="592721"/>
+                  </a:lnTo>
+                  <a:lnTo>
+                    <a:pt x="175688" y="599799"/>
+                  </a:lnTo>
+                  <a:lnTo>
+                    <a:pt x="164708" y="606604"/>
+                  </a:lnTo>
+                  <a:lnTo>
+                    <a:pt x="153727" y="613117"/>
+                  </a:lnTo>
+                  <a:lnTo>
+                    <a:pt x="142747" y="619316"/>
+                  </a:lnTo>
+                  <a:lnTo>
+                    <a:pt x="131766" y="625182"/>
+                  </a:lnTo>
+                  <a:lnTo>
+                    <a:pt x="120785" y="630696"/>
+                  </a:lnTo>
+                  <a:lnTo>
+                    <a:pt x="109805" y="635835"/>
+                  </a:lnTo>
+                  <a:lnTo>
+                    <a:pt x="98824" y="640581"/>
+                  </a:lnTo>
+                  <a:lnTo>
+                    <a:pt x="87844" y="644913"/>
+                  </a:lnTo>
+                  <a:lnTo>
+                    <a:pt x="76863" y="648811"/>
+                  </a:lnTo>
+                  <a:lnTo>
+                    <a:pt x="65883" y="652255"/>
+                  </a:lnTo>
+                  <a:lnTo>
+                    <a:pt x="54902" y="655224"/>
+                  </a:lnTo>
+                  <a:lnTo>
+                    <a:pt x="43922" y="657699"/>
+                  </a:lnTo>
+                  <a:lnTo>
+                    <a:pt x="32941" y="659659"/>
+                  </a:lnTo>
+                  <a:lnTo>
+                    <a:pt x="21961" y="661084"/>
+                  </a:lnTo>
+                  <a:lnTo>
+                    <a:pt x="10980" y="661954"/>
+                  </a:lnTo>
+                  <a:lnTo>
+                    <a:pt x="0" y="662248"/>
+                  </a:lnTo>
+                  <a:close/>
                 </a:path>
               </a:pathLst>
             </a:custGeom>
-            <a:ln w="16260" cap="flat">
-              <a:solidFill>
-                <a:srgbClr val="256F9C">
-                  <a:alpha val="100000"/>
-                </a:srgbClr>
-              </a:solidFill>
-              <a:prstDash val="solid"/>
-              <a:round/>
-            </a:ln>
+            <a:solidFill>
+              <a:srgbClr val="F4C1A6">
+                <a:alpha val="100000"/>
+              </a:srgbClr>
+            </a:solidFill>
           </p:spPr>
           <p:txBody>
             <a:bodyPr/>
@@ -2481,40 +4218,382 @@
           </p:nvSpPr>
           <p:spPr>
             <a:xfrm>
-              <a:off x="1195138" y="4619076"/>
-              <a:ext cx="79200" cy="68589"/>
+              <a:off x="3600221" y="4863813"/>
+              <a:ext cx="647852" cy="662248"/>
             </a:xfrm>
             <a:custGeom>
               <a:avLst/>
               <a:pathLst>
-                <a:path w="79200" h="68589">
+                <a:path w="647852" h="662248">
                   <a:moveTo>
                     <a:pt x="0" y="0"/>
                   </a:moveTo>
                   <a:lnTo>
-                    <a:pt x="39600" y="68589"/>
-                  </a:lnTo>
-                  <a:lnTo>
-                    <a:pt x="79200" y="0"/>
+                    <a:pt x="10980" y="294"/>
+                  </a:lnTo>
+                  <a:lnTo>
+                    <a:pt x="21961" y="1164"/>
+                  </a:lnTo>
+                  <a:lnTo>
+                    <a:pt x="32941" y="2589"/>
+                  </a:lnTo>
+                  <a:lnTo>
+                    <a:pt x="43922" y="4549"/>
+                  </a:lnTo>
+                  <a:lnTo>
+                    <a:pt x="54902" y="7023"/>
+                  </a:lnTo>
+                  <a:lnTo>
+                    <a:pt x="65883" y="9993"/>
+                  </a:lnTo>
+                  <a:lnTo>
+                    <a:pt x="76863" y="13436"/>
+                  </a:lnTo>
+                  <a:lnTo>
+                    <a:pt x="87844" y="17335"/>
+                  </a:lnTo>
+                  <a:lnTo>
+                    <a:pt x="98824" y="21667"/>
+                  </a:lnTo>
+                  <a:lnTo>
+                    <a:pt x="109805" y="26413"/>
+                  </a:lnTo>
+                  <a:lnTo>
+                    <a:pt x="120785" y="31552"/>
+                  </a:lnTo>
+                  <a:lnTo>
+                    <a:pt x="131766" y="37065"/>
+                  </a:lnTo>
+                  <a:lnTo>
+                    <a:pt x="142747" y="42932"/>
+                  </a:lnTo>
+                  <a:lnTo>
+                    <a:pt x="153727" y="49131"/>
+                  </a:lnTo>
+                  <a:lnTo>
+                    <a:pt x="164708" y="55644"/>
+                  </a:lnTo>
+                  <a:lnTo>
+                    <a:pt x="175688" y="62449"/>
+                  </a:lnTo>
+                  <a:lnTo>
+                    <a:pt x="186669" y="69526"/>
+                  </a:lnTo>
+                  <a:lnTo>
+                    <a:pt x="197649" y="76856"/>
+                  </a:lnTo>
+                  <a:lnTo>
+                    <a:pt x="208630" y="84419"/>
+                  </a:lnTo>
+                  <a:lnTo>
+                    <a:pt x="219610" y="92193"/>
+                  </a:lnTo>
+                  <a:lnTo>
+                    <a:pt x="230591" y="100159"/>
+                  </a:lnTo>
+                  <a:lnTo>
+                    <a:pt x="241571" y="108296"/>
+                  </a:lnTo>
+                  <a:lnTo>
+                    <a:pt x="252552" y="116585"/>
+                  </a:lnTo>
+                  <a:lnTo>
+                    <a:pt x="263533" y="125005"/>
+                  </a:lnTo>
+                  <a:lnTo>
+                    <a:pt x="274513" y="133537"/>
+                  </a:lnTo>
+                  <a:lnTo>
+                    <a:pt x="285494" y="142159"/>
+                  </a:lnTo>
+                  <a:lnTo>
+                    <a:pt x="296474" y="150852"/>
+                  </a:lnTo>
+                  <a:lnTo>
+                    <a:pt x="307455" y="159595"/>
+                  </a:lnTo>
+                  <a:lnTo>
+                    <a:pt x="318435" y="168368"/>
+                  </a:lnTo>
+                  <a:lnTo>
+                    <a:pt x="329416" y="177152"/>
+                  </a:lnTo>
+                  <a:lnTo>
+                    <a:pt x="340396" y="185925"/>
+                  </a:lnTo>
+                  <a:lnTo>
+                    <a:pt x="351377" y="194669"/>
+                  </a:lnTo>
+                  <a:lnTo>
+                    <a:pt x="362357" y="203361"/>
+                  </a:lnTo>
+                  <a:lnTo>
+                    <a:pt x="373338" y="211983"/>
+                  </a:lnTo>
+                  <a:lnTo>
+                    <a:pt x="384318" y="220515"/>
+                  </a:lnTo>
+                  <a:lnTo>
+                    <a:pt x="395299" y="228935"/>
+                  </a:lnTo>
+                  <a:lnTo>
+                    <a:pt x="406280" y="237224"/>
+                  </a:lnTo>
+                  <a:lnTo>
+                    <a:pt x="417260" y="245361"/>
+                  </a:lnTo>
+                  <a:lnTo>
+                    <a:pt x="428241" y="253327"/>
+                  </a:lnTo>
+                  <a:lnTo>
+                    <a:pt x="439221" y="261102"/>
+                  </a:lnTo>
+                  <a:lnTo>
+                    <a:pt x="450202" y="268664"/>
+                  </a:lnTo>
+                  <a:lnTo>
+                    <a:pt x="461182" y="275994"/>
+                  </a:lnTo>
+                  <a:lnTo>
+                    <a:pt x="472163" y="283071"/>
+                  </a:lnTo>
+                  <a:lnTo>
+                    <a:pt x="483143" y="289877"/>
+                  </a:lnTo>
+                  <a:lnTo>
+                    <a:pt x="494124" y="296389"/>
+                  </a:lnTo>
+                  <a:lnTo>
+                    <a:pt x="505104" y="302588"/>
+                  </a:lnTo>
+                  <a:lnTo>
+                    <a:pt x="516085" y="308455"/>
+                  </a:lnTo>
+                  <a:lnTo>
+                    <a:pt x="527066" y="313968"/>
+                  </a:lnTo>
+                  <a:lnTo>
+                    <a:pt x="538046" y="319108"/>
+                  </a:lnTo>
+                  <a:lnTo>
+                    <a:pt x="549027" y="323853"/>
+                  </a:lnTo>
+                  <a:lnTo>
+                    <a:pt x="560007" y="328186"/>
+                  </a:lnTo>
+                  <a:lnTo>
+                    <a:pt x="570988" y="332084"/>
+                  </a:lnTo>
+                  <a:lnTo>
+                    <a:pt x="581968" y="335527"/>
+                  </a:lnTo>
+                  <a:lnTo>
+                    <a:pt x="592949" y="338497"/>
+                  </a:lnTo>
+                  <a:lnTo>
+                    <a:pt x="603929" y="340971"/>
+                  </a:lnTo>
+                  <a:lnTo>
+                    <a:pt x="614910" y="342931"/>
+                  </a:lnTo>
+                  <a:lnTo>
+                    <a:pt x="625890" y="344356"/>
+                  </a:lnTo>
+                  <a:lnTo>
+                    <a:pt x="636871" y="345226"/>
+                  </a:lnTo>
+                  <a:lnTo>
+                    <a:pt x="647852" y="345521"/>
+                  </a:lnTo>
+                  <a:lnTo>
+                    <a:pt x="647852" y="662248"/>
+                  </a:lnTo>
+                  <a:lnTo>
+                    <a:pt x="636871" y="661954"/>
+                  </a:lnTo>
+                  <a:lnTo>
+                    <a:pt x="625890" y="661084"/>
+                  </a:lnTo>
+                  <a:lnTo>
+                    <a:pt x="614910" y="659659"/>
+                  </a:lnTo>
+                  <a:lnTo>
+                    <a:pt x="603929" y="657699"/>
+                  </a:lnTo>
+                  <a:lnTo>
+                    <a:pt x="592949" y="655224"/>
+                  </a:lnTo>
+                  <a:lnTo>
+                    <a:pt x="581968" y="652255"/>
+                  </a:lnTo>
+                  <a:lnTo>
+                    <a:pt x="570988" y="648811"/>
+                  </a:lnTo>
+                  <a:lnTo>
+                    <a:pt x="560007" y="644913"/>
+                  </a:lnTo>
+                  <a:lnTo>
+                    <a:pt x="549027" y="640581"/>
+                  </a:lnTo>
+                  <a:lnTo>
+                    <a:pt x="538046" y="635835"/>
+                  </a:lnTo>
+                  <a:lnTo>
+                    <a:pt x="527066" y="630696"/>
+                  </a:lnTo>
+                  <a:lnTo>
+                    <a:pt x="516085" y="625182"/>
+                  </a:lnTo>
+                  <a:lnTo>
+                    <a:pt x="505104" y="619316"/>
+                  </a:lnTo>
+                  <a:lnTo>
+                    <a:pt x="494124" y="613117"/>
+                  </a:lnTo>
+                  <a:lnTo>
+                    <a:pt x="483143" y="606604"/>
+                  </a:lnTo>
+                  <a:lnTo>
+                    <a:pt x="472163" y="599799"/>
+                  </a:lnTo>
+                  <a:lnTo>
+                    <a:pt x="461182" y="592721"/>
+                  </a:lnTo>
+                  <a:lnTo>
+                    <a:pt x="450202" y="585391"/>
+                  </a:lnTo>
+                  <a:lnTo>
+                    <a:pt x="439221" y="577829"/>
+                  </a:lnTo>
+                  <a:lnTo>
+                    <a:pt x="428241" y="570055"/>
+                  </a:lnTo>
+                  <a:lnTo>
+                    <a:pt x="417260" y="562089"/>
+                  </a:lnTo>
+                  <a:lnTo>
+                    <a:pt x="406280" y="553951"/>
+                  </a:lnTo>
+                  <a:lnTo>
+                    <a:pt x="395299" y="545662"/>
+                  </a:lnTo>
+                  <a:lnTo>
+                    <a:pt x="384318" y="537242"/>
+                  </a:lnTo>
+                  <a:lnTo>
+                    <a:pt x="373338" y="528711"/>
+                  </a:lnTo>
+                  <a:lnTo>
+                    <a:pt x="362357" y="520089"/>
+                  </a:lnTo>
+                  <a:lnTo>
+                    <a:pt x="351377" y="511396"/>
+                  </a:lnTo>
+                  <a:lnTo>
+                    <a:pt x="340396" y="502653"/>
+                  </a:lnTo>
+                  <a:lnTo>
+                    <a:pt x="329416" y="493879"/>
+                  </a:lnTo>
+                  <a:lnTo>
+                    <a:pt x="318435" y="485096"/>
+                  </a:lnTo>
+                  <a:lnTo>
+                    <a:pt x="307455" y="476322"/>
+                  </a:lnTo>
+                  <a:lnTo>
+                    <a:pt x="296474" y="467579"/>
+                  </a:lnTo>
+                  <a:lnTo>
+                    <a:pt x="285494" y="458886"/>
+                  </a:lnTo>
+                  <a:lnTo>
+                    <a:pt x="274513" y="450264"/>
+                  </a:lnTo>
+                  <a:lnTo>
+                    <a:pt x="263533" y="441733"/>
+                  </a:lnTo>
+                  <a:lnTo>
+                    <a:pt x="252552" y="433313"/>
+                  </a:lnTo>
+                  <a:lnTo>
+                    <a:pt x="241571" y="425024"/>
+                  </a:lnTo>
+                  <a:lnTo>
+                    <a:pt x="230591" y="416886"/>
+                  </a:lnTo>
+                  <a:lnTo>
+                    <a:pt x="219610" y="408920"/>
+                  </a:lnTo>
+                  <a:lnTo>
+                    <a:pt x="208630" y="401146"/>
+                  </a:lnTo>
+                  <a:lnTo>
+                    <a:pt x="197649" y="393584"/>
+                  </a:lnTo>
+                  <a:lnTo>
+                    <a:pt x="186669" y="386254"/>
+                  </a:lnTo>
+                  <a:lnTo>
+                    <a:pt x="175688" y="379176"/>
+                  </a:lnTo>
+                  <a:lnTo>
+                    <a:pt x="164708" y="372371"/>
+                  </a:lnTo>
+                  <a:lnTo>
+                    <a:pt x="153727" y="365859"/>
+                  </a:lnTo>
+                  <a:lnTo>
+                    <a:pt x="142747" y="359659"/>
+                  </a:lnTo>
+                  <a:lnTo>
+                    <a:pt x="131766" y="353793"/>
+                  </a:lnTo>
+                  <a:lnTo>
+                    <a:pt x="120785" y="348280"/>
+                  </a:lnTo>
+                  <a:lnTo>
+                    <a:pt x="109805" y="343140"/>
+                  </a:lnTo>
+                  <a:lnTo>
+                    <a:pt x="98824" y="338394"/>
+                  </a:lnTo>
+                  <a:lnTo>
+                    <a:pt x="87844" y="334062"/>
+                  </a:lnTo>
+                  <a:lnTo>
+                    <a:pt x="76863" y="330164"/>
+                  </a:lnTo>
+                  <a:lnTo>
+                    <a:pt x="65883" y="326720"/>
+                  </a:lnTo>
+                  <a:lnTo>
+                    <a:pt x="54902" y="323751"/>
+                  </a:lnTo>
+                  <a:lnTo>
+                    <a:pt x="43922" y="321276"/>
+                  </a:lnTo>
+                  <a:lnTo>
+                    <a:pt x="32941" y="319316"/>
+                  </a:lnTo>
+                  <a:lnTo>
+                    <a:pt x="21961" y="317891"/>
+                  </a:lnTo>
+                  <a:lnTo>
+                    <a:pt x="10980" y="317022"/>
+                  </a:lnTo>
+                  <a:lnTo>
+                    <a:pt x="0" y="316727"/>
                   </a:lnTo>
                   <a:close/>
                 </a:path>
               </a:pathLst>
             </a:custGeom>
             <a:solidFill>
-              <a:srgbClr val="256F9C">
+              <a:srgbClr val="B4D6AF">
                 <a:alpha val="100000"/>
               </a:srgbClr>
             </a:solidFill>
-            <a:ln w="16260" cap="flat">
-              <a:solidFill>
-                <a:srgbClr val="256F9C">
-                  <a:alpha val="100000"/>
-                </a:srgbClr>
-              </a:solidFill>
-              <a:prstDash val="solid"/>
-              <a:round/>
-            </a:ln>
           </p:spPr>
           <p:txBody>
             <a:bodyPr/>
@@ -2524,37 +4603,388 @@
         </p:sp>
         <p:sp>
           <p:nvSpPr>
-            <p:cNvPr id="10" name="pl9"/>
+            <p:cNvPr id="10" name="pg9"/>
             <p:cNvSpPr/>
             <p:nvPr/>
           </p:nvSpPr>
           <p:spPr>
             <a:xfrm>
-              <a:off x="2523384" y="3806424"/>
-              <a:ext cx="0" cy="881241"/>
+              <a:off x="5543778" y="1970074"/>
+              <a:ext cx="575868" cy="316727"/>
             </a:xfrm>
             <a:custGeom>
               <a:avLst/>
               <a:pathLst>
-                <a:path w="0" h="881241">
+                <a:path w="575868" h="316727">
                   <a:moveTo>
                     <a:pt x="0" y="0"/>
                   </a:moveTo>
                   <a:lnTo>
-                    <a:pt x="0" y="881241"/>
-                  </a:lnTo>
+                    <a:pt x="9760" y="0"/>
+                  </a:lnTo>
+                  <a:lnTo>
+                    <a:pt x="19520" y="0"/>
+                  </a:lnTo>
+                  <a:lnTo>
+                    <a:pt x="29281" y="0"/>
+                  </a:lnTo>
+                  <a:lnTo>
+                    <a:pt x="39041" y="0"/>
+                  </a:lnTo>
+                  <a:lnTo>
+                    <a:pt x="48802" y="0"/>
+                  </a:lnTo>
+                  <a:lnTo>
+                    <a:pt x="58562" y="0"/>
+                  </a:lnTo>
+                  <a:lnTo>
+                    <a:pt x="68323" y="0"/>
+                  </a:lnTo>
+                  <a:lnTo>
+                    <a:pt x="78083" y="0"/>
+                  </a:lnTo>
+                  <a:lnTo>
+                    <a:pt x="87844" y="0"/>
+                  </a:lnTo>
+                  <a:lnTo>
+                    <a:pt x="97604" y="0"/>
+                  </a:lnTo>
+                  <a:lnTo>
+                    <a:pt x="107365" y="0"/>
+                  </a:lnTo>
+                  <a:lnTo>
+                    <a:pt x="117125" y="0"/>
+                  </a:lnTo>
+                  <a:lnTo>
+                    <a:pt x="126886" y="0"/>
+                  </a:lnTo>
+                  <a:lnTo>
+                    <a:pt x="136646" y="0"/>
+                  </a:lnTo>
+                  <a:lnTo>
+                    <a:pt x="146407" y="0"/>
+                  </a:lnTo>
+                  <a:lnTo>
+                    <a:pt x="156167" y="0"/>
+                  </a:lnTo>
+                  <a:lnTo>
+                    <a:pt x="165928" y="0"/>
+                  </a:lnTo>
+                  <a:lnTo>
+                    <a:pt x="175688" y="0"/>
+                  </a:lnTo>
+                  <a:lnTo>
+                    <a:pt x="185449" y="0"/>
+                  </a:lnTo>
+                  <a:lnTo>
+                    <a:pt x="195209" y="0"/>
+                  </a:lnTo>
+                  <a:lnTo>
+                    <a:pt x="204970" y="0"/>
+                  </a:lnTo>
+                  <a:lnTo>
+                    <a:pt x="214730" y="0"/>
+                  </a:lnTo>
+                  <a:lnTo>
+                    <a:pt x="224491" y="0"/>
+                  </a:lnTo>
+                  <a:lnTo>
+                    <a:pt x="234251" y="0"/>
+                  </a:lnTo>
+                  <a:lnTo>
+                    <a:pt x="244012" y="0"/>
+                  </a:lnTo>
+                  <a:lnTo>
+                    <a:pt x="253772" y="0"/>
+                  </a:lnTo>
+                  <a:lnTo>
+                    <a:pt x="263533" y="0"/>
+                  </a:lnTo>
+                  <a:lnTo>
+                    <a:pt x="273293" y="0"/>
+                  </a:lnTo>
+                  <a:lnTo>
+                    <a:pt x="283053" y="0"/>
+                  </a:lnTo>
+                  <a:lnTo>
+                    <a:pt x="292814" y="0"/>
+                  </a:lnTo>
+                  <a:lnTo>
+                    <a:pt x="302574" y="0"/>
+                  </a:lnTo>
+                  <a:lnTo>
+                    <a:pt x="312335" y="0"/>
+                  </a:lnTo>
+                  <a:lnTo>
+                    <a:pt x="322095" y="0"/>
+                  </a:lnTo>
+                  <a:lnTo>
+                    <a:pt x="331856" y="0"/>
+                  </a:lnTo>
+                  <a:lnTo>
+                    <a:pt x="341616" y="0"/>
+                  </a:lnTo>
+                  <a:lnTo>
+                    <a:pt x="351377" y="0"/>
+                  </a:lnTo>
+                  <a:lnTo>
+                    <a:pt x="361137" y="0"/>
+                  </a:lnTo>
+                  <a:lnTo>
+                    <a:pt x="370898" y="0"/>
+                  </a:lnTo>
+                  <a:lnTo>
+                    <a:pt x="380658" y="0"/>
+                  </a:lnTo>
+                  <a:lnTo>
+                    <a:pt x="390419" y="0"/>
+                  </a:lnTo>
+                  <a:lnTo>
+                    <a:pt x="400179" y="0"/>
+                  </a:lnTo>
+                  <a:lnTo>
+                    <a:pt x="409940" y="0"/>
+                  </a:lnTo>
+                  <a:lnTo>
+                    <a:pt x="419700" y="0"/>
+                  </a:lnTo>
+                  <a:lnTo>
+                    <a:pt x="429461" y="0"/>
+                  </a:lnTo>
+                  <a:lnTo>
+                    <a:pt x="439221" y="0"/>
+                  </a:lnTo>
+                  <a:lnTo>
+                    <a:pt x="448982" y="0"/>
+                  </a:lnTo>
+                  <a:lnTo>
+                    <a:pt x="458742" y="0"/>
+                  </a:lnTo>
+                  <a:lnTo>
+                    <a:pt x="468503" y="0"/>
+                  </a:lnTo>
+                  <a:lnTo>
+                    <a:pt x="478263" y="0"/>
+                  </a:lnTo>
+                  <a:lnTo>
+                    <a:pt x="488024" y="0"/>
+                  </a:lnTo>
+                  <a:lnTo>
+                    <a:pt x="497784" y="0"/>
+                  </a:lnTo>
+                  <a:lnTo>
+                    <a:pt x="507545" y="0"/>
+                  </a:lnTo>
+                  <a:lnTo>
+                    <a:pt x="517305" y="0"/>
+                  </a:lnTo>
+                  <a:lnTo>
+                    <a:pt x="527066" y="0"/>
+                  </a:lnTo>
+                  <a:lnTo>
+                    <a:pt x="536826" y="0"/>
+                  </a:lnTo>
+                  <a:lnTo>
+                    <a:pt x="546587" y="0"/>
+                  </a:lnTo>
+                  <a:lnTo>
+                    <a:pt x="556347" y="0"/>
+                  </a:lnTo>
+                  <a:lnTo>
+                    <a:pt x="566107" y="0"/>
+                  </a:lnTo>
+                  <a:lnTo>
+                    <a:pt x="575868" y="0"/>
+                  </a:lnTo>
+                  <a:lnTo>
+                    <a:pt x="575868" y="316727"/>
+                  </a:lnTo>
+                  <a:lnTo>
+                    <a:pt x="566107" y="316727"/>
+                  </a:lnTo>
+                  <a:lnTo>
+                    <a:pt x="556347" y="316727"/>
+                  </a:lnTo>
+                  <a:lnTo>
+                    <a:pt x="546587" y="316727"/>
+                  </a:lnTo>
+                  <a:lnTo>
+                    <a:pt x="536826" y="316727"/>
+                  </a:lnTo>
+                  <a:lnTo>
+                    <a:pt x="527066" y="316727"/>
+                  </a:lnTo>
+                  <a:lnTo>
+                    <a:pt x="517305" y="316727"/>
+                  </a:lnTo>
+                  <a:lnTo>
+                    <a:pt x="507545" y="316727"/>
+                  </a:lnTo>
+                  <a:lnTo>
+                    <a:pt x="497784" y="316727"/>
+                  </a:lnTo>
+                  <a:lnTo>
+                    <a:pt x="488024" y="316727"/>
+                  </a:lnTo>
+                  <a:lnTo>
+                    <a:pt x="478263" y="316727"/>
+                  </a:lnTo>
+                  <a:lnTo>
+                    <a:pt x="468503" y="316727"/>
+                  </a:lnTo>
+                  <a:lnTo>
+                    <a:pt x="458742" y="316727"/>
+                  </a:lnTo>
+                  <a:lnTo>
+                    <a:pt x="448982" y="316727"/>
+                  </a:lnTo>
+                  <a:lnTo>
+                    <a:pt x="439221" y="316727"/>
+                  </a:lnTo>
+                  <a:lnTo>
+                    <a:pt x="429461" y="316727"/>
+                  </a:lnTo>
+                  <a:lnTo>
+                    <a:pt x="419700" y="316727"/>
+                  </a:lnTo>
+                  <a:lnTo>
+                    <a:pt x="409940" y="316727"/>
+                  </a:lnTo>
+                  <a:lnTo>
+                    <a:pt x="400179" y="316727"/>
+                  </a:lnTo>
+                  <a:lnTo>
+                    <a:pt x="390419" y="316727"/>
+                  </a:lnTo>
+                  <a:lnTo>
+                    <a:pt x="380658" y="316727"/>
+                  </a:lnTo>
+                  <a:lnTo>
+                    <a:pt x="370898" y="316727"/>
+                  </a:lnTo>
+                  <a:lnTo>
+                    <a:pt x="361137" y="316727"/>
+                  </a:lnTo>
+                  <a:lnTo>
+                    <a:pt x="351377" y="316727"/>
+                  </a:lnTo>
+                  <a:lnTo>
+                    <a:pt x="341616" y="316727"/>
+                  </a:lnTo>
+                  <a:lnTo>
+                    <a:pt x="331856" y="316727"/>
+                  </a:lnTo>
+                  <a:lnTo>
+                    <a:pt x="322095" y="316727"/>
+                  </a:lnTo>
+                  <a:lnTo>
+                    <a:pt x="312335" y="316727"/>
+                  </a:lnTo>
+                  <a:lnTo>
+                    <a:pt x="302574" y="316727"/>
+                  </a:lnTo>
+                  <a:lnTo>
+                    <a:pt x="292814" y="316727"/>
+                  </a:lnTo>
+                  <a:lnTo>
+                    <a:pt x="283053" y="316727"/>
+                  </a:lnTo>
+                  <a:lnTo>
+                    <a:pt x="273293" y="316727"/>
+                  </a:lnTo>
+                  <a:lnTo>
+                    <a:pt x="263533" y="316727"/>
+                  </a:lnTo>
+                  <a:lnTo>
+                    <a:pt x="253772" y="316727"/>
+                  </a:lnTo>
+                  <a:lnTo>
+                    <a:pt x="244012" y="316727"/>
+                  </a:lnTo>
+                  <a:lnTo>
+                    <a:pt x="234251" y="316727"/>
+                  </a:lnTo>
+                  <a:lnTo>
+                    <a:pt x="224491" y="316727"/>
+                  </a:lnTo>
+                  <a:lnTo>
+                    <a:pt x="214730" y="316727"/>
+                  </a:lnTo>
+                  <a:lnTo>
+                    <a:pt x="204970" y="316727"/>
+                  </a:lnTo>
+                  <a:lnTo>
+                    <a:pt x="195209" y="316727"/>
+                  </a:lnTo>
+                  <a:lnTo>
+                    <a:pt x="185449" y="316727"/>
+                  </a:lnTo>
+                  <a:lnTo>
+                    <a:pt x="175688" y="316727"/>
+                  </a:lnTo>
+                  <a:lnTo>
+                    <a:pt x="165928" y="316727"/>
+                  </a:lnTo>
+                  <a:lnTo>
+                    <a:pt x="156167" y="316727"/>
+                  </a:lnTo>
+                  <a:lnTo>
+                    <a:pt x="146407" y="316727"/>
+                  </a:lnTo>
+                  <a:lnTo>
+                    <a:pt x="136646" y="316727"/>
+                  </a:lnTo>
+                  <a:lnTo>
+                    <a:pt x="126886" y="316727"/>
+                  </a:lnTo>
+                  <a:lnTo>
+                    <a:pt x="117125" y="316727"/>
+                  </a:lnTo>
+                  <a:lnTo>
+                    <a:pt x="107365" y="316727"/>
+                  </a:lnTo>
+                  <a:lnTo>
+                    <a:pt x="97604" y="316727"/>
+                  </a:lnTo>
+                  <a:lnTo>
+                    <a:pt x="87844" y="316727"/>
+                  </a:lnTo>
+                  <a:lnTo>
+                    <a:pt x="78083" y="316727"/>
+                  </a:lnTo>
+                  <a:lnTo>
+                    <a:pt x="68323" y="316727"/>
+                  </a:lnTo>
+                  <a:lnTo>
+                    <a:pt x="58562" y="316727"/>
+                  </a:lnTo>
+                  <a:lnTo>
+                    <a:pt x="48802" y="316727"/>
+                  </a:lnTo>
+                  <a:lnTo>
+                    <a:pt x="39041" y="316727"/>
+                  </a:lnTo>
+                  <a:lnTo>
+                    <a:pt x="29281" y="316727"/>
+                  </a:lnTo>
+                  <a:lnTo>
+                    <a:pt x="19520" y="316727"/>
+                  </a:lnTo>
+                  <a:lnTo>
+                    <a:pt x="9760" y="316727"/>
+                  </a:lnTo>
+                  <a:lnTo>
+                    <a:pt x="0" y="316727"/>
+                  </a:lnTo>
+                  <a:close/>
                 </a:path>
               </a:pathLst>
             </a:custGeom>
-            <a:ln w="16260" cap="flat">
-              <a:solidFill>
-                <a:srgbClr val="256F9C">
-                  <a:alpha val="100000"/>
-                </a:srgbClr>
-              </a:solidFill>
-              <a:prstDash val="solid"/>
-              <a:round/>
-            </a:ln>
+            <a:solidFill>
+              <a:srgbClr val="EDB1AD">
+                <a:alpha val="100000"/>
+              </a:srgbClr>
+            </a:solidFill>
           </p:spPr>
           <p:txBody>
             <a:bodyPr/>
@@ -2570,40 +5000,382 @@
           </p:nvSpPr>
           <p:spPr>
             <a:xfrm>
-              <a:off x="2483784" y="4619076"/>
-              <a:ext cx="79199" cy="68589"/>
+              <a:off x="5543778" y="3049827"/>
+              <a:ext cx="575868" cy="316727"/>
             </a:xfrm>
             <a:custGeom>
               <a:avLst/>
               <a:pathLst>
-                <a:path w="79199" h="68589">
+                <a:path w="575868" h="316727">
                   <a:moveTo>
                     <a:pt x="0" y="0"/>
                   </a:moveTo>
                   <a:lnTo>
-                    <a:pt x="39599" y="68589"/>
-                  </a:lnTo>
-                  <a:lnTo>
-                    <a:pt x="79199" y="0"/>
+                    <a:pt x="9760" y="0"/>
+                  </a:lnTo>
+                  <a:lnTo>
+                    <a:pt x="19520" y="0"/>
+                  </a:lnTo>
+                  <a:lnTo>
+                    <a:pt x="29281" y="0"/>
+                  </a:lnTo>
+                  <a:lnTo>
+                    <a:pt x="39041" y="0"/>
+                  </a:lnTo>
+                  <a:lnTo>
+                    <a:pt x="48802" y="0"/>
+                  </a:lnTo>
+                  <a:lnTo>
+                    <a:pt x="58562" y="0"/>
+                  </a:lnTo>
+                  <a:lnTo>
+                    <a:pt x="68323" y="0"/>
+                  </a:lnTo>
+                  <a:lnTo>
+                    <a:pt x="78083" y="0"/>
+                  </a:lnTo>
+                  <a:lnTo>
+                    <a:pt x="87844" y="0"/>
+                  </a:lnTo>
+                  <a:lnTo>
+                    <a:pt x="97604" y="0"/>
+                  </a:lnTo>
+                  <a:lnTo>
+                    <a:pt x="107365" y="0"/>
+                  </a:lnTo>
+                  <a:lnTo>
+                    <a:pt x="117125" y="0"/>
+                  </a:lnTo>
+                  <a:lnTo>
+                    <a:pt x="126886" y="0"/>
+                  </a:lnTo>
+                  <a:lnTo>
+                    <a:pt x="136646" y="0"/>
+                  </a:lnTo>
+                  <a:lnTo>
+                    <a:pt x="146407" y="0"/>
+                  </a:lnTo>
+                  <a:lnTo>
+                    <a:pt x="156167" y="0"/>
+                  </a:lnTo>
+                  <a:lnTo>
+                    <a:pt x="165928" y="0"/>
+                  </a:lnTo>
+                  <a:lnTo>
+                    <a:pt x="175688" y="0"/>
+                  </a:lnTo>
+                  <a:lnTo>
+                    <a:pt x="185449" y="0"/>
+                  </a:lnTo>
+                  <a:lnTo>
+                    <a:pt x="195209" y="0"/>
+                  </a:lnTo>
+                  <a:lnTo>
+                    <a:pt x="204970" y="0"/>
+                  </a:lnTo>
+                  <a:lnTo>
+                    <a:pt x="214730" y="0"/>
+                  </a:lnTo>
+                  <a:lnTo>
+                    <a:pt x="224491" y="0"/>
+                  </a:lnTo>
+                  <a:lnTo>
+                    <a:pt x="234251" y="0"/>
+                  </a:lnTo>
+                  <a:lnTo>
+                    <a:pt x="244012" y="0"/>
+                  </a:lnTo>
+                  <a:lnTo>
+                    <a:pt x="253772" y="0"/>
+                  </a:lnTo>
+                  <a:lnTo>
+                    <a:pt x="263533" y="0"/>
+                  </a:lnTo>
+                  <a:lnTo>
+                    <a:pt x="273293" y="0"/>
+                  </a:lnTo>
+                  <a:lnTo>
+                    <a:pt x="283053" y="0"/>
+                  </a:lnTo>
+                  <a:lnTo>
+                    <a:pt x="292814" y="0"/>
+                  </a:lnTo>
+                  <a:lnTo>
+                    <a:pt x="302574" y="0"/>
+                  </a:lnTo>
+                  <a:lnTo>
+                    <a:pt x="312335" y="0"/>
+                  </a:lnTo>
+                  <a:lnTo>
+                    <a:pt x="322095" y="0"/>
+                  </a:lnTo>
+                  <a:lnTo>
+                    <a:pt x="331856" y="0"/>
+                  </a:lnTo>
+                  <a:lnTo>
+                    <a:pt x="341616" y="0"/>
+                  </a:lnTo>
+                  <a:lnTo>
+                    <a:pt x="351377" y="0"/>
+                  </a:lnTo>
+                  <a:lnTo>
+                    <a:pt x="361137" y="0"/>
+                  </a:lnTo>
+                  <a:lnTo>
+                    <a:pt x="370898" y="0"/>
+                  </a:lnTo>
+                  <a:lnTo>
+                    <a:pt x="380658" y="0"/>
+                  </a:lnTo>
+                  <a:lnTo>
+                    <a:pt x="390419" y="0"/>
+                  </a:lnTo>
+                  <a:lnTo>
+                    <a:pt x="400179" y="0"/>
+                  </a:lnTo>
+                  <a:lnTo>
+                    <a:pt x="409940" y="0"/>
+                  </a:lnTo>
+                  <a:lnTo>
+                    <a:pt x="419700" y="0"/>
+                  </a:lnTo>
+                  <a:lnTo>
+                    <a:pt x="429461" y="0"/>
+                  </a:lnTo>
+                  <a:lnTo>
+                    <a:pt x="439221" y="0"/>
+                  </a:lnTo>
+                  <a:lnTo>
+                    <a:pt x="448982" y="0"/>
+                  </a:lnTo>
+                  <a:lnTo>
+                    <a:pt x="458742" y="0"/>
+                  </a:lnTo>
+                  <a:lnTo>
+                    <a:pt x="468503" y="0"/>
+                  </a:lnTo>
+                  <a:lnTo>
+                    <a:pt x="478263" y="0"/>
+                  </a:lnTo>
+                  <a:lnTo>
+                    <a:pt x="488024" y="0"/>
+                  </a:lnTo>
+                  <a:lnTo>
+                    <a:pt x="497784" y="0"/>
+                  </a:lnTo>
+                  <a:lnTo>
+                    <a:pt x="507545" y="0"/>
+                  </a:lnTo>
+                  <a:lnTo>
+                    <a:pt x="517305" y="0"/>
+                  </a:lnTo>
+                  <a:lnTo>
+                    <a:pt x="527066" y="0"/>
+                  </a:lnTo>
+                  <a:lnTo>
+                    <a:pt x="536826" y="0"/>
+                  </a:lnTo>
+                  <a:lnTo>
+                    <a:pt x="546587" y="0"/>
+                  </a:lnTo>
+                  <a:lnTo>
+                    <a:pt x="556347" y="0"/>
+                  </a:lnTo>
+                  <a:lnTo>
+                    <a:pt x="566107" y="0"/>
+                  </a:lnTo>
+                  <a:lnTo>
+                    <a:pt x="575868" y="0"/>
+                  </a:lnTo>
+                  <a:lnTo>
+                    <a:pt x="575868" y="316727"/>
+                  </a:lnTo>
+                  <a:lnTo>
+                    <a:pt x="566107" y="316727"/>
+                  </a:lnTo>
+                  <a:lnTo>
+                    <a:pt x="556347" y="316727"/>
+                  </a:lnTo>
+                  <a:lnTo>
+                    <a:pt x="546587" y="316727"/>
+                  </a:lnTo>
+                  <a:lnTo>
+                    <a:pt x="536826" y="316727"/>
+                  </a:lnTo>
+                  <a:lnTo>
+                    <a:pt x="527066" y="316727"/>
+                  </a:lnTo>
+                  <a:lnTo>
+                    <a:pt x="517305" y="316727"/>
+                  </a:lnTo>
+                  <a:lnTo>
+                    <a:pt x="507545" y="316727"/>
+                  </a:lnTo>
+                  <a:lnTo>
+                    <a:pt x="497784" y="316727"/>
+                  </a:lnTo>
+                  <a:lnTo>
+                    <a:pt x="488024" y="316727"/>
+                  </a:lnTo>
+                  <a:lnTo>
+                    <a:pt x="478263" y="316727"/>
+                  </a:lnTo>
+                  <a:lnTo>
+                    <a:pt x="468503" y="316727"/>
+                  </a:lnTo>
+                  <a:lnTo>
+                    <a:pt x="458742" y="316727"/>
+                  </a:lnTo>
+                  <a:lnTo>
+                    <a:pt x="448982" y="316727"/>
+                  </a:lnTo>
+                  <a:lnTo>
+                    <a:pt x="439221" y="316727"/>
+                  </a:lnTo>
+                  <a:lnTo>
+                    <a:pt x="429461" y="316727"/>
+                  </a:lnTo>
+                  <a:lnTo>
+                    <a:pt x="419700" y="316727"/>
+                  </a:lnTo>
+                  <a:lnTo>
+                    <a:pt x="409940" y="316727"/>
+                  </a:lnTo>
+                  <a:lnTo>
+                    <a:pt x="400179" y="316727"/>
+                  </a:lnTo>
+                  <a:lnTo>
+                    <a:pt x="390419" y="316727"/>
+                  </a:lnTo>
+                  <a:lnTo>
+                    <a:pt x="380658" y="316727"/>
+                  </a:lnTo>
+                  <a:lnTo>
+                    <a:pt x="370898" y="316727"/>
+                  </a:lnTo>
+                  <a:lnTo>
+                    <a:pt x="361137" y="316727"/>
+                  </a:lnTo>
+                  <a:lnTo>
+                    <a:pt x="351377" y="316727"/>
+                  </a:lnTo>
+                  <a:lnTo>
+                    <a:pt x="341616" y="316727"/>
+                  </a:lnTo>
+                  <a:lnTo>
+                    <a:pt x="331856" y="316727"/>
+                  </a:lnTo>
+                  <a:lnTo>
+                    <a:pt x="322095" y="316727"/>
+                  </a:lnTo>
+                  <a:lnTo>
+                    <a:pt x="312335" y="316727"/>
+                  </a:lnTo>
+                  <a:lnTo>
+                    <a:pt x="302574" y="316727"/>
+                  </a:lnTo>
+                  <a:lnTo>
+                    <a:pt x="292814" y="316727"/>
+                  </a:lnTo>
+                  <a:lnTo>
+                    <a:pt x="283053" y="316727"/>
+                  </a:lnTo>
+                  <a:lnTo>
+                    <a:pt x="273293" y="316727"/>
+                  </a:lnTo>
+                  <a:lnTo>
+                    <a:pt x="263533" y="316727"/>
+                  </a:lnTo>
+                  <a:lnTo>
+                    <a:pt x="253772" y="316727"/>
+                  </a:lnTo>
+                  <a:lnTo>
+                    <a:pt x="244012" y="316727"/>
+                  </a:lnTo>
+                  <a:lnTo>
+                    <a:pt x="234251" y="316727"/>
+                  </a:lnTo>
+                  <a:lnTo>
+                    <a:pt x="224491" y="316727"/>
+                  </a:lnTo>
+                  <a:lnTo>
+                    <a:pt x="214730" y="316727"/>
+                  </a:lnTo>
+                  <a:lnTo>
+                    <a:pt x="204970" y="316727"/>
+                  </a:lnTo>
+                  <a:lnTo>
+                    <a:pt x="195209" y="316727"/>
+                  </a:lnTo>
+                  <a:lnTo>
+                    <a:pt x="185449" y="316727"/>
+                  </a:lnTo>
+                  <a:lnTo>
+                    <a:pt x="175688" y="316727"/>
+                  </a:lnTo>
+                  <a:lnTo>
+                    <a:pt x="165928" y="316727"/>
+                  </a:lnTo>
+                  <a:lnTo>
+                    <a:pt x="156167" y="316727"/>
+                  </a:lnTo>
+                  <a:lnTo>
+                    <a:pt x="146407" y="316727"/>
+                  </a:lnTo>
+                  <a:lnTo>
+                    <a:pt x="136646" y="316727"/>
+                  </a:lnTo>
+                  <a:lnTo>
+                    <a:pt x="126886" y="316727"/>
+                  </a:lnTo>
+                  <a:lnTo>
+                    <a:pt x="117125" y="316727"/>
+                  </a:lnTo>
+                  <a:lnTo>
+                    <a:pt x="107365" y="316727"/>
+                  </a:lnTo>
+                  <a:lnTo>
+                    <a:pt x="97604" y="316727"/>
+                  </a:lnTo>
+                  <a:lnTo>
+                    <a:pt x="87844" y="316727"/>
+                  </a:lnTo>
+                  <a:lnTo>
+                    <a:pt x="78083" y="316727"/>
+                  </a:lnTo>
+                  <a:lnTo>
+                    <a:pt x="68323" y="316727"/>
+                  </a:lnTo>
+                  <a:lnTo>
+                    <a:pt x="58562" y="316727"/>
+                  </a:lnTo>
+                  <a:lnTo>
+                    <a:pt x="48802" y="316727"/>
+                  </a:lnTo>
+                  <a:lnTo>
+                    <a:pt x="39041" y="316727"/>
+                  </a:lnTo>
+                  <a:lnTo>
+                    <a:pt x="29281" y="316727"/>
+                  </a:lnTo>
+                  <a:lnTo>
+                    <a:pt x="19520" y="316727"/>
+                  </a:lnTo>
+                  <a:lnTo>
+                    <a:pt x="9760" y="316727"/>
+                  </a:lnTo>
+                  <a:lnTo>
+                    <a:pt x="0" y="316727"/>
                   </a:lnTo>
                   <a:close/>
                 </a:path>
               </a:pathLst>
             </a:custGeom>
             <a:solidFill>
-              <a:srgbClr val="256F9C">
+              <a:srgbClr val="ADC7EC">
                 <a:alpha val="100000"/>
               </a:srgbClr>
             </a:solidFill>
-            <a:ln w="16260" cap="flat">
-              <a:solidFill>
-                <a:srgbClr val="256F9C">
-                  <a:alpha val="100000"/>
-                </a:srgbClr>
-              </a:solidFill>
-              <a:prstDash val="solid"/>
-              <a:round/>
-            </a:ln>
           </p:spPr>
           <p:txBody>
             <a:bodyPr/>
@@ -2613,37 +5385,388 @@
         </p:sp>
         <p:sp>
           <p:nvSpPr>
-            <p:cNvPr id="12" name="pl11"/>
+            <p:cNvPr id="12" name="pg11"/>
             <p:cNvSpPr/>
             <p:nvPr/>
           </p:nvSpPr>
           <p:spPr>
             <a:xfrm>
-              <a:off x="3812029" y="3806424"/>
-              <a:ext cx="0" cy="881241"/>
+              <a:off x="5543778" y="4129580"/>
+              <a:ext cx="575868" cy="316727"/>
             </a:xfrm>
             <a:custGeom>
               <a:avLst/>
               <a:pathLst>
-                <a:path w="0" h="881241">
+                <a:path w="575868" h="316727">
                   <a:moveTo>
                     <a:pt x="0" y="0"/>
                   </a:moveTo>
                   <a:lnTo>
-                    <a:pt x="0" y="881241"/>
-                  </a:lnTo>
+                    <a:pt x="9760" y="0"/>
+                  </a:lnTo>
+                  <a:lnTo>
+                    <a:pt x="19520" y="0"/>
+                  </a:lnTo>
+                  <a:lnTo>
+                    <a:pt x="29281" y="0"/>
+                  </a:lnTo>
+                  <a:lnTo>
+                    <a:pt x="39041" y="0"/>
+                  </a:lnTo>
+                  <a:lnTo>
+                    <a:pt x="48802" y="0"/>
+                  </a:lnTo>
+                  <a:lnTo>
+                    <a:pt x="58562" y="0"/>
+                  </a:lnTo>
+                  <a:lnTo>
+                    <a:pt x="68323" y="0"/>
+                  </a:lnTo>
+                  <a:lnTo>
+                    <a:pt x="78083" y="0"/>
+                  </a:lnTo>
+                  <a:lnTo>
+                    <a:pt x="87844" y="0"/>
+                  </a:lnTo>
+                  <a:lnTo>
+                    <a:pt x="97604" y="0"/>
+                  </a:lnTo>
+                  <a:lnTo>
+                    <a:pt x="107365" y="0"/>
+                  </a:lnTo>
+                  <a:lnTo>
+                    <a:pt x="117125" y="0"/>
+                  </a:lnTo>
+                  <a:lnTo>
+                    <a:pt x="126886" y="0"/>
+                  </a:lnTo>
+                  <a:lnTo>
+                    <a:pt x="136646" y="0"/>
+                  </a:lnTo>
+                  <a:lnTo>
+                    <a:pt x="146407" y="0"/>
+                  </a:lnTo>
+                  <a:lnTo>
+                    <a:pt x="156167" y="0"/>
+                  </a:lnTo>
+                  <a:lnTo>
+                    <a:pt x="165928" y="0"/>
+                  </a:lnTo>
+                  <a:lnTo>
+                    <a:pt x="175688" y="0"/>
+                  </a:lnTo>
+                  <a:lnTo>
+                    <a:pt x="185449" y="0"/>
+                  </a:lnTo>
+                  <a:lnTo>
+                    <a:pt x="195209" y="0"/>
+                  </a:lnTo>
+                  <a:lnTo>
+                    <a:pt x="204970" y="0"/>
+                  </a:lnTo>
+                  <a:lnTo>
+                    <a:pt x="214730" y="0"/>
+                  </a:lnTo>
+                  <a:lnTo>
+                    <a:pt x="224491" y="0"/>
+                  </a:lnTo>
+                  <a:lnTo>
+                    <a:pt x="234251" y="0"/>
+                  </a:lnTo>
+                  <a:lnTo>
+                    <a:pt x="244012" y="0"/>
+                  </a:lnTo>
+                  <a:lnTo>
+                    <a:pt x="253772" y="0"/>
+                  </a:lnTo>
+                  <a:lnTo>
+                    <a:pt x="263533" y="0"/>
+                  </a:lnTo>
+                  <a:lnTo>
+                    <a:pt x="273293" y="0"/>
+                  </a:lnTo>
+                  <a:lnTo>
+                    <a:pt x="283053" y="0"/>
+                  </a:lnTo>
+                  <a:lnTo>
+                    <a:pt x="292814" y="0"/>
+                  </a:lnTo>
+                  <a:lnTo>
+                    <a:pt x="302574" y="0"/>
+                  </a:lnTo>
+                  <a:lnTo>
+                    <a:pt x="312335" y="0"/>
+                  </a:lnTo>
+                  <a:lnTo>
+                    <a:pt x="322095" y="0"/>
+                  </a:lnTo>
+                  <a:lnTo>
+                    <a:pt x="331856" y="0"/>
+                  </a:lnTo>
+                  <a:lnTo>
+                    <a:pt x="341616" y="0"/>
+                  </a:lnTo>
+                  <a:lnTo>
+                    <a:pt x="351377" y="0"/>
+                  </a:lnTo>
+                  <a:lnTo>
+                    <a:pt x="361137" y="0"/>
+                  </a:lnTo>
+                  <a:lnTo>
+                    <a:pt x="370898" y="0"/>
+                  </a:lnTo>
+                  <a:lnTo>
+                    <a:pt x="380658" y="0"/>
+                  </a:lnTo>
+                  <a:lnTo>
+                    <a:pt x="390419" y="0"/>
+                  </a:lnTo>
+                  <a:lnTo>
+                    <a:pt x="400179" y="0"/>
+                  </a:lnTo>
+                  <a:lnTo>
+                    <a:pt x="409940" y="0"/>
+                  </a:lnTo>
+                  <a:lnTo>
+                    <a:pt x="419700" y="0"/>
+                  </a:lnTo>
+                  <a:lnTo>
+                    <a:pt x="429461" y="0"/>
+                  </a:lnTo>
+                  <a:lnTo>
+                    <a:pt x="439221" y="0"/>
+                  </a:lnTo>
+                  <a:lnTo>
+                    <a:pt x="448982" y="0"/>
+                  </a:lnTo>
+                  <a:lnTo>
+                    <a:pt x="458742" y="0"/>
+                  </a:lnTo>
+                  <a:lnTo>
+                    <a:pt x="468503" y="0"/>
+                  </a:lnTo>
+                  <a:lnTo>
+                    <a:pt x="478263" y="0"/>
+                  </a:lnTo>
+                  <a:lnTo>
+                    <a:pt x="488024" y="0"/>
+                  </a:lnTo>
+                  <a:lnTo>
+                    <a:pt x="497784" y="0"/>
+                  </a:lnTo>
+                  <a:lnTo>
+                    <a:pt x="507545" y="0"/>
+                  </a:lnTo>
+                  <a:lnTo>
+                    <a:pt x="517305" y="0"/>
+                  </a:lnTo>
+                  <a:lnTo>
+                    <a:pt x="527066" y="0"/>
+                  </a:lnTo>
+                  <a:lnTo>
+                    <a:pt x="536826" y="0"/>
+                  </a:lnTo>
+                  <a:lnTo>
+                    <a:pt x="546587" y="0"/>
+                  </a:lnTo>
+                  <a:lnTo>
+                    <a:pt x="556347" y="0"/>
+                  </a:lnTo>
+                  <a:lnTo>
+                    <a:pt x="566107" y="0"/>
+                  </a:lnTo>
+                  <a:lnTo>
+                    <a:pt x="575868" y="0"/>
+                  </a:lnTo>
+                  <a:lnTo>
+                    <a:pt x="575868" y="316727"/>
+                  </a:lnTo>
+                  <a:lnTo>
+                    <a:pt x="566107" y="316727"/>
+                  </a:lnTo>
+                  <a:lnTo>
+                    <a:pt x="556347" y="316727"/>
+                  </a:lnTo>
+                  <a:lnTo>
+                    <a:pt x="546587" y="316727"/>
+                  </a:lnTo>
+                  <a:lnTo>
+                    <a:pt x="536826" y="316727"/>
+                  </a:lnTo>
+                  <a:lnTo>
+                    <a:pt x="527066" y="316727"/>
+                  </a:lnTo>
+                  <a:lnTo>
+                    <a:pt x="517305" y="316727"/>
+                  </a:lnTo>
+                  <a:lnTo>
+                    <a:pt x="507545" y="316727"/>
+                  </a:lnTo>
+                  <a:lnTo>
+                    <a:pt x="497784" y="316727"/>
+                  </a:lnTo>
+                  <a:lnTo>
+                    <a:pt x="488024" y="316727"/>
+                  </a:lnTo>
+                  <a:lnTo>
+                    <a:pt x="478263" y="316727"/>
+                  </a:lnTo>
+                  <a:lnTo>
+                    <a:pt x="468503" y="316727"/>
+                  </a:lnTo>
+                  <a:lnTo>
+                    <a:pt x="458742" y="316727"/>
+                  </a:lnTo>
+                  <a:lnTo>
+                    <a:pt x="448982" y="316727"/>
+                  </a:lnTo>
+                  <a:lnTo>
+                    <a:pt x="439221" y="316727"/>
+                  </a:lnTo>
+                  <a:lnTo>
+                    <a:pt x="429461" y="316727"/>
+                  </a:lnTo>
+                  <a:lnTo>
+                    <a:pt x="419700" y="316727"/>
+                  </a:lnTo>
+                  <a:lnTo>
+                    <a:pt x="409940" y="316727"/>
+                  </a:lnTo>
+                  <a:lnTo>
+                    <a:pt x="400179" y="316727"/>
+                  </a:lnTo>
+                  <a:lnTo>
+                    <a:pt x="390419" y="316727"/>
+                  </a:lnTo>
+                  <a:lnTo>
+                    <a:pt x="380658" y="316727"/>
+                  </a:lnTo>
+                  <a:lnTo>
+                    <a:pt x="370898" y="316727"/>
+                  </a:lnTo>
+                  <a:lnTo>
+                    <a:pt x="361137" y="316727"/>
+                  </a:lnTo>
+                  <a:lnTo>
+                    <a:pt x="351377" y="316727"/>
+                  </a:lnTo>
+                  <a:lnTo>
+                    <a:pt x="341616" y="316727"/>
+                  </a:lnTo>
+                  <a:lnTo>
+                    <a:pt x="331856" y="316727"/>
+                  </a:lnTo>
+                  <a:lnTo>
+                    <a:pt x="322095" y="316727"/>
+                  </a:lnTo>
+                  <a:lnTo>
+                    <a:pt x="312335" y="316727"/>
+                  </a:lnTo>
+                  <a:lnTo>
+                    <a:pt x="302574" y="316727"/>
+                  </a:lnTo>
+                  <a:lnTo>
+                    <a:pt x="292814" y="316727"/>
+                  </a:lnTo>
+                  <a:lnTo>
+                    <a:pt x="283053" y="316727"/>
+                  </a:lnTo>
+                  <a:lnTo>
+                    <a:pt x="273293" y="316727"/>
+                  </a:lnTo>
+                  <a:lnTo>
+                    <a:pt x="263533" y="316727"/>
+                  </a:lnTo>
+                  <a:lnTo>
+                    <a:pt x="253772" y="316727"/>
+                  </a:lnTo>
+                  <a:lnTo>
+                    <a:pt x="244012" y="316727"/>
+                  </a:lnTo>
+                  <a:lnTo>
+                    <a:pt x="234251" y="316727"/>
+                  </a:lnTo>
+                  <a:lnTo>
+                    <a:pt x="224491" y="316727"/>
+                  </a:lnTo>
+                  <a:lnTo>
+                    <a:pt x="214730" y="316727"/>
+                  </a:lnTo>
+                  <a:lnTo>
+                    <a:pt x="204970" y="316727"/>
+                  </a:lnTo>
+                  <a:lnTo>
+                    <a:pt x="195209" y="316727"/>
+                  </a:lnTo>
+                  <a:lnTo>
+                    <a:pt x="185449" y="316727"/>
+                  </a:lnTo>
+                  <a:lnTo>
+                    <a:pt x="175688" y="316727"/>
+                  </a:lnTo>
+                  <a:lnTo>
+                    <a:pt x="165928" y="316727"/>
+                  </a:lnTo>
+                  <a:lnTo>
+                    <a:pt x="156167" y="316727"/>
+                  </a:lnTo>
+                  <a:lnTo>
+                    <a:pt x="146407" y="316727"/>
+                  </a:lnTo>
+                  <a:lnTo>
+                    <a:pt x="136646" y="316727"/>
+                  </a:lnTo>
+                  <a:lnTo>
+                    <a:pt x="126886" y="316727"/>
+                  </a:lnTo>
+                  <a:lnTo>
+                    <a:pt x="117125" y="316727"/>
+                  </a:lnTo>
+                  <a:lnTo>
+                    <a:pt x="107365" y="316727"/>
+                  </a:lnTo>
+                  <a:lnTo>
+                    <a:pt x="97604" y="316727"/>
+                  </a:lnTo>
+                  <a:lnTo>
+                    <a:pt x="87844" y="316727"/>
+                  </a:lnTo>
+                  <a:lnTo>
+                    <a:pt x="78083" y="316727"/>
+                  </a:lnTo>
+                  <a:lnTo>
+                    <a:pt x="68323" y="316727"/>
+                  </a:lnTo>
+                  <a:lnTo>
+                    <a:pt x="58562" y="316727"/>
+                  </a:lnTo>
+                  <a:lnTo>
+                    <a:pt x="48802" y="316727"/>
+                  </a:lnTo>
+                  <a:lnTo>
+                    <a:pt x="39041" y="316727"/>
+                  </a:lnTo>
+                  <a:lnTo>
+                    <a:pt x="29281" y="316727"/>
+                  </a:lnTo>
+                  <a:lnTo>
+                    <a:pt x="19520" y="316727"/>
+                  </a:lnTo>
+                  <a:lnTo>
+                    <a:pt x="9760" y="316727"/>
+                  </a:lnTo>
+                  <a:lnTo>
+                    <a:pt x="0" y="316727"/>
+                  </a:lnTo>
+                  <a:close/>
                 </a:path>
               </a:pathLst>
             </a:custGeom>
-            <a:ln w="16260" cap="flat">
-              <a:solidFill>
-                <a:srgbClr val="256F9C">
-                  <a:alpha val="100000"/>
-                </a:srgbClr>
-              </a:solidFill>
-              <a:prstDash val="solid"/>
-              <a:round/>
-            </a:ln>
+            <a:solidFill>
+              <a:srgbClr val="F4C1A6">
+                <a:alpha val="100000"/>
+              </a:srgbClr>
+            </a:solidFill>
           </p:spPr>
           <p:txBody>
             <a:bodyPr/>
@@ -2659,40 +5782,382 @@
           </p:nvSpPr>
           <p:spPr>
             <a:xfrm>
-              <a:off x="3772429" y="4619076"/>
-              <a:ext cx="79200" cy="68589"/>
+              <a:off x="5543778" y="5209334"/>
+              <a:ext cx="575868" cy="316727"/>
             </a:xfrm>
             <a:custGeom>
               <a:avLst/>
               <a:pathLst>
-                <a:path w="79200" h="68589">
+                <a:path w="575868" h="316727">
                   <a:moveTo>
                     <a:pt x="0" y="0"/>
                   </a:moveTo>
                   <a:lnTo>
-                    <a:pt x="39599" y="68589"/>
-                  </a:lnTo>
-                  <a:lnTo>
-                    <a:pt x="79200" y="0"/>
+                    <a:pt x="9760" y="0"/>
+                  </a:lnTo>
+                  <a:lnTo>
+                    <a:pt x="19520" y="0"/>
+                  </a:lnTo>
+                  <a:lnTo>
+                    <a:pt x="29281" y="0"/>
+                  </a:lnTo>
+                  <a:lnTo>
+                    <a:pt x="39041" y="0"/>
+                  </a:lnTo>
+                  <a:lnTo>
+                    <a:pt x="48802" y="0"/>
+                  </a:lnTo>
+                  <a:lnTo>
+                    <a:pt x="58562" y="0"/>
+                  </a:lnTo>
+                  <a:lnTo>
+                    <a:pt x="68323" y="0"/>
+                  </a:lnTo>
+                  <a:lnTo>
+                    <a:pt x="78083" y="0"/>
+                  </a:lnTo>
+                  <a:lnTo>
+                    <a:pt x="87844" y="0"/>
+                  </a:lnTo>
+                  <a:lnTo>
+                    <a:pt x="97604" y="0"/>
+                  </a:lnTo>
+                  <a:lnTo>
+                    <a:pt x="107365" y="0"/>
+                  </a:lnTo>
+                  <a:lnTo>
+                    <a:pt x="117125" y="0"/>
+                  </a:lnTo>
+                  <a:lnTo>
+                    <a:pt x="126886" y="0"/>
+                  </a:lnTo>
+                  <a:lnTo>
+                    <a:pt x="136646" y="0"/>
+                  </a:lnTo>
+                  <a:lnTo>
+                    <a:pt x="146407" y="0"/>
+                  </a:lnTo>
+                  <a:lnTo>
+                    <a:pt x="156167" y="0"/>
+                  </a:lnTo>
+                  <a:lnTo>
+                    <a:pt x="165928" y="0"/>
+                  </a:lnTo>
+                  <a:lnTo>
+                    <a:pt x="175688" y="0"/>
+                  </a:lnTo>
+                  <a:lnTo>
+                    <a:pt x="185449" y="0"/>
+                  </a:lnTo>
+                  <a:lnTo>
+                    <a:pt x="195209" y="0"/>
+                  </a:lnTo>
+                  <a:lnTo>
+                    <a:pt x="204970" y="0"/>
+                  </a:lnTo>
+                  <a:lnTo>
+                    <a:pt x="214730" y="0"/>
+                  </a:lnTo>
+                  <a:lnTo>
+                    <a:pt x="224491" y="0"/>
+                  </a:lnTo>
+                  <a:lnTo>
+                    <a:pt x="234251" y="0"/>
+                  </a:lnTo>
+                  <a:lnTo>
+                    <a:pt x="244012" y="0"/>
+                  </a:lnTo>
+                  <a:lnTo>
+                    <a:pt x="253772" y="0"/>
+                  </a:lnTo>
+                  <a:lnTo>
+                    <a:pt x="263533" y="0"/>
+                  </a:lnTo>
+                  <a:lnTo>
+                    <a:pt x="273293" y="0"/>
+                  </a:lnTo>
+                  <a:lnTo>
+                    <a:pt x="283053" y="0"/>
+                  </a:lnTo>
+                  <a:lnTo>
+                    <a:pt x="292814" y="0"/>
+                  </a:lnTo>
+                  <a:lnTo>
+                    <a:pt x="302574" y="0"/>
+                  </a:lnTo>
+                  <a:lnTo>
+                    <a:pt x="312335" y="0"/>
+                  </a:lnTo>
+                  <a:lnTo>
+                    <a:pt x="322095" y="0"/>
+                  </a:lnTo>
+                  <a:lnTo>
+                    <a:pt x="331856" y="0"/>
+                  </a:lnTo>
+                  <a:lnTo>
+                    <a:pt x="341616" y="0"/>
+                  </a:lnTo>
+                  <a:lnTo>
+                    <a:pt x="351377" y="0"/>
+                  </a:lnTo>
+                  <a:lnTo>
+                    <a:pt x="361137" y="0"/>
+                  </a:lnTo>
+                  <a:lnTo>
+                    <a:pt x="370898" y="0"/>
+                  </a:lnTo>
+                  <a:lnTo>
+                    <a:pt x="380658" y="0"/>
+                  </a:lnTo>
+                  <a:lnTo>
+                    <a:pt x="390419" y="0"/>
+                  </a:lnTo>
+                  <a:lnTo>
+                    <a:pt x="400179" y="0"/>
+                  </a:lnTo>
+                  <a:lnTo>
+                    <a:pt x="409940" y="0"/>
+                  </a:lnTo>
+                  <a:lnTo>
+                    <a:pt x="419700" y="0"/>
+                  </a:lnTo>
+                  <a:lnTo>
+                    <a:pt x="429461" y="0"/>
+                  </a:lnTo>
+                  <a:lnTo>
+                    <a:pt x="439221" y="0"/>
+                  </a:lnTo>
+                  <a:lnTo>
+                    <a:pt x="448982" y="0"/>
+                  </a:lnTo>
+                  <a:lnTo>
+                    <a:pt x="458742" y="0"/>
+                  </a:lnTo>
+                  <a:lnTo>
+                    <a:pt x="468503" y="0"/>
+                  </a:lnTo>
+                  <a:lnTo>
+                    <a:pt x="478263" y="0"/>
+                  </a:lnTo>
+                  <a:lnTo>
+                    <a:pt x="488024" y="0"/>
+                  </a:lnTo>
+                  <a:lnTo>
+                    <a:pt x="497784" y="0"/>
+                  </a:lnTo>
+                  <a:lnTo>
+                    <a:pt x="507545" y="0"/>
+                  </a:lnTo>
+                  <a:lnTo>
+                    <a:pt x="517305" y="0"/>
+                  </a:lnTo>
+                  <a:lnTo>
+                    <a:pt x="527066" y="0"/>
+                  </a:lnTo>
+                  <a:lnTo>
+                    <a:pt x="536826" y="0"/>
+                  </a:lnTo>
+                  <a:lnTo>
+                    <a:pt x="546587" y="0"/>
+                  </a:lnTo>
+                  <a:lnTo>
+                    <a:pt x="556347" y="0"/>
+                  </a:lnTo>
+                  <a:lnTo>
+                    <a:pt x="566107" y="0"/>
+                  </a:lnTo>
+                  <a:lnTo>
+                    <a:pt x="575868" y="0"/>
+                  </a:lnTo>
+                  <a:lnTo>
+                    <a:pt x="575868" y="316727"/>
+                  </a:lnTo>
+                  <a:lnTo>
+                    <a:pt x="566107" y="316727"/>
+                  </a:lnTo>
+                  <a:lnTo>
+                    <a:pt x="556347" y="316727"/>
+                  </a:lnTo>
+                  <a:lnTo>
+                    <a:pt x="546587" y="316727"/>
+                  </a:lnTo>
+                  <a:lnTo>
+                    <a:pt x="536826" y="316727"/>
+                  </a:lnTo>
+                  <a:lnTo>
+                    <a:pt x="527066" y="316727"/>
+                  </a:lnTo>
+                  <a:lnTo>
+                    <a:pt x="517305" y="316727"/>
+                  </a:lnTo>
+                  <a:lnTo>
+                    <a:pt x="507545" y="316727"/>
+                  </a:lnTo>
+                  <a:lnTo>
+                    <a:pt x="497784" y="316727"/>
+                  </a:lnTo>
+                  <a:lnTo>
+                    <a:pt x="488024" y="316727"/>
+                  </a:lnTo>
+                  <a:lnTo>
+                    <a:pt x="478263" y="316727"/>
+                  </a:lnTo>
+                  <a:lnTo>
+                    <a:pt x="468503" y="316727"/>
+                  </a:lnTo>
+                  <a:lnTo>
+                    <a:pt x="458742" y="316727"/>
+                  </a:lnTo>
+                  <a:lnTo>
+                    <a:pt x="448982" y="316727"/>
+                  </a:lnTo>
+                  <a:lnTo>
+                    <a:pt x="439221" y="316727"/>
+                  </a:lnTo>
+                  <a:lnTo>
+                    <a:pt x="429461" y="316727"/>
+                  </a:lnTo>
+                  <a:lnTo>
+                    <a:pt x="419700" y="316727"/>
+                  </a:lnTo>
+                  <a:lnTo>
+                    <a:pt x="409940" y="316727"/>
+                  </a:lnTo>
+                  <a:lnTo>
+                    <a:pt x="400179" y="316727"/>
+                  </a:lnTo>
+                  <a:lnTo>
+                    <a:pt x="390419" y="316727"/>
+                  </a:lnTo>
+                  <a:lnTo>
+                    <a:pt x="380658" y="316727"/>
+                  </a:lnTo>
+                  <a:lnTo>
+                    <a:pt x="370898" y="316727"/>
+                  </a:lnTo>
+                  <a:lnTo>
+                    <a:pt x="361137" y="316727"/>
+                  </a:lnTo>
+                  <a:lnTo>
+                    <a:pt x="351377" y="316727"/>
+                  </a:lnTo>
+                  <a:lnTo>
+                    <a:pt x="341616" y="316727"/>
+                  </a:lnTo>
+                  <a:lnTo>
+                    <a:pt x="331856" y="316727"/>
+                  </a:lnTo>
+                  <a:lnTo>
+                    <a:pt x="322095" y="316727"/>
+                  </a:lnTo>
+                  <a:lnTo>
+                    <a:pt x="312335" y="316727"/>
+                  </a:lnTo>
+                  <a:lnTo>
+                    <a:pt x="302574" y="316727"/>
+                  </a:lnTo>
+                  <a:lnTo>
+                    <a:pt x="292814" y="316727"/>
+                  </a:lnTo>
+                  <a:lnTo>
+                    <a:pt x="283053" y="316727"/>
+                  </a:lnTo>
+                  <a:lnTo>
+                    <a:pt x="273293" y="316727"/>
+                  </a:lnTo>
+                  <a:lnTo>
+                    <a:pt x="263533" y="316727"/>
+                  </a:lnTo>
+                  <a:lnTo>
+                    <a:pt x="253772" y="316727"/>
+                  </a:lnTo>
+                  <a:lnTo>
+                    <a:pt x="244012" y="316727"/>
+                  </a:lnTo>
+                  <a:lnTo>
+                    <a:pt x="234251" y="316727"/>
+                  </a:lnTo>
+                  <a:lnTo>
+                    <a:pt x="224491" y="316727"/>
+                  </a:lnTo>
+                  <a:lnTo>
+                    <a:pt x="214730" y="316727"/>
+                  </a:lnTo>
+                  <a:lnTo>
+                    <a:pt x="204970" y="316727"/>
+                  </a:lnTo>
+                  <a:lnTo>
+                    <a:pt x="195209" y="316727"/>
+                  </a:lnTo>
+                  <a:lnTo>
+                    <a:pt x="185449" y="316727"/>
+                  </a:lnTo>
+                  <a:lnTo>
+                    <a:pt x="175688" y="316727"/>
+                  </a:lnTo>
+                  <a:lnTo>
+                    <a:pt x="165928" y="316727"/>
+                  </a:lnTo>
+                  <a:lnTo>
+                    <a:pt x="156167" y="316727"/>
+                  </a:lnTo>
+                  <a:lnTo>
+                    <a:pt x="146407" y="316727"/>
+                  </a:lnTo>
+                  <a:lnTo>
+                    <a:pt x="136646" y="316727"/>
+                  </a:lnTo>
+                  <a:lnTo>
+                    <a:pt x="126886" y="316727"/>
+                  </a:lnTo>
+                  <a:lnTo>
+                    <a:pt x="117125" y="316727"/>
+                  </a:lnTo>
+                  <a:lnTo>
+                    <a:pt x="107365" y="316727"/>
+                  </a:lnTo>
+                  <a:lnTo>
+                    <a:pt x="97604" y="316727"/>
+                  </a:lnTo>
+                  <a:lnTo>
+                    <a:pt x="87844" y="316727"/>
+                  </a:lnTo>
+                  <a:lnTo>
+                    <a:pt x="78083" y="316727"/>
+                  </a:lnTo>
+                  <a:lnTo>
+                    <a:pt x="68323" y="316727"/>
+                  </a:lnTo>
+                  <a:lnTo>
+                    <a:pt x="58562" y="316727"/>
+                  </a:lnTo>
+                  <a:lnTo>
+                    <a:pt x="48802" y="316727"/>
+                  </a:lnTo>
+                  <a:lnTo>
+                    <a:pt x="39041" y="316727"/>
+                  </a:lnTo>
+                  <a:lnTo>
+                    <a:pt x="29281" y="316727"/>
+                  </a:lnTo>
+                  <a:lnTo>
+                    <a:pt x="19520" y="316727"/>
+                  </a:lnTo>
+                  <a:lnTo>
+                    <a:pt x="9760" y="316727"/>
+                  </a:lnTo>
+                  <a:lnTo>
+                    <a:pt x="0" y="316727"/>
                   </a:lnTo>
                   <a:close/>
                 </a:path>
               </a:pathLst>
             </a:custGeom>
             <a:solidFill>
-              <a:srgbClr val="256F9C">
+              <a:srgbClr val="B4D6AF">
                 <a:alpha val="100000"/>
               </a:srgbClr>
             </a:solidFill>
-            <a:ln w="16260" cap="flat">
-              <a:solidFill>
-                <a:srgbClr val="256F9C">
-                  <a:alpha val="100000"/>
-                </a:srgbClr>
-              </a:solidFill>
-              <a:prstDash val="solid"/>
-              <a:round/>
-            </a:ln>
           </p:spPr>
           <p:txBody>
             <a:bodyPr/>
@@ -2702,31 +6167,127 @@
         </p:sp>
         <p:sp>
           <p:nvSpPr>
-            <p:cNvPr id="14" name="pl13"/>
+            <p:cNvPr id="14" name="pg13"/>
             <p:cNvSpPr/>
             <p:nvPr/>
           </p:nvSpPr>
           <p:spPr>
             <a:xfrm>
-              <a:off x="5331970" y="3806424"/>
-              <a:ext cx="0" cy="881241"/>
+              <a:off x="648896" y="3280174"/>
+              <a:ext cx="1079753" cy="935786"/>
             </a:xfrm>
             <a:custGeom>
               <a:avLst/>
               <a:pathLst>
-                <a:path w="0" h="881241">
+                <a:path w="1079753" h="935786">
                   <a:moveTo>
-                    <a:pt x="0" y="0"/>
+                    <a:pt x="1079753" y="86380"/>
                   </a:moveTo>
                   <a:lnTo>
-                    <a:pt x="0" y="881241"/>
-                  </a:lnTo>
+                    <a:pt x="1077587" y="67158"/>
+                  </a:lnTo>
+                  <a:lnTo>
+                    <a:pt x="1071199" y="48901"/>
+                  </a:lnTo>
+                  <a:lnTo>
+                    <a:pt x="1060907" y="32523"/>
+                  </a:lnTo>
+                  <a:lnTo>
+                    <a:pt x="1047230" y="18845"/>
+                  </a:lnTo>
+                  <a:lnTo>
+                    <a:pt x="1030852" y="8554"/>
+                  </a:lnTo>
+                  <a:lnTo>
+                    <a:pt x="1012594" y="2165"/>
+                  </a:lnTo>
+                  <a:lnTo>
+                    <a:pt x="993373" y="0"/>
+                  </a:lnTo>
+                  <a:lnTo>
+                    <a:pt x="86380" y="0"/>
+                  </a:lnTo>
+                  <a:lnTo>
+                    <a:pt x="67158" y="2165"/>
+                  </a:lnTo>
+                  <a:lnTo>
+                    <a:pt x="48901" y="8554"/>
+                  </a:lnTo>
+                  <a:lnTo>
+                    <a:pt x="32523" y="18845"/>
+                  </a:lnTo>
+                  <a:lnTo>
+                    <a:pt x="18845" y="32523"/>
+                  </a:lnTo>
+                  <a:lnTo>
+                    <a:pt x="8554" y="48901"/>
+                  </a:lnTo>
+                  <a:lnTo>
+                    <a:pt x="2165" y="67158"/>
+                  </a:lnTo>
+                  <a:lnTo>
+                    <a:pt x="0" y="86380"/>
+                  </a:lnTo>
+                  <a:lnTo>
+                    <a:pt x="0" y="849405"/>
+                  </a:lnTo>
+                  <a:lnTo>
+                    <a:pt x="2165" y="868627"/>
+                  </a:lnTo>
+                  <a:lnTo>
+                    <a:pt x="8554" y="886884"/>
+                  </a:lnTo>
+                  <a:lnTo>
+                    <a:pt x="18845" y="903263"/>
+                  </a:lnTo>
+                  <a:lnTo>
+                    <a:pt x="32523" y="916940"/>
+                  </a:lnTo>
+                  <a:lnTo>
+                    <a:pt x="48901" y="927231"/>
+                  </a:lnTo>
+                  <a:lnTo>
+                    <a:pt x="67158" y="933620"/>
+                  </a:lnTo>
+                  <a:lnTo>
+                    <a:pt x="86380" y="935786"/>
+                  </a:lnTo>
+                  <a:lnTo>
+                    <a:pt x="993373" y="935786"/>
+                  </a:lnTo>
+                  <a:lnTo>
+                    <a:pt x="1012594" y="933620"/>
+                  </a:lnTo>
+                  <a:lnTo>
+                    <a:pt x="1030852" y="927231"/>
+                  </a:lnTo>
+                  <a:lnTo>
+                    <a:pt x="1047230" y="916940"/>
+                  </a:lnTo>
+                  <a:lnTo>
+                    <a:pt x="1060907" y="903263"/>
+                  </a:lnTo>
+                  <a:lnTo>
+                    <a:pt x="1071199" y="886884"/>
+                  </a:lnTo>
+                  <a:lnTo>
+                    <a:pt x="1077587" y="868627"/>
+                  </a:lnTo>
+                  <a:lnTo>
+                    <a:pt x="1079753" y="849405"/>
+                  </a:lnTo>
+                  <a:close/>
                 </a:path>
               </a:pathLst>
             </a:custGeom>
-            <a:ln w="16260" cap="flat">
+            <a:solidFill>
+              <a:srgbClr val="E3E3E3">
+                <a:alpha val="100000"/>
+              </a:srgbClr>
+            </a:solidFill>
+            <a:ln w="21681" cap="flat">
               <a:solidFill>
-                <a:srgbClr val="256F9C">
+                <a:srgbClr val="666666">
                   <a:alpha val="100000"/>
                 </a:srgbClr>
               </a:solidFill>
@@ -2748,34 +6309,121 @@
           </p:nvSpPr>
           <p:spPr>
             <a:xfrm>
-              <a:off x="5292370" y="4619076"/>
-              <a:ext cx="79199" cy="68589"/>
+              <a:off x="2304517" y="2308396"/>
+              <a:ext cx="1367687" cy="719835"/>
             </a:xfrm>
             <a:custGeom>
               <a:avLst/>
               <a:pathLst>
-                <a:path w="79199" h="68589">
+                <a:path w="1367687" h="719835">
                   <a:moveTo>
-                    <a:pt x="0" y="0"/>
+                    <a:pt x="1367687" y="86380"/>
                   </a:moveTo>
                   <a:lnTo>
-                    <a:pt x="39599" y="68589"/>
-                  </a:lnTo>
-                  <a:lnTo>
-                    <a:pt x="79199" y="0"/>
+                    <a:pt x="1365521" y="67158"/>
+                  </a:lnTo>
+                  <a:lnTo>
+                    <a:pt x="1359133" y="48901"/>
+                  </a:lnTo>
+                  <a:lnTo>
+                    <a:pt x="1348842" y="32523"/>
+                  </a:lnTo>
+                  <a:lnTo>
+                    <a:pt x="1335164" y="18845"/>
+                  </a:lnTo>
+                  <a:lnTo>
+                    <a:pt x="1318786" y="8554"/>
+                  </a:lnTo>
+                  <a:lnTo>
+                    <a:pt x="1300528" y="2165"/>
+                  </a:lnTo>
+                  <a:lnTo>
+                    <a:pt x="1281307" y="0"/>
+                  </a:lnTo>
+                  <a:lnTo>
+                    <a:pt x="86380" y="0"/>
+                  </a:lnTo>
+                  <a:lnTo>
+                    <a:pt x="67158" y="2165"/>
+                  </a:lnTo>
+                  <a:lnTo>
+                    <a:pt x="48901" y="8554"/>
+                  </a:lnTo>
+                  <a:lnTo>
+                    <a:pt x="32523" y="18845"/>
+                  </a:lnTo>
+                  <a:lnTo>
+                    <a:pt x="18845" y="32523"/>
+                  </a:lnTo>
+                  <a:lnTo>
+                    <a:pt x="8554" y="48901"/>
+                  </a:lnTo>
+                  <a:lnTo>
+                    <a:pt x="2165" y="67158"/>
+                  </a:lnTo>
+                  <a:lnTo>
+                    <a:pt x="0" y="86380"/>
+                  </a:lnTo>
+                  <a:lnTo>
+                    <a:pt x="0" y="633455"/>
+                  </a:lnTo>
+                  <a:lnTo>
+                    <a:pt x="2165" y="652676"/>
+                  </a:lnTo>
+                  <a:lnTo>
+                    <a:pt x="8554" y="670934"/>
+                  </a:lnTo>
+                  <a:lnTo>
+                    <a:pt x="18845" y="687312"/>
+                  </a:lnTo>
+                  <a:lnTo>
+                    <a:pt x="32523" y="700990"/>
+                  </a:lnTo>
+                  <a:lnTo>
+                    <a:pt x="48901" y="711281"/>
+                  </a:lnTo>
+                  <a:lnTo>
+                    <a:pt x="67158" y="717669"/>
+                  </a:lnTo>
+                  <a:lnTo>
+                    <a:pt x="86380" y="719835"/>
+                  </a:lnTo>
+                  <a:lnTo>
+                    <a:pt x="1281307" y="719835"/>
+                  </a:lnTo>
+                  <a:lnTo>
+                    <a:pt x="1300528" y="717669"/>
+                  </a:lnTo>
+                  <a:lnTo>
+                    <a:pt x="1318786" y="711281"/>
+                  </a:lnTo>
+                  <a:lnTo>
+                    <a:pt x="1335164" y="700990"/>
+                  </a:lnTo>
+                  <a:lnTo>
+                    <a:pt x="1348842" y="687312"/>
+                  </a:lnTo>
+                  <a:lnTo>
+                    <a:pt x="1359133" y="670934"/>
+                  </a:lnTo>
+                  <a:lnTo>
+                    <a:pt x="1365521" y="652676"/>
+                  </a:lnTo>
+                  <a:lnTo>
+                    <a:pt x="1367687" y="633455"/>
                   </a:lnTo>
                   <a:close/>
                 </a:path>
               </a:pathLst>
             </a:custGeom>
             <a:solidFill>
-              <a:srgbClr val="256F9C">
+              <a:srgbClr val="D6E4F7">
                 <a:alpha val="100000"/>
               </a:srgbClr>
             </a:solidFill>
-            <a:ln w="16260" cap="flat">
+            <a:ln w="21681" cap="flat">
               <a:solidFill>
-                <a:srgbClr val="256F9C">
+                <a:srgbClr val="2F5FA8">
                   <a:alpha val="100000"/>
                 </a:srgbClr>
               </a:solidFill>
@@ -2791,31 +6439,127 @@
         </p:sp>
         <p:sp>
           <p:nvSpPr>
-            <p:cNvPr id="16" name="pl15"/>
+            <p:cNvPr id="16" name="pg15"/>
             <p:cNvSpPr/>
             <p:nvPr/>
           </p:nvSpPr>
           <p:spPr>
             <a:xfrm>
-              <a:off x="6620615" y="3806424"/>
-              <a:ext cx="0" cy="881241"/>
+              <a:off x="2304517" y="4467903"/>
+              <a:ext cx="1367687" cy="719835"/>
             </a:xfrm>
             <a:custGeom>
               <a:avLst/>
               <a:pathLst>
-                <a:path w="0" h="881241">
+                <a:path w="1367687" h="719835">
                   <a:moveTo>
-                    <a:pt x="0" y="0"/>
+                    <a:pt x="1367687" y="86380"/>
                   </a:moveTo>
                   <a:lnTo>
-                    <a:pt x="0" y="881241"/>
-                  </a:lnTo>
+                    <a:pt x="1365521" y="67158"/>
+                  </a:lnTo>
+                  <a:lnTo>
+                    <a:pt x="1359133" y="48901"/>
+                  </a:lnTo>
+                  <a:lnTo>
+                    <a:pt x="1348842" y="32523"/>
+                  </a:lnTo>
+                  <a:lnTo>
+                    <a:pt x="1335164" y="18845"/>
+                  </a:lnTo>
+                  <a:lnTo>
+                    <a:pt x="1318786" y="8554"/>
+                  </a:lnTo>
+                  <a:lnTo>
+                    <a:pt x="1300528" y="2165"/>
+                  </a:lnTo>
+                  <a:lnTo>
+                    <a:pt x="1281307" y="0"/>
+                  </a:lnTo>
+                  <a:lnTo>
+                    <a:pt x="86380" y="0"/>
+                  </a:lnTo>
+                  <a:lnTo>
+                    <a:pt x="67158" y="2165"/>
+                  </a:lnTo>
+                  <a:lnTo>
+                    <a:pt x="48901" y="8554"/>
+                  </a:lnTo>
+                  <a:lnTo>
+                    <a:pt x="32523" y="18845"/>
+                  </a:lnTo>
+                  <a:lnTo>
+                    <a:pt x="18845" y="32523"/>
+                  </a:lnTo>
+                  <a:lnTo>
+                    <a:pt x="8554" y="48901"/>
+                  </a:lnTo>
+                  <a:lnTo>
+                    <a:pt x="2165" y="67158"/>
+                  </a:lnTo>
+                  <a:lnTo>
+                    <a:pt x="0" y="86380"/>
+                  </a:lnTo>
+                  <a:lnTo>
+                    <a:pt x="0" y="633455"/>
+                  </a:lnTo>
+                  <a:lnTo>
+                    <a:pt x="2165" y="652676"/>
+                  </a:lnTo>
+                  <a:lnTo>
+                    <a:pt x="8554" y="670934"/>
+                  </a:lnTo>
+                  <a:lnTo>
+                    <a:pt x="18845" y="687312"/>
+                  </a:lnTo>
+                  <a:lnTo>
+                    <a:pt x="32523" y="700990"/>
+                  </a:lnTo>
+                  <a:lnTo>
+                    <a:pt x="48901" y="711281"/>
+                  </a:lnTo>
+                  <a:lnTo>
+                    <a:pt x="67158" y="717669"/>
+                  </a:lnTo>
+                  <a:lnTo>
+                    <a:pt x="86380" y="719835"/>
+                  </a:lnTo>
+                  <a:lnTo>
+                    <a:pt x="1281307" y="719835"/>
+                  </a:lnTo>
+                  <a:lnTo>
+                    <a:pt x="1300528" y="717669"/>
+                  </a:lnTo>
+                  <a:lnTo>
+                    <a:pt x="1318786" y="711281"/>
+                  </a:lnTo>
+                  <a:lnTo>
+                    <a:pt x="1335164" y="700990"/>
+                  </a:lnTo>
+                  <a:lnTo>
+                    <a:pt x="1348842" y="687312"/>
+                  </a:lnTo>
+                  <a:lnTo>
+                    <a:pt x="1359133" y="670934"/>
+                  </a:lnTo>
+                  <a:lnTo>
+                    <a:pt x="1365521" y="652676"/>
+                  </a:lnTo>
+                  <a:lnTo>
+                    <a:pt x="1367687" y="633455"/>
+                  </a:lnTo>
+                  <a:close/>
                 </a:path>
               </a:pathLst>
             </a:custGeom>
-            <a:ln w="16260" cap="flat">
+            <a:solidFill>
+              <a:srgbClr val="D8EED2">
+                <a:alpha val="100000"/>
+              </a:srgbClr>
+            </a:solidFill>
+            <a:ln w="21681" cap="flat">
               <a:solidFill>
-                <a:srgbClr val="256F9C">
+                <a:srgbClr val="2E7D32">
                   <a:alpha val="100000"/>
                 </a:srgbClr>
               </a:solidFill>
@@ -2837,34 +6581,121 @@
           </p:nvSpPr>
           <p:spPr>
             <a:xfrm>
-              <a:off x="6581015" y="4619076"/>
-              <a:ext cx="79199" cy="68589"/>
+              <a:off x="4176090" y="1768520"/>
+              <a:ext cx="1439671" cy="719835"/>
             </a:xfrm>
             <a:custGeom>
               <a:avLst/>
               <a:pathLst>
-                <a:path w="79199" h="68589">
+                <a:path w="1439671" h="719835">
                   <a:moveTo>
-                    <a:pt x="0" y="0"/>
+                    <a:pt x="1439671" y="86380"/>
                   </a:moveTo>
                   <a:lnTo>
-                    <a:pt x="39599" y="68589"/>
-                  </a:lnTo>
-                  <a:lnTo>
-                    <a:pt x="79199" y="0"/>
+                    <a:pt x="1437505" y="67158"/>
+                  </a:lnTo>
+                  <a:lnTo>
+                    <a:pt x="1431116" y="48901"/>
+                  </a:lnTo>
+                  <a:lnTo>
+                    <a:pt x="1420825" y="32523"/>
+                  </a:lnTo>
+                  <a:lnTo>
+                    <a:pt x="1407148" y="18845"/>
+                  </a:lnTo>
+                  <a:lnTo>
+                    <a:pt x="1390769" y="8554"/>
+                  </a:lnTo>
+                  <a:lnTo>
+                    <a:pt x="1372512" y="2165"/>
+                  </a:lnTo>
+                  <a:lnTo>
+                    <a:pt x="1353290" y="0"/>
+                  </a:lnTo>
+                  <a:lnTo>
+                    <a:pt x="86380" y="0"/>
+                  </a:lnTo>
+                  <a:lnTo>
+                    <a:pt x="67158" y="2165"/>
+                  </a:lnTo>
+                  <a:lnTo>
+                    <a:pt x="48901" y="8554"/>
+                  </a:lnTo>
+                  <a:lnTo>
+                    <a:pt x="32523" y="18845"/>
+                  </a:lnTo>
+                  <a:lnTo>
+                    <a:pt x="18845" y="32523"/>
+                  </a:lnTo>
+                  <a:lnTo>
+                    <a:pt x="8554" y="48901"/>
+                  </a:lnTo>
+                  <a:lnTo>
+                    <a:pt x="2165" y="67158"/>
+                  </a:lnTo>
+                  <a:lnTo>
+                    <a:pt x="0" y="86380"/>
+                  </a:lnTo>
+                  <a:lnTo>
+                    <a:pt x="0" y="633455"/>
+                  </a:lnTo>
+                  <a:lnTo>
+                    <a:pt x="2165" y="652676"/>
+                  </a:lnTo>
+                  <a:lnTo>
+                    <a:pt x="8554" y="670934"/>
+                  </a:lnTo>
+                  <a:lnTo>
+                    <a:pt x="18845" y="687312"/>
+                  </a:lnTo>
+                  <a:lnTo>
+                    <a:pt x="32523" y="700990"/>
+                  </a:lnTo>
+                  <a:lnTo>
+                    <a:pt x="48901" y="711281"/>
+                  </a:lnTo>
+                  <a:lnTo>
+                    <a:pt x="67158" y="717669"/>
+                  </a:lnTo>
+                  <a:lnTo>
+                    <a:pt x="86380" y="719835"/>
+                  </a:lnTo>
+                  <a:lnTo>
+                    <a:pt x="1353290" y="719835"/>
+                  </a:lnTo>
+                  <a:lnTo>
+                    <a:pt x="1372512" y="717669"/>
+                  </a:lnTo>
+                  <a:lnTo>
+                    <a:pt x="1390769" y="711281"/>
+                  </a:lnTo>
+                  <a:lnTo>
+                    <a:pt x="1407148" y="700990"/>
+                  </a:lnTo>
+                  <a:lnTo>
+                    <a:pt x="1420825" y="687312"/>
+                  </a:lnTo>
+                  <a:lnTo>
+                    <a:pt x="1431116" y="670934"/>
+                  </a:lnTo>
+                  <a:lnTo>
+                    <a:pt x="1437505" y="652676"/>
+                  </a:lnTo>
+                  <a:lnTo>
+                    <a:pt x="1439671" y="633455"/>
                   </a:lnTo>
                   <a:close/>
                 </a:path>
               </a:pathLst>
             </a:custGeom>
             <a:solidFill>
-              <a:srgbClr val="256F9C">
+              <a:srgbClr val="F9CFCA">
                 <a:alpha val="100000"/>
               </a:srgbClr>
             </a:solidFill>
-            <a:ln w="16260" cap="flat">
+            <a:ln w="21681" cap="flat">
               <a:solidFill>
-                <a:srgbClr val="256F9C">
+                <a:srgbClr val="D9534A">
                   <a:alpha val="100000"/>
                 </a:srgbClr>
               </a:solidFill>
@@ -2880,31 +6711,127 @@
         </p:sp>
         <p:sp>
           <p:nvSpPr>
-            <p:cNvPr id="18" name="pl17"/>
+            <p:cNvPr id="18" name="pg17"/>
             <p:cNvSpPr/>
             <p:nvPr/>
           </p:nvSpPr>
           <p:spPr>
             <a:xfrm>
-              <a:off x="7909261" y="3806424"/>
-              <a:ext cx="0" cy="881241"/>
+              <a:off x="4176090" y="2848273"/>
+              <a:ext cx="1439671" cy="719835"/>
             </a:xfrm>
             <a:custGeom>
               <a:avLst/>
               <a:pathLst>
-                <a:path w="0" h="881241">
+                <a:path w="1439671" h="719835">
                   <a:moveTo>
-                    <a:pt x="0" y="0"/>
+                    <a:pt x="1439671" y="86380"/>
                   </a:moveTo>
                   <a:lnTo>
-                    <a:pt x="0" y="881241"/>
-                  </a:lnTo>
+                    <a:pt x="1437505" y="67158"/>
+                  </a:lnTo>
+                  <a:lnTo>
+                    <a:pt x="1431116" y="48901"/>
+                  </a:lnTo>
+                  <a:lnTo>
+                    <a:pt x="1420825" y="32523"/>
+                  </a:lnTo>
+                  <a:lnTo>
+                    <a:pt x="1407148" y="18845"/>
+                  </a:lnTo>
+                  <a:lnTo>
+                    <a:pt x="1390769" y="8554"/>
+                  </a:lnTo>
+                  <a:lnTo>
+                    <a:pt x="1372512" y="2165"/>
+                  </a:lnTo>
+                  <a:lnTo>
+                    <a:pt x="1353290" y="0"/>
+                  </a:lnTo>
+                  <a:lnTo>
+                    <a:pt x="86380" y="0"/>
+                  </a:lnTo>
+                  <a:lnTo>
+                    <a:pt x="67158" y="2165"/>
+                  </a:lnTo>
+                  <a:lnTo>
+                    <a:pt x="48901" y="8554"/>
+                  </a:lnTo>
+                  <a:lnTo>
+                    <a:pt x="32523" y="18845"/>
+                  </a:lnTo>
+                  <a:lnTo>
+                    <a:pt x="18845" y="32523"/>
+                  </a:lnTo>
+                  <a:lnTo>
+                    <a:pt x="8554" y="48901"/>
+                  </a:lnTo>
+                  <a:lnTo>
+                    <a:pt x="2165" y="67158"/>
+                  </a:lnTo>
+                  <a:lnTo>
+                    <a:pt x="0" y="86380"/>
+                  </a:lnTo>
+                  <a:lnTo>
+                    <a:pt x="0" y="633455"/>
+                  </a:lnTo>
+                  <a:lnTo>
+                    <a:pt x="2165" y="652676"/>
+                  </a:lnTo>
+                  <a:lnTo>
+                    <a:pt x="8554" y="670934"/>
+                  </a:lnTo>
+                  <a:lnTo>
+                    <a:pt x="18845" y="687312"/>
+                  </a:lnTo>
+                  <a:lnTo>
+                    <a:pt x="32523" y="700990"/>
+                  </a:lnTo>
+                  <a:lnTo>
+                    <a:pt x="48901" y="711281"/>
+                  </a:lnTo>
+                  <a:lnTo>
+                    <a:pt x="67158" y="717669"/>
+                  </a:lnTo>
+                  <a:lnTo>
+                    <a:pt x="86380" y="719835"/>
+                  </a:lnTo>
+                  <a:lnTo>
+                    <a:pt x="1353290" y="719835"/>
+                  </a:lnTo>
+                  <a:lnTo>
+                    <a:pt x="1372512" y="717669"/>
+                  </a:lnTo>
+                  <a:lnTo>
+                    <a:pt x="1390769" y="711281"/>
+                  </a:lnTo>
+                  <a:lnTo>
+                    <a:pt x="1407148" y="700990"/>
+                  </a:lnTo>
+                  <a:lnTo>
+                    <a:pt x="1420825" y="687312"/>
+                  </a:lnTo>
+                  <a:lnTo>
+                    <a:pt x="1431116" y="670934"/>
+                  </a:lnTo>
+                  <a:lnTo>
+                    <a:pt x="1437505" y="652676"/>
+                  </a:lnTo>
+                  <a:lnTo>
+                    <a:pt x="1439671" y="633455"/>
+                  </a:lnTo>
+                  <a:close/>
                 </a:path>
               </a:pathLst>
             </a:custGeom>
-            <a:ln w="16260" cap="flat">
+            <a:solidFill>
+              <a:srgbClr val="DBE8F9">
+                <a:alpha val="100000"/>
+              </a:srgbClr>
+            </a:solidFill>
+            <a:ln w="21681" cap="flat">
               <a:solidFill>
-                <a:srgbClr val="256F9C">
+                <a:srgbClr val="4A83D6">
                   <a:alpha val="100000"/>
                 </a:srgbClr>
               </a:solidFill>
@@ -2926,34 +6853,121 @@
           </p:nvSpPr>
           <p:spPr>
             <a:xfrm>
-              <a:off x="7869661" y="4619076"/>
-              <a:ext cx="79200" cy="68589"/>
+              <a:off x="4176090" y="3928026"/>
+              <a:ext cx="1439671" cy="719835"/>
             </a:xfrm>
             <a:custGeom>
               <a:avLst/>
               <a:pathLst>
-                <a:path w="79200" h="68589">
+                <a:path w="1439671" h="719835">
                   <a:moveTo>
-                    <a:pt x="0" y="0"/>
+                    <a:pt x="1439671" y="86380"/>
                   </a:moveTo>
                   <a:lnTo>
-                    <a:pt x="39600" y="68589"/>
-                  </a:lnTo>
-                  <a:lnTo>
-                    <a:pt x="79200" y="0"/>
+                    <a:pt x="1437505" y="67158"/>
+                  </a:lnTo>
+                  <a:lnTo>
+                    <a:pt x="1431116" y="48901"/>
+                  </a:lnTo>
+                  <a:lnTo>
+                    <a:pt x="1420825" y="32523"/>
+                  </a:lnTo>
+                  <a:lnTo>
+                    <a:pt x="1407148" y="18845"/>
+                  </a:lnTo>
+                  <a:lnTo>
+                    <a:pt x="1390769" y="8554"/>
+                  </a:lnTo>
+                  <a:lnTo>
+                    <a:pt x="1372512" y="2165"/>
+                  </a:lnTo>
+                  <a:lnTo>
+                    <a:pt x="1353290" y="0"/>
+                  </a:lnTo>
+                  <a:lnTo>
+                    <a:pt x="86380" y="0"/>
+                  </a:lnTo>
+                  <a:lnTo>
+                    <a:pt x="67158" y="2165"/>
+                  </a:lnTo>
+                  <a:lnTo>
+                    <a:pt x="48901" y="8554"/>
+                  </a:lnTo>
+                  <a:lnTo>
+                    <a:pt x="32523" y="18845"/>
+                  </a:lnTo>
+                  <a:lnTo>
+                    <a:pt x="18845" y="32523"/>
+                  </a:lnTo>
+                  <a:lnTo>
+                    <a:pt x="8554" y="48901"/>
+                  </a:lnTo>
+                  <a:lnTo>
+                    <a:pt x="2165" y="67158"/>
+                  </a:lnTo>
+                  <a:lnTo>
+                    <a:pt x="0" y="86380"/>
+                  </a:lnTo>
+                  <a:lnTo>
+                    <a:pt x="0" y="633455"/>
+                  </a:lnTo>
+                  <a:lnTo>
+                    <a:pt x="2165" y="652676"/>
+                  </a:lnTo>
+                  <a:lnTo>
+                    <a:pt x="8554" y="670934"/>
+                  </a:lnTo>
+                  <a:lnTo>
+                    <a:pt x="18845" y="687312"/>
+                  </a:lnTo>
+                  <a:lnTo>
+                    <a:pt x="32523" y="700990"/>
+                  </a:lnTo>
+                  <a:lnTo>
+                    <a:pt x="48901" y="711281"/>
+                  </a:lnTo>
+                  <a:lnTo>
+                    <a:pt x="67158" y="717669"/>
+                  </a:lnTo>
+                  <a:lnTo>
+                    <a:pt x="86380" y="719835"/>
+                  </a:lnTo>
+                  <a:lnTo>
+                    <a:pt x="1353290" y="719835"/>
+                  </a:lnTo>
+                  <a:lnTo>
+                    <a:pt x="1372512" y="717669"/>
+                  </a:lnTo>
+                  <a:lnTo>
+                    <a:pt x="1390769" y="711281"/>
+                  </a:lnTo>
+                  <a:lnTo>
+                    <a:pt x="1407148" y="700990"/>
+                  </a:lnTo>
+                  <a:lnTo>
+                    <a:pt x="1420825" y="687312"/>
+                  </a:lnTo>
+                  <a:lnTo>
+                    <a:pt x="1431116" y="670934"/>
+                  </a:lnTo>
+                  <a:lnTo>
+                    <a:pt x="1437505" y="652676"/>
+                  </a:lnTo>
+                  <a:lnTo>
+                    <a:pt x="1439671" y="633455"/>
                   </a:lnTo>
                   <a:close/>
                 </a:path>
               </a:pathLst>
             </a:custGeom>
             <a:solidFill>
-              <a:srgbClr val="256F9C">
+              <a:srgbClr val="FCDCC9">
                 <a:alpha val="100000"/>
               </a:srgbClr>
             </a:solidFill>
-            <a:ln w="16260" cap="flat">
+            <a:ln w="21681" cap="flat">
               <a:solidFill>
-                <a:srgbClr val="256F9C">
+                <a:srgbClr val="E8773A">
                   <a:alpha val="100000"/>
                 </a:srgbClr>
               </a:solidFill>
@@ -2969,31 +6983,132 @@
         </p:sp>
         <p:sp>
           <p:nvSpPr>
-            <p:cNvPr id="20" name="rc19"/>
+            <p:cNvPr id="20" name="pg19"/>
             <p:cNvSpPr/>
             <p:nvPr/>
           </p:nvSpPr>
           <p:spPr>
             <a:xfrm>
-              <a:off x="3052059" y="1277645"/>
-              <a:ext cx="3039881" cy="842926"/>
+              <a:off x="4176090" y="5007780"/>
+              <a:ext cx="1439671" cy="719835"/>
             </a:xfrm>
-            <a:prstGeom prst="rect">
+            <a:custGeom>
               <a:avLst/>
-            </a:prstGeom>
+              <a:pathLst>
+                <a:path w="1439671" h="719835">
+                  <a:moveTo>
+                    <a:pt x="1439671" y="86380"/>
+                  </a:moveTo>
+                  <a:lnTo>
+                    <a:pt x="1437505" y="67158"/>
+                  </a:lnTo>
+                  <a:lnTo>
+                    <a:pt x="1431116" y="48901"/>
+                  </a:lnTo>
+                  <a:lnTo>
+                    <a:pt x="1420825" y="32523"/>
+                  </a:lnTo>
+                  <a:lnTo>
+                    <a:pt x="1407148" y="18845"/>
+                  </a:lnTo>
+                  <a:lnTo>
+                    <a:pt x="1390769" y="8554"/>
+                  </a:lnTo>
+                  <a:lnTo>
+                    <a:pt x="1372512" y="2165"/>
+                  </a:lnTo>
+                  <a:lnTo>
+                    <a:pt x="1353290" y="0"/>
+                  </a:lnTo>
+                  <a:lnTo>
+                    <a:pt x="86380" y="0"/>
+                  </a:lnTo>
+                  <a:lnTo>
+                    <a:pt x="67158" y="2165"/>
+                  </a:lnTo>
+                  <a:lnTo>
+                    <a:pt x="48901" y="8554"/>
+                  </a:lnTo>
+                  <a:lnTo>
+                    <a:pt x="32523" y="18845"/>
+                  </a:lnTo>
+                  <a:lnTo>
+                    <a:pt x="18845" y="32523"/>
+                  </a:lnTo>
+                  <a:lnTo>
+                    <a:pt x="8554" y="48901"/>
+                  </a:lnTo>
+                  <a:lnTo>
+                    <a:pt x="2165" y="67158"/>
+                  </a:lnTo>
+                  <a:lnTo>
+                    <a:pt x="0" y="86380"/>
+                  </a:lnTo>
+                  <a:lnTo>
+                    <a:pt x="0" y="633455"/>
+                  </a:lnTo>
+                  <a:lnTo>
+                    <a:pt x="2165" y="652676"/>
+                  </a:lnTo>
+                  <a:lnTo>
+                    <a:pt x="8554" y="670934"/>
+                  </a:lnTo>
+                  <a:lnTo>
+                    <a:pt x="18845" y="687312"/>
+                  </a:lnTo>
+                  <a:lnTo>
+                    <a:pt x="32523" y="700990"/>
+                  </a:lnTo>
+                  <a:lnTo>
+                    <a:pt x="48901" y="711281"/>
+                  </a:lnTo>
+                  <a:lnTo>
+                    <a:pt x="67158" y="717669"/>
+                  </a:lnTo>
+                  <a:lnTo>
+                    <a:pt x="86380" y="719835"/>
+                  </a:lnTo>
+                  <a:lnTo>
+                    <a:pt x="1353290" y="719835"/>
+                  </a:lnTo>
+                  <a:lnTo>
+                    <a:pt x="1372512" y="717669"/>
+                  </a:lnTo>
+                  <a:lnTo>
+                    <a:pt x="1390769" y="711281"/>
+                  </a:lnTo>
+                  <a:lnTo>
+                    <a:pt x="1407148" y="700990"/>
+                  </a:lnTo>
+                  <a:lnTo>
+                    <a:pt x="1420825" y="687312"/>
+                  </a:lnTo>
+                  <a:lnTo>
+                    <a:pt x="1431116" y="670934"/>
+                  </a:lnTo>
+                  <a:lnTo>
+                    <a:pt x="1437505" y="652676"/>
+                  </a:lnTo>
+                  <a:lnTo>
+                    <a:pt x="1439671" y="633455"/>
+                  </a:lnTo>
+                  <a:close/>
+                </a:path>
+              </a:pathLst>
+            </a:custGeom>
             <a:solidFill>
-              <a:srgbClr val="FFFFFF">
+              <a:srgbClr val="E0F2DB">
                 <a:alpha val="100000"/>
               </a:srgbClr>
             </a:solidFill>
-            <a:ln w="24391" cap="flat">
+            <a:ln w="21681" cap="flat">
               <a:solidFill>
-                <a:srgbClr val="4F9A3A">
+                <a:srgbClr val="5AA64F">
                   <a:alpha val="100000"/>
                 </a:srgbClr>
               </a:solidFill>
               <a:prstDash val="solid"/>
-              <a:miter/>
+              <a:round/>
             </a:ln>
           </p:spPr>
           <p:txBody>
@@ -3004,31 +7119,132 @@
         </p:sp>
         <p:sp>
           <p:nvSpPr>
-            <p:cNvPr id="21" name="rc20"/>
+            <p:cNvPr id="21" name="pg20"/>
             <p:cNvSpPr/>
             <p:nvPr/>
           </p:nvSpPr>
           <p:spPr>
             <a:xfrm>
-              <a:off x="1003443" y="2963497"/>
-              <a:ext cx="3039881" cy="842926"/>
+              <a:off x="6047662" y="1678540"/>
+              <a:ext cx="2447440" cy="899794"/>
             </a:xfrm>
-            <a:prstGeom prst="rect">
+            <a:custGeom>
               <a:avLst/>
-            </a:prstGeom>
+              <a:pathLst>
+                <a:path w="2447440" h="899794">
+                  <a:moveTo>
+                    <a:pt x="2447440" y="86380"/>
+                  </a:moveTo>
+                  <a:lnTo>
+                    <a:pt x="2445275" y="67158"/>
+                  </a:lnTo>
+                  <a:lnTo>
+                    <a:pt x="2438886" y="48901"/>
+                  </a:lnTo>
+                  <a:lnTo>
+                    <a:pt x="2428595" y="32523"/>
+                  </a:lnTo>
+                  <a:lnTo>
+                    <a:pt x="2414917" y="18845"/>
+                  </a:lnTo>
+                  <a:lnTo>
+                    <a:pt x="2398539" y="8554"/>
+                  </a:lnTo>
+                  <a:lnTo>
+                    <a:pt x="2380282" y="2165"/>
+                  </a:lnTo>
+                  <a:lnTo>
+                    <a:pt x="2361060" y="0"/>
+                  </a:lnTo>
+                  <a:lnTo>
+                    <a:pt x="86380" y="0"/>
+                  </a:lnTo>
+                  <a:lnTo>
+                    <a:pt x="67158" y="2165"/>
+                  </a:lnTo>
+                  <a:lnTo>
+                    <a:pt x="48901" y="8554"/>
+                  </a:lnTo>
+                  <a:lnTo>
+                    <a:pt x="32523" y="18845"/>
+                  </a:lnTo>
+                  <a:lnTo>
+                    <a:pt x="18845" y="32523"/>
+                  </a:lnTo>
+                  <a:lnTo>
+                    <a:pt x="8554" y="48901"/>
+                  </a:lnTo>
+                  <a:lnTo>
+                    <a:pt x="2165" y="67158"/>
+                  </a:lnTo>
+                  <a:lnTo>
+                    <a:pt x="0" y="86380"/>
+                  </a:lnTo>
+                  <a:lnTo>
+                    <a:pt x="0" y="813414"/>
+                  </a:lnTo>
+                  <a:lnTo>
+                    <a:pt x="2165" y="832635"/>
+                  </a:lnTo>
+                  <a:lnTo>
+                    <a:pt x="8554" y="850893"/>
+                  </a:lnTo>
+                  <a:lnTo>
+                    <a:pt x="18845" y="867271"/>
+                  </a:lnTo>
+                  <a:lnTo>
+                    <a:pt x="32523" y="880948"/>
+                  </a:lnTo>
+                  <a:lnTo>
+                    <a:pt x="48901" y="891240"/>
+                  </a:lnTo>
+                  <a:lnTo>
+                    <a:pt x="67158" y="897628"/>
+                  </a:lnTo>
+                  <a:lnTo>
+                    <a:pt x="86380" y="899794"/>
+                  </a:lnTo>
+                  <a:lnTo>
+                    <a:pt x="2361060" y="899794"/>
+                  </a:lnTo>
+                  <a:lnTo>
+                    <a:pt x="2380282" y="897628"/>
+                  </a:lnTo>
+                  <a:lnTo>
+                    <a:pt x="2398539" y="891240"/>
+                  </a:lnTo>
+                  <a:lnTo>
+                    <a:pt x="2414917" y="880948"/>
+                  </a:lnTo>
+                  <a:lnTo>
+                    <a:pt x="2428595" y="867271"/>
+                  </a:lnTo>
+                  <a:lnTo>
+                    <a:pt x="2438886" y="850893"/>
+                  </a:lnTo>
+                  <a:lnTo>
+                    <a:pt x="2445275" y="832635"/>
+                  </a:lnTo>
+                  <a:lnTo>
+                    <a:pt x="2447440" y="813414"/>
+                  </a:lnTo>
+                  <a:close/>
+                </a:path>
+              </a:pathLst>
+            </a:custGeom>
             <a:solidFill>
-              <a:srgbClr val="FFFFFF">
+              <a:srgbClr val="FCE9E7">
                 <a:alpha val="100000"/>
               </a:srgbClr>
             </a:solidFill>
-            <a:ln w="24391" cap="flat">
+            <a:ln w="21681" cap="flat">
               <a:solidFill>
-                <a:srgbClr val="4F9A3A">
+                <a:srgbClr val="E68F89">
                   <a:alpha val="100000"/>
                 </a:srgbClr>
               </a:solidFill>
               <a:prstDash val="solid"/>
-              <a:miter/>
+              <a:round/>
             </a:ln>
           </p:spPr>
           <p:txBody>
@@ -3039,31 +7255,132 @@
         </p:sp>
         <p:sp>
           <p:nvSpPr>
-            <p:cNvPr id="22" name="rc21"/>
+            <p:cNvPr id="22" name="pg21"/>
             <p:cNvSpPr/>
             <p:nvPr/>
           </p:nvSpPr>
           <p:spPr>
             <a:xfrm>
-              <a:off x="5100675" y="2963497"/>
-              <a:ext cx="3039881" cy="842926"/>
+              <a:off x="6047662" y="2758294"/>
+              <a:ext cx="2447440" cy="899794"/>
             </a:xfrm>
-            <a:prstGeom prst="rect">
+            <a:custGeom>
               <a:avLst/>
-            </a:prstGeom>
+              <a:pathLst>
+                <a:path w="2447440" h="899794">
+                  <a:moveTo>
+                    <a:pt x="2447440" y="86380"/>
+                  </a:moveTo>
+                  <a:lnTo>
+                    <a:pt x="2445275" y="67158"/>
+                  </a:lnTo>
+                  <a:lnTo>
+                    <a:pt x="2438886" y="48901"/>
+                  </a:lnTo>
+                  <a:lnTo>
+                    <a:pt x="2428595" y="32523"/>
+                  </a:lnTo>
+                  <a:lnTo>
+                    <a:pt x="2414917" y="18845"/>
+                  </a:lnTo>
+                  <a:lnTo>
+                    <a:pt x="2398539" y="8554"/>
+                  </a:lnTo>
+                  <a:lnTo>
+                    <a:pt x="2380282" y="2165"/>
+                  </a:lnTo>
+                  <a:lnTo>
+                    <a:pt x="2361060" y="0"/>
+                  </a:lnTo>
+                  <a:lnTo>
+                    <a:pt x="86380" y="0"/>
+                  </a:lnTo>
+                  <a:lnTo>
+                    <a:pt x="67158" y="2165"/>
+                  </a:lnTo>
+                  <a:lnTo>
+                    <a:pt x="48901" y="8554"/>
+                  </a:lnTo>
+                  <a:lnTo>
+                    <a:pt x="32523" y="18845"/>
+                  </a:lnTo>
+                  <a:lnTo>
+                    <a:pt x="18845" y="32523"/>
+                  </a:lnTo>
+                  <a:lnTo>
+                    <a:pt x="8554" y="48901"/>
+                  </a:lnTo>
+                  <a:lnTo>
+                    <a:pt x="2165" y="67158"/>
+                  </a:lnTo>
+                  <a:lnTo>
+                    <a:pt x="0" y="86380"/>
+                  </a:lnTo>
+                  <a:lnTo>
+                    <a:pt x="0" y="813414"/>
+                  </a:lnTo>
+                  <a:lnTo>
+                    <a:pt x="2165" y="832635"/>
+                  </a:lnTo>
+                  <a:lnTo>
+                    <a:pt x="8554" y="850893"/>
+                  </a:lnTo>
+                  <a:lnTo>
+                    <a:pt x="18845" y="867271"/>
+                  </a:lnTo>
+                  <a:lnTo>
+                    <a:pt x="32523" y="880948"/>
+                  </a:lnTo>
+                  <a:lnTo>
+                    <a:pt x="48901" y="891240"/>
+                  </a:lnTo>
+                  <a:lnTo>
+                    <a:pt x="67158" y="897628"/>
+                  </a:lnTo>
+                  <a:lnTo>
+                    <a:pt x="86380" y="899794"/>
+                  </a:lnTo>
+                  <a:lnTo>
+                    <a:pt x="2361060" y="899794"/>
+                  </a:lnTo>
+                  <a:lnTo>
+                    <a:pt x="2380282" y="897628"/>
+                  </a:lnTo>
+                  <a:lnTo>
+                    <a:pt x="2398539" y="891240"/>
+                  </a:lnTo>
+                  <a:lnTo>
+                    <a:pt x="2414917" y="880948"/>
+                  </a:lnTo>
+                  <a:lnTo>
+                    <a:pt x="2428595" y="867271"/>
+                  </a:lnTo>
+                  <a:lnTo>
+                    <a:pt x="2438886" y="850893"/>
+                  </a:lnTo>
+                  <a:lnTo>
+                    <a:pt x="2445275" y="832635"/>
+                  </a:lnTo>
+                  <a:lnTo>
+                    <a:pt x="2447440" y="813414"/>
+                  </a:lnTo>
+                  <a:close/>
+                </a:path>
+              </a:pathLst>
+            </a:custGeom>
             <a:solidFill>
-              <a:srgbClr val="FFFFFF">
+              <a:srgbClr val="EEF4FC">
                 <a:alpha val="100000"/>
               </a:srgbClr>
             </a:solidFill>
-            <a:ln w="24391" cap="flat">
+            <a:ln w="21681" cap="flat">
               <a:solidFill>
-                <a:srgbClr val="4F9A3A">
+                <a:srgbClr val="89AEE4">
                   <a:alpha val="100000"/>
                 </a:srgbClr>
               </a:solidFill>
               <a:prstDash val="solid"/>
-              <a:miter/>
+              <a:round/>
             </a:ln>
           </p:spPr>
           <p:txBody>
@@ -3074,31 +7391,132 @@
         </p:sp>
         <p:sp>
           <p:nvSpPr>
-            <p:cNvPr id="23" name="rc22"/>
+            <p:cNvPr id="23" name="pg22"/>
             <p:cNvSpPr/>
             <p:nvPr/>
           </p:nvSpPr>
           <p:spPr>
             <a:xfrm>
-              <a:off x="623457" y="4687665"/>
-              <a:ext cx="1222561" cy="1226074"/>
+              <a:off x="6047662" y="3838047"/>
+              <a:ext cx="2447440" cy="899794"/>
             </a:xfrm>
-            <a:prstGeom prst="rect">
+            <a:custGeom>
               <a:avLst/>
-            </a:prstGeom>
+              <a:pathLst>
+                <a:path w="2447440" h="899794">
+                  <a:moveTo>
+                    <a:pt x="2447440" y="86380"/>
+                  </a:moveTo>
+                  <a:lnTo>
+                    <a:pt x="2445275" y="67158"/>
+                  </a:lnTo>
+                  <a:lnTo>
+                    <a:pt x="2438886" y="48901"/>
+                  </a:lnTo>
+                  <a:lnTo>
+                    <a:pt x="2428595" y="32523"/>
+                  </a:lnTo>
+                  <a:lnTo>
+                    <a:pt x="2414917" y="18845"/>
+                  </a:lnTo>
+                  <a:lnTo>
+                    <a:pt x="2398539" y="8554"/>
+                  </a:lnTo>
+                  <a:lnTo>
+                    <a:pt x="2380282" y="2165"/>
+                  </a:lnTo>
+                  <a:lnTo>
+                    <a:pt x="2361060" y="0"/>
+                  </a:lnTo>
+                  <a:lnTo>
+                    <a:pt x="86380" y="0"/>
+                  </a:lnTo>
+                  <a:lnTo>
+                    <a:pt x="67158" y="2165"/>
+                  </a:lnTo>
+                  <a:lnTo>
+                    <a:pt x="48901" y="8554"/>
+                  </a:lnTo>
+                  <a:lnTo>
+                    <a:pt x="32523" y="18845"/>
+                  </a:lnTo>
+                  <a:lnTo>
+                    <a:pt x="18845" y="32523"/>
+                  </a:lnTo>
+                  <a:lnTo>
+                    <a:pt x="8554" y="48901"/>
+                  </a:lnTo>
+                  <a:lnTo>
+                    <a:pt x="2165" y="67158"/>
+                  </a:lnTo>
+                  <a:lnTo>
+                    <a:pt x="0" y="86380"/>
+                  </a:lnTo>
+                  <a:lnTo>
+                    <a:pt x="0" y="813414"/>
+                  </a:lnTo>
+                  <a:lnTo>
+                    <a:pt x="2165" y="832635"/>
+                  </a:lnTo>
+                  <a:lnTo>
+                    <a:pt x="8554" y="850893"/>
+                  </a:lnTo>
+                  <a:lnTo>
+                    <a:pt x="18845" y="867271"/>
+                  </a:lnTo>
+                  <a:lnTo>
+                    <a:pt x="32523" y="880948"/>
+                  </a:lnTo>
+                  <a:lnTo>
+                    <a:pt x="48901" y="891240"/>
+                  </a:lnTo>
+                  <a:lnTo>
+                    <a:pt x="67158" y="897628"/>
+                  </a:lnTo>
+                  <a:lnTo>
+                    <a:pt x="86380" y="899794"/>
+                  </a:lnTo>
+                  <a:lnTo>
+                    <a:pt x="2361060" y="899794"/>
+                  </a:lnTo>
+                  <a:lnTo>
+                    <a:pt x="2380282" y="897628"/>
+                  </a:lnTo>
+                  <a:lnTo>
+                    <a:pt x="2398539" y="891240"/>
+                  </a:lnTo>
+                  <a:lnTo>
+                    <a:pt x="2414917" y="880948"/>
+                  </a:lnTo>
+                  <a:lnTo>
+                    <a:pt x="2428595" y="867271"/>
+                  </a:lnTo>
+                  <a:lnTo>
+                    <a:pt x="2438886" y="850893"/>
+                  </a:lnTo>
+                  <a:lnTo>
+                    <a:pt x="2445275" y="832635"/>
+                  </a:lnTo>
+                  <a:lnTo>
+                    <a:pt x="2447440" y="813414"/>
+                  </a:lnTo>
+                  <a:close/>
+                </a:path>
+              </a:pathLst>
+            </a:custGeom>
             <a:solidFill>
-              <a:srgbClr val="FFFFFF">
+              <a:srgbClr val="FDEFE6">
                 <a:alpha val="100000"/>
               </a:srgbClr>
             </a:solidFill>
-            <a:ln w="24391" cap="flat">
+            <a:ln w="21681" cap="flat">
               <a:solidFill>
-                <a:srgbClr val="4F9A3A">
+                <a:srgbClr val="F0A67E">
                   <a:alpha val="100000"/>
                 </a:srgbClr>
               </a:solidFill>
               <a:prstDash val="solid"/>
-              <a:miter/>
+              <a:round/>
             </a:ln>
           </p:spPr>
           <p:txBody>
@@ -3109,31 +7527,132 @@
         </p:sp>
         <p:sp>
           <p:nvSpPr>
-            <p:cNvPr id="24" name="rc23"/>
+            <p:cNvPr id="24" name="pg23"/>
             <p:cNvSpPr/>
             <p:nvPr/>
           </p:nvSpPr>
           <p:spPr>
             <a:xfrm>
-              <a:off x="1912103" y="4687665"/>
-              <a:ext cx="1222561" cy="1226074"/>
+              <a:off x="6047662" y="4917800"/>
+              <a:ext cx="2447440" cy="899794"/>
             </a:xfrm>
-            <a:prstGeom prst="rect">
+            <a:custGeom>
               <a:avLst/>
-            </a:prstGeom>
+              <a:pathLst>
+                <a:path w="2447440" h="899794">
+                  <a:moveTo>
+                    <a:pt x="2447440" y="86380"/>
+                  </a:moveTo>
+                  <a:lnTo>
+                    <a:pt x="2445275" y="67158"/>
+                  </a:lnTo>
+                  <a:lnTo>
+                    <a:pt x="2438886" y="48901"/>
+                  </a:lnTo>
+                  <a:lnTo>
+                    <a:pt x="2428595" y="32523"/>
+                  </a:lnTo>
+                  <a:lnTo>
+                    <a:pt x="2414917" y="18845"/>
+                  </a:lnTo>
+                  <a:lnTo>
+                    <a:pt x="2398539" y="8554"/>
+                  </a:lnTo>
+                  <a:lnTo>
+                    <a:pt x="2380282" y="2165"/>
+                  </a:lnTo>
+                  <a:lnTo>
+                    <a:pt x="2361060" y="0"/>
+                  </a:lnTo>
+                  <a:lnTo>
+                    <a:pt x="86380" y="0"/>
+                  </a:lnTo>
+                  <a:lnTo>
+                    <a:pt x="67158" y="2165"/>
+                  </a:lnTo>
+                  <a:lnTo>
+                    <a:pt x="48901" y="8554"/>
+                  </a:lnTo>
+                  <a:lnTo>
+                    <a:pt x="32523" y="18845"/>
+                  </a:lnTo>
+                  <a:lnTo>
+                    <a:pt x="18845" y="32523"/>
+                  </a:lnTo>
+                  <a:lnTo>
+                    <a:pt x="8554" y="48901"/>
+                  </a:lnTo>
+                  <a:lnTo>
+                    <a:pt x="2165" y="67158"/>
+                  </a:lnTo>
+                  <a:lnTo>
+                    <a:pt x="0" y="86380"/>
+                  </a:lnTo>
+                  <a:lnTo>
+                    <a:pt x="0" y="813414"/>
+                  </a:lnTo>
+                  <a:lnTo>
+                    <a:pt x="2165" y="832635"/>
+                  </a:lnTo>
+                  <a:lnTo>
+                    <a:pt x="8554" y="850893"/>
+                  </a:lnTo>
+                  <a:lnTo>
+                    <a:pt x="18845" y="867271"/>
+                  </a:lnTo>
+                  <a:lnTo>
+                    <a:pt x="32523" y="880948"/>
+                  </a:lnTo>
+                  <a:lnTo>
+                    <a:pt x="48901" y="891240"/>
+                  </a:lnTo>
+                  <a:lnTo>
+                    <a:pt x="67158" y="897628"/>
+                  </a:lnTo>
+                  <a:lnTo>
+                    <a:pt x="86380" y="899794"/>
+                  </a:lnTo>
+                  <a:lnTo>
+                    <a:pt x="2361060" y="899794"/>
+                  </a:lnTo>
+                  <a:lnTo>
+                    <a:pt x="2380282" y="897628"/>
+                  </a:lnTo>
+                  <a:lnTo>
+                    <a:pt x="2398539" y="891240"/>
+                  </a:lnTo>
+                  <a:lnTo>
+                    <a:pt x="2414917" y="880948"/>
+                  </a:lnTo>
+                  <a:lnTo>
+                    <a:pt x="2428595" y="867271"/>
+                  </a:lnTo>
+                  <a:lnTo>
+                    <a:pt x="2438886" y="850893"/>
+                  </a:lnTo>
+                  <a:lnTo>
+                    <a:pt x="2445275" y="832635"/>
+                  </a:lnTo>
+                  <a:lnTo>
+                    <a:pt x="2447440" y="813414"/>
+                  </a:lnTo>
+                  <a:close/>
+                </a:path>
+              </a:pathLst>
+            </a:custGeom>
             <a:solidFill>
-              <a:srgbClr val="FFFFFF">
+              <a:srgbClr val="F1F9EE">
                 <a:alpha val="100000"/>
               </a:srgbClr>
             </a:solidFill>
-            <a:ln w="24391" cap="flat">
+            <a:ln w="21681" cap="flat">
               <a:solidFill>
-                <a:srgbClr val="4F9A3A">
+                <a:srgbClr val="93C58C">
                   <a:alpha val="100000"/>
                 </a:srgbClr>
               </a:solidFill>
               <a:prstDash val="solid"/>
-              <a:miter/>
+              <a:round/>
             </a:ln>
           </p:spPr>
           <p:txBody>
@@ -3144,154 +7663,14 @@
         </p:sp>
         <p:sp>
           <p:nvSpPr>
-            <p:cNvPr id="25" name="rc24"/>
+            <p:cNvPr id="25" name="tx24"/>
             <p:cNvSpPr/>
             <p:nvPr/>
           </p:nvSpPr>
           <p:spPr>
             <a:xfrm>
-              <a:off x="3200748" y="4687665"/>
-              <a:ext cx="1222561" cy="1226074"/>
-            </a:xfrm>
-            <a:prstGeom prst="rect">
-              <a:avLst/>
-            </a:prstGeom>
-            <a:solidFill>
-              <a:srgbClr val="FFFFFF">
-                <a:alpha val="100000"/>
-              </a:srgbClr>
-            </a:solidFill>
-            <a:ln w="24391" cap="flat">
-              <a:solidFill>
-                <a:srgbClr val="4F9A3A">
-                  <a:alpha val="100000"/>
-                </a:srgbClr>
-              </a:solidFill>
-              <a:prstDash val="solid"/>
-              <a:miter/>
-            </a:ln>
-          </p:spPr>
-          <p:txBody>
-            <a:bodyPr/>
-            <a:lstStyle/>
-            <a:p/>
-          </p:txBody>
-        </p:sp>
-        <p:sp>
-          <p:nvSpPr>
-            <p:cNvPr id="26" name="rc25"/>
-            <p:cNvSpPr/>
-            <p:nvPr/>
-          </p:nvSpPr>
-          <p:spPr>
-            <a:xfrm>
-              <a:off x="4720689" y="4687665"/>
-              <a:ext cx="1222561" cy="1226074"/>
-            </a:xfrm>
-            <a:prstGeom prst="rect">
-              <a:avLst/>
-            </a:prstGeom>
-            <a:solidFill>
-              <a:srgbClr val="FFFFFF">
-                <a:alpha val="100000"/>
-              </a:srgbClr>
-            </a:solidFill>
-            <a:ln w="24391" cap="flat">
-              <a:solidFill>
-                <a:srgbClr val="4F9A3A">
-                  <a:alpha val="100000"/>
-                </a:srgbClr>
-              </a:solidFill>
-              <a:prstDash val="solid"/>
-              <a:miter/>
-            </a:ln>
-          </p:spPr>
-          <p:txBody>
-            <a:bodyPr/>
-            <a:lstStyle/>
-            <a:p/>
-          </p:txBody>
-        </p:sp>
-        <p:sp>
-          <p:nvSpPr>
-            <p:cNvPr id="27" name="rc26"/>
-            <p:cNvSpPr/>
-            <p:nvPr/>
-          </p:nvSpPr>
-          <p:spPr>
-            <a:xfrm>
-              <a:off x="6009335" y="4687665"/>
-              <a:ext cx="1222561" cy="1226074"/>
-            </a:xfrm>
-            <a:prstGeom prst="rect">
-              <a:avLst/>
-            </a:prstGeom>
-            <a:solidFill>
-              <a:srgbClr val="FFFFFF">
-                <a:alpha val="100000"/>
-              </a:srgbClr>
-            </a:solidFill>
-            <a:ln w="24391" cap="flat">
-              <a:solidFill>
-                <a:srgbClr val="4F9A3A">
-                  <a:alpha val="100000"/>
-                </a:srgbClr>
-              </a:solidFill>
-              <a:prstDash val="solid"/>
-              <a:miter/>
-            </a:ln>
-          </p:spPr>
-          <p:txBody>
-            <a:bodyPr/>
-            <a:lstStyle/>
-            <a:p/>
-          </p:txBody>
-        </p:sp>
-        <p:sp>
-          <p:nvSpPr>
-            <p:cNvPr id="28" name="rc27"/>
-            <p:cNvSpPr/>
-            <p:nvPr/>
-          </p:nvSpPr>
-          <p:spPr>
-            <a:xfrm>
-              <a:off x="7297980" y="4687665"/>
-              <a:ext cx="1222561" cy="1226074"/>
-            </a:xfrm>
-            <a:prstGeom prst="rect">
-              <a:avLst/>
-            </a:prstGeom>
-            <a:solidFill>
-              <a:srgbClr val="FFFFFF">
-                <a:alpha val="100000"/>
-              </a:srgbClr>
-            </a:solidFill>
-            <a:ln w="24391" cap="flat">
-              <a:solidFill>
-                <a:srgbClr val="4F9A3A">
-                  <a:alpha val="100000"/>
-                </a:srgbClr>
-              </a:solidFill>
-              <a:prstDash val="solid"/>
-              <a:miter/>
-            </a:ln>
-          </p:spPr>
-          <p:txBody>
-            <a:bodyPr/>
-            <a:lstStyle/>
-            <a:p/>
-          </p:txBody>
-        </p:sp>
-        <p:sp>
-          <p:nvSpPr>
-            <p:cNvPr id="29" name="tx28"/>
-            <p:cNvSpPr/>
-            <p:nvPr/>
-          </p:nvSpPr>
-          <p:spPr>
-            <a:xfrm>
-              <a:off x="3737975" y="1408544"/>
-              <a:ext cx="1668048" cy="109087"/>
+              <a:off x="899685" y="3548185"/>
+              <a:ext cx="578175" cy="111831"/>
             </a:xfrm>
             <a:prstGeom prst="rect">
               <a:avLst/>
@@ -3304,7 +7683,7 @@
             <a:p>
               <a:pPr algn="l" marL="0" marR="0" indent="0">
                 <a:lnSpc>
-                  <a:spcPts val="1195"/>
+                  <a:spcPts val="1223"/>
                 </a:lnSpc>
                 <a:spcBef>
                   <a:spcPts val="0"/>
@@ -3314,30 +7693,30 @@
                 </a:spcAft>
               </a:pPr>
               <a:r>
-                <a:rPr sz="1195" b="1">
+                <a:rPr sz="1223" b="1">
                   <a:solidFill>
-                    <a:srgbClr val="000000">
+                    <a:srgbClr val="1F1F1F">
                       <a:alpha val="100000"/>
                     </a:srgbClr>
                   </a:solidFill>
                   <a:latin typeface="Helvetica"/>
                   <a:cs typeface="Helvetica"/>
                 </a:rPr>
-                <a:t>Non-alcoholic hepatitis</a:t>
+                <a:t>Non-AH</a:t>
               </a:r>
             </a:p>
           </p:txBody>
         </p:sp>
         <p:sp>
           <p:nvSpPr>
-            <p:cNvPr id="30" name="tx29"/>
+            <p:cNvPr id="26" name="tx25"/>
             <p:cNvSpPr/>
             <p:nvPr/>
           </p:nvSpPr>
           <p:spPr>
             <a:xfrm>
-              <a:off x="1937939" y="3094397"/>
-              <a:ext cx="1170889" cy="109087"/>
+              <a:off x="2444293" y="2488040"/>
+              <a:ext cx="1088136" cy="101406"/>
             </a:xfrm>
             <a:prstGeom prst="rect">
               <a:avLst/>
@@ -3350,7 +7729,7 @@
             <a:p>
               <a:pPr algn="l" marL="0" marR="0" indent="0">
                 <a:lnSpc>
-                  <a:spcPts val="1195"/>
+                  <a:spcPts val="1109"/>
                 </a:lnSpc>
                 <a:spcBef>
                   <a:spcPts val="0"/>
@@ -3360,9 +7739,9 @@
                 </a:spcAft>
               </a:pPr>
               <a:r>
-                <a:rPr sz="1195" b="1">
+                <a:rPr sz="1109" b="1">
                   <a:solidFill>
-                    <a:srgbClr val="000000">
+                    <a:srgbClr val="1F1F1F">
                       <a:alpha val="100000"/>
                     </a:srgbClr>
                   </a:solidFill>
@@ -3376,14 +7755,14 @@
         </p:sp>
         <p:sp>
           <p:nvSpPr>
-            <p:cNvPr id="31" name="tx30"/>
+            <p:cNvPr id="27" name="tx26"/>
             <p:cNvSpPr/>
             <p:nvPr/>
           </p:nvSpPr>
           <p:spPr>
             <a:xfrm>
-              <a:off x="6182526" y="3094397"/>
-              <a:ext cx="876178" cy="109087"/>
+              <a:off x="2581225" y="4647547"/>
+              <a:ext cx="814273" cy="101406"/>
             </a:xfrm>
             <a:prstGeom prst="rect">
               <a:avLst/>
@@ -3396,7 +7775,7 @@
             <a:p>
               <a:pPr algn="l" marL="0" marR="0" indent="0">
                 <a:lnSpc>
-                  <a:spcPts val="1195"/>
+                  <a:spcPts val="1109"/>
                 </a:lnSpc>
                 <a:spcBef>
                   <a:spcPts val="0"/>
@@ -3406,9 +7785,9 @@
                 </a:spcAft>
               </a:pPr>
               <a:r>
-                <a:rPr sz="1195" b="1">
+                <a:rPr sz="1109" b="1">
                   <a:solidFill>
-                    <a:srgbClr val="000000">
+                    <a:srgbClr val="1F1F1F">
                       <a:alpha val="100000"/>
                     </a:srgbClr>
                   </a:solidFill>
@@ -3422,14 +7801,14 @@
         </p:sp>
         <p:sp>
           <p:nvSpPr>
-            <p:cNvPr id="32" name="tx31"/>
+            <p:cNvPr id="28" name="tx27"/>
             <p:cNvSpPr/>
             <p:nvPr/>
           </p:nvSpPr>
           <p:spPr>
             <a:xfrm>
-              <a:off x="1054281" y="4910630"/>
-              <a:ext cx="360913" cy="93543"/>
+              <a:off x="4571954" y="1920428"/>
+              <a:ext cx="647943" cy="85679"/>
             </a:xfrm>
             <a:prstGeom prst="rect">
               <a:avLst/>
@@ -3442,7 +7821,7 @@
             <a:p>
               <a:pPr algn="l" marL="0" marR="0" indent="0">
                 <a:lnSpc>
-                  <a:spcPts val="1024"/>
+                  <a:spcPts val="938"/>
                 </a:lnSpc>
                 <a:spcBef>
                   <a:spcPts val="0"/>
@@ -3452,16 +7831,200 @@
                 </a:spcAft>
               </a:pPr>
               <a:r>
-                <a:rPr sz="1024" b="1">
+                <a:rPr sz="938" b="1">
                   <a:solidFill>
-                    <a:srgbClr val="000000">
+                    <a:srgbClr val="1F1F1F">
                       <a:alpha val="100000"/>
                     </a:srgbClr>
                   </a:solidFill>
                   <a:latin typeface="Helvetica"/>
                   <a:cs typeface="Helvetica"/>
                 </a:rPr>
-                <a:t>Death</a:t>
+                <a:t>RRT during</a:t>
+              </a:r>
+            </a:p>
+          </p:txBody>
+        </p:sp>
+        <p:sp>
+          <p:nvSpPr>
+            <p:cNvPr id="29" name="tx28"/>
+            <p:cNvSpPr/>
+            <p:nvPr/>
+          </p:nvSpPr>
+          <p:spPr>
+            <a:xfrm>
+              <a:off x="4479233" y="2049213"/>
+              <a:ext cx="833384" cy="85679"/>
+            </a:xfrm>
+            <a:prstGeom prst="rect">
+              <a:avLst/>
+            </a:prstGeom>
+            <a:noFill/>
+          </p:spPr>
+          <p:txBody>
+            <a:bodyPr lIns="0" rIns="0" tIns="0" bIns="0" anchorCtr="1" anchor="ctr" wrap="none"/>
+            <a:lstStyle/>
+            <a:p>
+              <a:pPr algn="l" marL="0" marR="0" indent="0">
+                <a:lnSpc>
+                  <a:spcPts val="938"/>
+                </a:lnSpc>
+                <a:spcBef>
+                  <a:spcPts val="0"/>
+                </a:spcBef>
+                <a:spcAft>
+                  <a:spcPts val="0"/>
+                </a:spcAft>
+              </a:pPr>
+              <a:r>
+                <a:rPr sz="938" b="1">
+                  <a:solidFill>
+                    <a:srgbClr val="1F1F1F">
+                      <a:alpha val="100000"/>
+                    </a:srgbClr>
+                  </a:solidFill>
+                  <a:latin typeface="Helvetica"/>
+                  <a:cs typeface="Helvetica"/>
+                </a:rPr>
+                <a:t>hospitalization</a:t>
+              </a:r>
+            </a:p>
+          </p:txBody>
+        </p:sp>
+        <p:sp>
+          <p:nvSpPr>
+            <p:cNvPr id="30" name="tx29"/>
+            <p:cNvSpPr/>
+            <p:nvPr/>
+          </p:nvSpPr>
+          <p:spPr>
+            <a:xfrm>
+              <a:off x="4476079" y="3000182"/>
+              <a:ext cx="839693" cy="85679"/>
+            </a:xfrm>
+            <a:prstGeom prst="rect">
+              <a:avLst/>
+            </a:prstGeom>
+            <a:noFill/>
+          </p:spPr>
+          <p:txBody>
+            <a:bodyPr lIns="0" rIns="0" tIns="0" bIns="0" anchorCtr="1" anchor="ctr" wrap="none"/>
+            <a:lstStyle/>
+            <a:p>
+              <a:pPr algn="l" marL="0" marR="0" indent="0">
+                <a:lnSpc>
+                  <a:spcPts val="938"/>
+                </a:lnSpc>
+                <a:spcBef>
+                  <a:spcPts val="0"/>
+                </a:spcBef>
+                <a:spcAft>
+                  <a:spcPts val="0"/>
+                </a:spcAft>
+              </a:pPr>
+              <a:r>
+                <a:rPr sz="938" b="1">
+                  <a:solidFill>
+                    <a:srgbClr val="1F1F1F">
+                      <a:alpha val="100000"/>
+                    </a:srgbClr>
+                  </a:solidFill>
+                  <a:latin typeface="Helvetica"/>
+                  <a:cs typeface="Helvetica"/>
+                </a:rPr>
+                <a:t>No RRT during</a:t>
+              </a:r>
+            </a:p>
+          </p:txBody>
+        </p:sp>
+        <p:sp>
+          <p:nvSpPr>
+            <p:cNvPr id="31" name="tx30"/>
+            <p:cNvSpPr/>
+            <p:nvPr/>
+          </p:nvSpPr>
+          <p:spPr>
+            <a:xfrm>
+              <a:off x="4479233" y="3128967"/>
+              <a:ext cx="833384" cy="85679"/>
+            </a:xfrm>
+            <a:prstGeom prst="rect">
+              <a:avLst/>
+            </a:prstGeom>
+            <a:noFill/>
+          </p:spPr>
+          <p:txBody>
+            <a:bodyPr lIns="0" rIns="0" tIns="0" bIns="0" anchorCtr="1" anchor="ctr" wrap="none"/>
+            <a:lstStyle/>
+            <a:p>
+              <a:pPr algn="l" marL="0" marR="0" indent="0">
+                <a:lnSpc>
+                  <a:spcPts val="938"/>
+                </a:lnSpc>
+                <a:spcBef>
+                  <a:spcPts val="0"/>
+                </a:spcBef>
+                <a:spcAft>
+                  <a:spcPts val="0"/>
+                </a:spcAft>
+              </a:pPr>
+              <a:r>
+                <a:rPr sz="938" b="1">
+                  <a:solidFill>
+                    <a:srgbClr val="1F1F1F">
+                      <a:alpha val="100000"/>
+                    </a:srgbClr>
+                  </a:solidFill>
+                  <a:latin typeface="Helvetica"/>
+                  <a:cs typeface="Helvetica"/>
+                </a:rPr>
+                <a:t>hospitalization</a:t>
+              </a:r>
+            </a:p>
+          </p:txBody>
+        </p:sp>
+        <p:sp>
+          <p:nvSpPr>
+            <p:cNvPr id="32" name="tx31"/>
+            <p:cNvSpPr/>
+            <p:nvPr/>
+          </p:nvSpPr>
+          <p:spPr>
+            <a:xfrm>
+              <a:off x="4571954" y="4079935"/>
+              <a:ext cx="647943" cy="85679"/>
+            </a:xfrm>
+            <a:prstGeom prst="rect">
+              <a:avLst/>
+            </a:prstGeom>
+            <a:noFill/>
+          </p:spPr>
+          <p:txBody>
+            <a:bodyPr lIns="0" rIns="0" tIns="0" bIns="0" anchorCtr="1" anchor="ctr" wrap="none"/>
+            <a:lstStyle/>
+            <a:p>
+              <a:pPr algn="l" marL="0" marR="0" indent="0">
+                <a:lnSpc>
+                  <a:spcPts val="938"/>
+                </a:lnSpc>
+                <a:spcBef>
+                  <a:spcPts val="0"/>
+                </a:spcBef>
+                <a:spcAft>
+                  <a:spcPts val="0"/>
+                </a:spcAft>
+              </a:pPr>
+              <a:r>
+                <a:rPr sz="938" b="1">
+                  <a:solidFill>
+                    <a:srgbClr val="1F1F1F">
+                      <a:alpha val="100000"/>
+                    </a:srgbClr>
+                  </a:solidFill>
+                  <a:latin typeface="Helvetica"/>
+                  <a:cs typeface="Helvetica"/>
+                </a:rPr>
+                <a:t>RRT during</a:t>
               </a:r>
             </a:p>
           </p:txBody>
@@ -3474,8 +8037,8 @@
           </p:nvSpPr>
           <p:spPr>
             <a:xfrm>
-              <a:off x="2057680" y="4910630"/>
-              <a:ext cx="931407" cy="93543"/>
+              <a:off x="4479233" y="4208720"/>
+              <a:ext cx="833384" cy="85679"/>
             </a:xfrm>
             <a:prstGeom prst="rect">
               <a:avLst/>
@@ -3488,7 +8051,7 @@
             <a:p>
               <a:pPr algn="l" marL="0" marR="0" indent="0">
                 <a:lnSpc>
-                  <a:spcPts val="1024"/>
+                  <a:spcPts val="938"/>
                 </a:lnSpc>
                 <a:spcBef>
                   <a:spcPts val="0"/>
@@ -3498,16 +8061,16 @@
                 </a:spcAft>
               </a:pPr>
               <a:r>
-                <a:rPr sz="1024" b="1">
+                <a:rPr sz="938" b="1">
                   <a:solidFill>
-                    <a:srgbClr val="000000">
+                    <a:srgbClr val="1F1F1F">
                       <a:alpha val="100000"/>
                     </a:srgbClr>
                   </a:solidFill>
                   <a:latin typeface="Helvetica"/>
                   <a:cs typeface="Helvetica"/>
                 </a:rPr>
-                <a:t>RRT at 90 days</a:t>
+                <a:t>hospitalization</a:t>
               </a:r>
             </a:p>
           </p:txBody>
@@ -3520,8 +8083,8 @@
           </p:nvSpPr>
           <p:spPr>
             <a:xfrm>
-              <a:off x="3324700" y="4910630"/>
-              <a:ext cx="974658" cy="93543"/>
+              <a:off x="4476079" y="5159688"/>
+              <a:ext cx="839693" cy="85679"/>
             </a:xfrm>
             <a:prstGeom prst="rect">
               <a:avLst/>
@@ -3534,7 +8097,7 @@
             <a:p>
               <a:pPr algn="l" marL="0" marR="0" indent="0">
                 <a:lnSpc>
-                  <a:spcPts val="1024"/>
+                  <a:spcPts val="938"/>
                 </a:lnSpc>
                 <a:spcBef>
                   <a:spcPts val="0"/>
@@ -3544,16 +8107,16 @@
                 </a:spcAft>
               </a:pPr>
               <a:r>
-                <a:rPr sz="1024" b="1">
+                <a:rPr sz="938" b="1">
                   <a:solidFill>
-                    <a:srgbClr val="000000">
+                    <a:srgbClr val="1F1F1F">
                       <a:alpha val="100000"/>
                     </a:srgbClr>
                   </a:solidFill>
                   <a:latin typeface="Helvetica"/>
                   <a:cs typeface="Helvetica"/>
                 </a:rPr>
-                <a:t>Liver transplant</a:t>
+                <a:t>No RRT during</a:t>
               </a:r>
             </a:p>
           </p:txBody>
@@ -3566,8 +8129,8 @@
           </p:nvSpPr>
           <p:spPr>
             <a:xfrm>
-              <a:off x="5151513" y="4910630"/>
-              <a:ext cx="360913" cy="93543"/>
+              <a:off x="4479233" y="5288473"/>
+              <a:ext cx="833384" cy="85679"/>
             </a:xfrm>
             <a:prstGeom prst="rect">
               <a:avLst/>
@@ -3580,7 +8143,7 @@
             <a:p>
               <a:pPr algn="l" marL="0" marR="0" indent="0">
                 <a:lnSpc>
-                  <a:spcPts val="1024"/>
+                  <a:spcPts val="938"/>
                 </a:lnSpc>
                 <a:spcBef>
                   <a:spcPts val="0"/>
@@ -3590,16 +8153,16 @@
                 </a:spcAft>
               </a:pPr>
               <a:r>
-                <a:rPr sz="1024" b="1">
+                <a:rPr sz="938" b="1">
                   <a:solidFill>
-                    <a:srgbClr val="000000">
+                    <a:srgbClr val="1F1F1F">
                       <a:alpha val="100000"/>
                     </a:srgbClr>
                   </a:solidFill>
                   <a:latin typeface="Helvetica"/>
                   <a:cs typeface="Helvetica"/>
                 </a:rPr>
-                <a:t>Death</a:t>
+                <a:t>hospitalization</a:t>
               </a:r>
             </a:p>
           </p:txBody>
@@ -3612,8 +8175,8 @@
           </p:nvSpPr>
           <p:spPr>
             <a:xfrm>
-              <a:off x="6154912" y="4910630"/>
-              <a:ext cx="931407" cy="93543"/>
+              <a:off x="897582" y="3854585"/>
+              <a:ext cx="582381" cy="103692"/>
             </a:xfrm>
             <a:prstGeom prst="rect">
               <a:avLst/>
@@ -3626,7 +8189,7 @@
             <a:p>
               <a:pPr algn="l" marL="0" marR="0" indent="0">
                 <a:lnSpc>
-                  <a:spcPts val="1024"/>
+                  <a:spcPts val="1138"/>
                 </a:lnSpc>
                 <a:spcBef>
                   <a:spcPts val="0"/>
@@ -3636,16 +8199,16 @@
                 </a:spcAft>
               </a:pPr>
               <a:r>
-                <a:rPr sz="1024" b="1">
+                <a:rPr sz="1138">
                   <a:solidFill>
-                    <a:srgbClr val="000000">
+                    <a:srgbClr val="1F1F1F">
                       <a:alpha val="100000"/>
                     </a:srgbClr>
                   </a:solidFill>
                   <a:latin typeface="Helvetica"/>
                   <a:cs typeface="Helvetica"/>
                 </a:rPr>
-                <a:t>RRT at 90 days</a:t>
+                <a:t>(n = 184)</a:t>
               </a:r>
             </a:p>
           </p:txBody>
@@ -3658,8 +8221,8 @@
           </p:nvSpPr>
           <p:spPr>
             <a:xfrm>
-              <a:off x="7421932" y="4910630"/>
-              <a:ext cx="974658" cy="93543"/>
+              <a:off x="2756424" y="2764367"/>
+              <a:ext cx="463875" cy="95829"/>
             </a:xfrm>
             <a:prstGeom prst="rect">
               <a:avLst/>
@@ -3672,7 +8235,7 @@
             <a:p>
               <a:pPr algn="l" marL="0" marR="0" indent="0">
                 <a:lnSpc>
-                  <a:spcPts val="1024"/>
+                  <a:spcPts val="1052"/>
                 </a:lnSpc>
                 <a:spcBef>
                   <a:spcPts val="0"/>
@@ -3682,16 +8245,16 @@
                 </a:spcAft>
               </a:pPr>
               <a:r>
-                <a:rPr sz="1024" b="1">
+                <a:rPr sz="1052">
                   <a:solidFill>
-                    <a:srgbClr val="000000">
+                    <a:srgbClr val="1F1F1F">
                       <a:alpha val="100000"/>
                     </a:srgbClr>
                   </a:solidFill>
                   <a:latin typeface="Helvetica"/>
                   <a:cs typeface="Helvetica"/>
                 </a:rPr>
-                <a:t>Liver transplant</a:t>
+                <a:t>(n = 78)</a:t>
               </a:r>
             </a:p>
           </p:txBody>
@@ -3704,8 +8267,550 @@
           </p:nvSpPr>
           <p:spPr>
             <a:xfrm>
-              <a:off x="4128516" y="1642107"/>
-              <a:ext cx="886968" cy="80284"/>
+              <a:off x="2719299" y="4923873"/>
+              <a:ext cx="538124" cy="95829"/>
+            </a:xfrm>
+            <a:prstGeom prst="rect">
+              <a:avLst/>
+            </a:prstGeom>
+            <a:noFill/>
+          </p:spPr>
+          <p:txBody>
+            <a:bodyPr lIns="0" rIns="0" tIns="0" bIns="0" anchorCtr="1" anchor="ctr" wrap="none"/>
+            <a:lstStyle/>
+            <a:p>
+              <a:pPr algn="l" marL="0" marR="0" indent="0">
+                <a:lnSpc>
+                  <a:spcPts val="1052"/>
+                </a:lnSpc>
+                <a:spcBef>
+                  <a:spcPts val="0"/>
+                </a:spcBef>
+                <a:spcAft>
+                  <a:spcPts val="0"/>
+                </a:spcAft>
+              </a:pPr>
+              <a:r>
+                <a:rPr sz="1052">
+                  <a:solidFill>
+                    <a:srgbClr val="1F1F1F">
+                      <a:alpha val="100000"/>
+                    </a:srgbClr>
+                  </a:solidFill>
+                  <a:latin typeface="Helvetica"/>
+                  <a:cs typeface="Helvetica"/>
+                </a:rPr>
+                <a:t>(n = 106)</a:t>
+              </a:r>
+            </a:p>
+          </p:txBody>
+        </p:sp>
+        <p:sp>
+          <p:nvSpPr>
+            <p:cNvPr id="39" name="tx38"/>
+            <p:cNvSpPr/>
+            <p:nvPr/>
+          </p:nvSpPr>
+          <p:spPr>
+            <a:xfrm>
+              <a:off x="4689088" y="2301686"/>
+              <a:ext cx="413674" cy="85404"/>
+            </a:xfrm>
+            <a:prstGeom prst="rect">
+              <a:avLst/>
+            </a:prstGeom>
+            <a:noFill/>
+          </p:spPr>
+          <p:txBody>
+            <a:bodyPr lIns="0" rIns="0" tIns="0" bIns="0" anchorCtr="1" anchor="ctr" wrap="none"/>
+            <a:lstStyle/>
+            <a:p>
+              <a:pPr algn="l" marL="0" marR="0" indent="0">
+                <a:lnSpc>
+                  <a:spcPts val="938"/>
+                </a:lnSpc>
+                <a:spcBef>
+                  <a:spcPts val="0"/>
+                </a:spcBef>
+                <a:spcAft>
+                  <a:spcPts val="0"/>
+                </a:spcAft>
+              </a:pPr>
+              <a:r>
+                <a:rPr sz="938">
+                  <a:solidFill>
+                    <a:srgbClr val="1F1F1F">
+                      <a:alpha val="100000"/>
+                    </a:srgbClr>
+                  </a:solidFill>
+                  <a:latin typeface="Helvetica"/>
+                  <a:cs typeface="Helvetica"/>
+                </a:rPr>
+                <a:t>(n = 36)</a:t>
+              </a:r>
+            </a:p>
+          </p:txBody>
+        </p:sp>
+        <p:sp>
+          <p:nvSpPr>
+            <p:cNvPr id="40" name="tx39"/>
+            <p:cNvSpPr/>
+            <p:nvPr/>
+          </p:nvSpPr>
+          <p:spPr>
+            <a:xfrm>
+              <a:off x="4689088" y="3381439"/>
+              <a:ext cx="413674" cy="85404"/>
+            </a:xfrm>
+            <a:prstGeom prst="rect">
+              <a:avLst/>
+            </a:prstGeom>
+            <a:noFill/>
+          </p:spPr>
+          <p:txBody>
+            <a:bodyPr lIns="0" rIns="0" tIns="0" bIns="0" anchorCtr="1" anchor="ctr" wrap="none"/>
+            <a:lstStyle/>
+            <a:p>
+              <a:pPr algn="l" marL="0" marR="0" indent="0">
+                <a:lnSpc>
+                  <a:spcPts val="938"/>
+                </a:lnSpc>
+                <a:spcBef>
+                  <a:spcPts val="0"/>
+                </a:spcBef>
+                <a:spcAft>
+                  <a:spcPts val="0"/>
+                </a:spcAft>
+              </a:pPr>
+              <a:r>
+                <a:rPr sz="938">
+                  <a:solidFill>
+                    <a:srgbClr val="1F1F1F">
+                      <a:alpha val="100000"/>
+                    </a:srgbClr>
+                  </a:solidFill>
+                  <a:latin typeface="Helvetica"/>
+                  <a:cs typeface="Helvetica"/>
+                </a:rPr>
+                <a:t>(n = 42)</a:t>
+              </a:r>
+            </a:p>
+          </p:txBody>
+        </p:sp>
+        <p:sp>
+          <p:nvSpPr>
+            <p:cNvPr id="41" name="tx40"/>
+            <p:cNvSpPr/>
+            <p:nvPr/>
+          </p:nvSpPr>
+          <p:spPr>
+            <a:xfrm>
+              <a:off x="4689088" y="4461192"/>
+              <a:ext cx="413674" cy="85404"/>
+            </a:xfrm>
+            <a:prstGeom prst="rect">
+              <a:avLst/>
+            </a:prstGeom>
+            <a:noFill/>
+          </p:spPr>
+          <p:txBody>
+            <a:bodyPr lIns="0" rIns="0" tIns="0" bIns="0" anchorCtr="1" anchor="ctr" wrap="none"/>
+            <a:lstStyle/>
+            <a:p>
+              <a:pPr algn="l" marL="0" marR="0" indent="0">
+                <a:lnSpc>
+                  <a:spcPts val="938"/>
+                </a:lnSpc>
+                <a:spcBef>
+                  <a:spcPts val="0"/>
+                </a:spcBef>
+                <a:spcAft>
+                  <a:spcPts val="0"/>
+                </a:spcAft>
+              </a:pPr>
+              <a:r>
+                <a:rPr sz="938">
+                  <a:solidFill>
+                    <a:srgbClr val="1F1F1F">
+                      <a:alpha val="100000"/>
+                    </a:srgbClr>
+                  </a:solidFill>
+                  <a:latin typeface="Helvetica"/>
+                  <a:cs typeface="Helvetica"/>
+                </a:rPr>
+                <a:t>(n = 21)</a:t>
+              </a:r>
+            </a:p>
+          </p:txBody>
+        </p:sp>
+        <p:sp>
+          <p:nvSpPr>
+            <p:cNvPr id="42" name="tx41"/>
+            <p:cNvSpPr/>
+            <p:nvPr/>
+          </p:nvSpPr>
+          <p:spPr>
+            <a:xfrm>
+              <a:off x="4689088" y="5540946"/>
+              <a:ext cx="413674" cy="85404"/>
+            </a:xfrm>
+            <a:prstGeom prst="rect">
+              <a:avLst/>
+            </a:prstGeom>
+            <a:noFill/>
+          </p:spPr>
+          <p:txBody>
+            <a:bodyPr lIns="0" rIns="0" tIns="0" bIns="0" anchorCtr="1" anchor="ctr" wrap="none"/>
+            <a:lstStyle/>
+            <a:p>
+              <a:pPr algn="l" marL="0" marR="0" indent="0">
+                <a:lnSpc>
+                  <a:spcPts val="938"/>
+                </a:lnSpc>
+                <a:spcBef>
+                  <a:spcPts val="0"/>
+                </a:spcBef>
+                <a:spcAft>
+                  <a:spcPts val="0"/>
+                </a:spcAft>
+              </a:pPr>
+              <a:r>
+                <a:rPr sz="938">
+                  <a:solidFill>
+                    <a:srgbClr val="1F1F1F">
+                      <a:alpha val="100000"/>
+                    </a:srgbClr>
+                  </a:solidFill>
+                  <a:latin typeface="Helvetica"/>
+                  <a:cs typeface="Helvetica"/>
+                </a:rPr>
+                <a:t>(n = 85)</a:t>
+              </a:r>
+            </a:p>
+          </p:txBody>
+        </p:sp>
+        <p:sp>
+          <p:nvSpPr>
+            <p:cNvPr id="43" name="rc42"/>
+            <p:cNvSpPr/>
+            <p:nvPr/>
+          </p:nvSpPr>
+          <p:spPr>
+            <a:xfrm>
+              <a:off x="6162836" y="1829706"/>
+              <a:ext cx="107975" cy="107975"/>
+            </a:xfrm>
+            <a:prstGeom prst="rect">
+              <a:avLst/>
+            </a:prstGeom>
+            <a:solidFill>
+              <a:srgbClr val="E5534B">
+                <a:alpha val="100000"/>
+              </a:srgbClr>
+            </a:solidFill>
+          </p:spPr>
+          <p:txBody>
+            <a:bodyPr/>
+            <a:lstStyle/>
+            <a:p/>
+          </p:txBody>
+        </p:sp>
+        <p:sp>
+          <p:nvSpPr>
+            <p:cNvPr id="44" name="rc43"/>
+            <p:cNvSpPr/>
+            <p:nvPr/>
+          </p:nvSpPr>
+          <p:spPr>
+            <a:xfrm>
+              <a:off x="6162836" y="2074450"/>
+              <a:ext cx="107975" cy="107975"/>
+            </a:xfrm>
+            <a:prstGeom prst="rect">
+              <a:avLst/>
+            </a:prstGeom>
+            <a:solidFill>
+              <a:srgbClr val="1F5FBF">
+                <a:alpha val="100000"/>
+              </a:srgbClr>
+            </a:solidFill>
+          </p:spPr>
+          <p:txBody>
+            <a:bodyPr/>
+            <a:lstStyle/>
+            <a:p/>
+          </p:txBody>
+        </p:sp>
+        <p:sp>
+          <p:nvSpPr>
+            <p:cNvPr id="45" name="rc44"/>
+            <p:cNvSpPr/>
+            <p:nvPr/>
+          </p:nvSpPr>
+          <p:spPr>
+            <a:xfrm>
+              <a:off x="6162836" y="2319194"/>
+              <a:ext cx="107975" cy="107975"/>
+            </a:xfrm>
+            <a:prstGeom prst="rect">
+              <a:avLst/>
+            </a:prstGeom>
+            <a:solidFill>
+              <a:srgbClr val="C084D8">
+                <a:alpha val="100000"/>
+              </a:srgbClr>
+            </a:solidFill>
+          </p:spPr>
+          <p:txBody>
+            <a:bodyPr/>
+            <a:lstStyle/>
+            <a:p/>
+          </p:txBody>
+        </p:sp>
+        <p:sp>
+          <p:nvSpPr>
+            <p:cNvPr id="46" name="rc45"/>
+            <p:cNvSpPr/>
+            <p:nvPr/>
+          </p:nvSpPr>
+          <p:spPr>
+            <a:xfrm>
+              <a:off x="6162836" y="2909459"/>
+              <a:ext cx="107975" cy="107975"/>
+            </a:xfrm>
+            <a:prstGeom prst="rect">
+              <a:avLst/>
+            </a:prstGeom>
+            <a:solidFill>
+              <a:srgbClr val="E5534B">
+                <a:alpha val="100000"/>
+              </a:srgbClr>
+            </a:solidFill>
+          </p:spPr>
+          <p:txBody>
+            <a:bodyPr/>
+            <a:lstStyle/>
+            <a:p/>
+          </p:txBody>
+        </p:sp>
+        <p:sp>
+          <p:nvSpPr>
+            <p:cNvPr id="47" name="rc46"/>
+            <p:cNvSpPr/>
+            <p:nvPr/>
+          </p:nvSpPr>
+          <p:spPr>
+            <a:xfrm>
+              <a:off x="6162836" y="3154203"/>
+              <a:ext cx="107975" cy="107975"/>
+            </a:xfrm>
+            <a:prstGeom prst="rect">
+              <a:avLst/>
+            </a:prstGeom>
+            <a:solidFill>
+              <a:srgbClr val="1F5FBF">
+                <a:alpha val="100000"/>
+              </a:srgbClr>
+            </a:solidFill>
+          </p:spPr>
+          <p:txBody>
+            <a:bodyPr/>
+            <a:lstStyle/>
+            <a:p/>
+          </p:txBody>
+        </p:sp>
+        <p:sp>
+          <p:nvSpPr>
+            <p:cNvPr id="48" name="rc47"/>
+            <p:cNvSpPr/>
+            <p:nvPr/>
+          </p:nvSpPr>
+          <p:spPr>
+            <a:xfrm>
+              <a:off x="6162836" y="3398947"/>
+              <a:ext cx="107975" cy="107975"/>
+            </a:xfrm>
+            <a:prstGeom prst="rect">
+              <a:avLst/>
+            </a:prstGeom>
+            <a:solidFill>
+              <a:srgbClr val="C084D8">
+                <a:alpha val="100000"/>
+              </a:srgbClr>
+            </a:solidFill>
+          </p:spPr>
+          <p:txBody>
+            <a:bodyPr/>
+            <a:lstStyle/>
+            <a:p/>
+          </p:txBody>
+        </p:sp>
+        <p:sp>
+          <p:nvSpPr>
+            <p:cNvPr id="49" name="rc48"/>
+            <p:cNvSpPr/>
+            <p:nvPr/>
+          </p:nvSpPr>
+          <p:spPr>
+            <a:xfrm>
+              <a:off x="6162836" y="3989212"/>
+              <a:ext cx="107975" cy="107975"/>
+            </a:xfrm>
+            <a:prstGeom prst="rect">
+              <a:avLst/>
+            </a:prstGeom>
+            <a:solidFill>
+              <a:srgbClr val="E5534B">
+                <a:alpha val="100000"/>
+              </a:srgbClr>
+            </a:solidFill>
+          </p:spPr>
+          <p:txBody>
+            <a:bodyPr/>
+            <a:lstStyle/>
+            <a:p/>
+          </p:txBody>
+        </p:sp>
+        <p:sp>
+          <p:nvSpPr>
+            <p:cNvPr id="50" name="rc49"/>
+            <p:cNvSpPr/>
+            <p:nvPr/>
+          </p:nvSpPr>
+          <p:spPr>
+            <a:xfrm>
+              <a:off x="6162836" y="4233957"/>
+              <a:ext cx="107975" cy="107975"/>
+            </a:xfrm>
+            <a:prstGeom prst="rect">
+              <a:avLst/>
+            </a:prstGeom>
+            <a:solidFill>
+              <a:srgbClr val="1F5FBF">
+                <a:alpha val="100000"/>
+              </a:srgbClr>
+            </a:solidFill>
+          </p:spPr>
+          <p:txBody>
+            <a:bodyPr/>
+            <a:lstStyle/>
+            <a:p/>
+          </p:txBody>
+        </p:sp>
+        <p:sp>
+          <p:nvSpPr>
+            <p:cNvPr id="51" name="rc50"/>
+            <p:cNvSpPr/>
+            <p:nvPr/>
+          </p:nvSpPr>
+          <p:spPr>
+            <a:xfrm>
+              <a:off x="6162836" y="4478701"/>
+              <a:ext cx="107975" cy="107975"/>
+            </a:xfrm>
+            <a:prstGeom prst="rect">
+              <a:avLst/>
+            </a:prstGeom>
+            <a:solidFill>
+              <a:srgbClr val="C084D8">
+                <a:alpha val="100000"/>
+              </a:srgbClr>
+            </a:solidFill>
+          </p:spPr>
+          <p:txBody>
+            <a:bodyPr/>
+            <a:lstStyle/>
+            <a:p/>
+          </p:txBody>
+        </p:sp>
+        <p:sp>
+          <p:nvSpPr>
+            <p:cNvPr id="52" name="rc51"/>
+            <p:cNvSpPr/>
+            <p:nvPr/>
+          </p:nvSpPr>
+          <p:spPr>
+            <a:xfrm>
+              <a:off x="6162836" y="5068966"/>
+              <a:ext cx="107975" cy="107975"/>
+            </a:xfrm>
+            <a:prstGeom prst="rect">
+              <a:avLst/>
+            </a:prstGeom>
+            <a:solidFill>
+              <a:srgbClr val="E5534B">
+                <a:alpha val="100000"/>
+              </a:srgbClr>
+            </a:solidFill>
+          </p:spPr>
+          <p:txBody>
+            <a:bodyPr/>
+            <a:lstStyle/>
+            <a:p/>
+          </p:txBody>
+        </p:sp>
+        <p:sp>
+          <p:nvSpPr>
+            <p:cNvPr id="53" name="rc52"/>
+            <p:cNvSpPr/>
+            <p:nvPr/>
+          </p:nvSpPr>
+          <p:spPr>
+            <a:xfrm>
+              <a:off x="6162836" y="5313710"/>
+              <a:ext cx="107975" cy="107975"/>
+            </a:xfrm>
+            <a:prstGeom prst="rect">
+              <a:avLst/>
+            </a:prstGeom>
+            <a:solidFill>
+              <a:srgbClr val="1F5FBF">
+                <a:alpha val="100000"/>
+              </a:srgbClr>
+            </a:solidFill>
+          </p:spPr>
+          <p:txBody>
+            <a:bodyPr/>
+            <a:lstStyle/>
+            <a:p/>
+          </p:txBody>
+        </p:sp>
+        <p:sp>
+          <p:nvSpPr>
+            <p:cNvPr id="54" name="rc53"/>
+            <p:cNvSpPr/>
+            <p:nvPr/>
+          </p:nvSpPr>
+          <p:spPr>
+            <a:xfrm>
+              <a:off x="6162836" y="5558454"/>
+              <a:ext cx="107975" cy="107975"/>
+            </a:xfrm>
+            <a:prstGeom prst="rect">
+              <a:avLst/>
+            </a:prstGeom>
+            <a:solidFill>
+              <a:srgbClr val="C084D8">
+                <a:alpha val="100000"/>
+              </a:srgbClr>
+            </a:solidFill>
+          </p:spPr>
+          <p:txBody>
+            <a:bodyPr/>
+            <a:lstStyle/>
+            <a:p/>
+          </p:txBody>
+        </p:sp>
+        <p:sp>
+          <p:nvSpPr>
+            <p:cNvPr id="55" name="tx54"/>
+            <p:cNvSpPr/>
+            <p:nvPr/>
+          </p:nvSpPr>
+          <p:spPr>
+            <a:xfrm>
+              <a:off x="6342795" y="1843551"/>
+              <a:ext cx="675284" cy="80284"/>
             </a:xfrm>
             <a:prstGeom prst="rect">
               <a:avLst/>
@@ -3730,28 +8835,28 @@
               <a:r>
                 <a:rPr sz="882">
                   <a:solidFill>
-                    <a:srgbClr val="4D4D4D">
+                    <a:srgbClr val="262626">
                       <a:alpha val="100000"/>
                     </a:srgbClr>
                   </a:solidFill>
                   <a:latin typeface="Helvetica"/>
                   <a:cs typeface="Helvetica"/>
                 </a:rPr>
-                <a:t>etoh_hepatitis = 0</a:t>
+                <a:t>Death: n = 18</a:t>
               </a:r>
             </a:p>
           </p:txBody>
         </p:sp>
         <p:sp>
           <p:nvSpPr>
-            <p:cNvPr id="39" name="tx38"/>
+            <p:cNvPr id="56" name="tx55"/>
             <p:cNvSpPr/>
             <p:nvPr/>
           </p:nvSpPr>
           <p:spPr>
             <a:xfrm>
-              <a:off x="1871416" y="3327960"/>
-              <a:ext cx="1303934" cy="80284"/>
+              <a:off x="6342795" y="2088295"/>
+              <a:ext cx="1141994" cy="80284"/>
             </a:xfrm>
             <a:prstGeom prst="rect">
               <a:avLst/>
@@ -3776,28 +8881,28 @@
               <a:r>
                 <a:rPr sz="882">
                   <a:solidFill>
-                    <a:srgbClr val="4D4D4D">
+                    <a:srgbClr val="262626">
                       <a:alpha val="100000"/>
                     </a:srgbClr>
                   </a:solidFill>
                   <a:latin typeface="Helvetica"/>
                   <a:cs typeface="Helvetica"/>
                 </a:rPr>
-                <a:t>hrs_responders_cat_2 = 0</a:t>
+                <a:t>Liver transplant: n = 15</a:t>
               </a:r>
             </a:p>
           </p:txBody>
         </p:sp>
         <p:sp>
           <p:nvSpPr>
-            <p:cNvPr id="40" name="tx39"/>
+            <p:cNvPr id="57" name="tx56"/>
             <p:cNvSpPr/>
             <p:nvPr/>
           </p:nvSpPr>
           <p:spPr>
             <a:xfrm>
-              <a:off x="5968648" y="3327960"/>
-              <a:ext cx="1303934" cy="80284"/>
+              <a:off x="6342795" y="2333039"/>
+              <a:ext cx="1763877" cy="80284"/>
             </a:xfrm>
             <a:prstGeom prst="rect">
               <a:avLst/>
@@ -3822,28 +8927,28 @@
               <a:r>
                 <a:rPr sz="882">
                   <a:solidFill>
-                    <a:srgbClr val="4D4D4D">
+                    <a:srgbClr val="262626">
                       <a:alpha val="100000"/>
                     </a:srgbClr>
                   </a:solidFill>
                   <a:latin typeface="Helvetica"/>
                   <a:cs typeface="Helvetica"/>
                 </a:rPr>
-                <a:t>hrs_responders_cat_2 = 1</a:t>
+                <a:t>RRT at 90 days: n = 3 (missing: 17)</a:t>
               </a:r>
             </a:p>
           </p:txBody>
         </p:sp>
         <p:sp>
           <p:nvSpPr>
-            <p:cNvPr id="41" name="tx40"/>
+            <p:cNvPr id="58" name="tx57"/>
             <p:cNvSpPr/>
             <p:nvPr/>
           </p:nvSpPr>
           <p:spPr>
             <a:xfrm>
-              <a:off x="686052" y="5241251"/>
-              <a:ext cx="1097371" cy="69860"/>
+              <a:off x="6342795" y="2923305"/>
+              <a:ext cx="675284" cy="80284"/>
             </a:xfrm>
             <a:prstGeom prst="rect">
               <a:avLst/>
@@ -3856,7 +8961,7 @@
             <a:p>
               <a:pPr algn="l" marL="0" marR="0" indent="0">
                 <a:lnSpc>
-                  <a:spcPts val="768"/>
+                  <a:spcPts val="882"/>
                 </a:lnSpc>
                 <a:spcBef>
                   <a:spcPts val="0"/>
@@ -3866,30 +8971,30 @@
                 </a:spcAft>
               </a:pPr>
               <a:r>
-                <a:rPr sz="768">
+                <a:rPr sz="882">
                   <a:solidFill>
-                    <a:srgbClr val="4D4D4D">
+                    <a:srgbClr val="262626">
                       <a:alpha val="100000"/>
                     </a:srgbClr>
                   </a:solidFill>
                   <a:latin typeface="Helvetica"/>
                   <a:cs typeface="Helvetica"/>
                 </a:rPr>
-                <a:t>time_to_death_status = 1</a:t>
+                <a:t>Death: n = 18</a:t>
               </a:r>
             </a:p>
           </p:txBody>
         </p:sp>
         <p:sp>
           <p:nvSpPr>
-            <p:cNvPr id="42" name="tx41"/>
+            <p:cNvPr id="59" name="tx58"/>
             <p:cNvSpPr/>
             <p:nvPr/>
           </p:nvSpPr>
           <p:spPr>
             <a:xfrm>
-              <a:off x="2218568" y="5241251"/>
-              <a:ext cx="609630" cy="69860"/>
+              <a:off x="6342795" y="3168049"/>
+              <a:ext cx="1141994" cy="80284"/>
             </a:xfrm>
             <a:prstGeom prst="rect">
               <a:avLst/>
@@ -3902,7 +9007,7 @@
             <a:p>
               <a:pPr algn="l" marL="0" marR="0" indent="0">
                 <a:lnSpc>
-                  <a:spcPts val="768"/>
+                  <a:spcPts val="882"/>
                 </a:lnSpc>
                 <a:spcBef>
                   <a:spcPts val="0"/>
@@ -3912,30 +9017,30 @@
                 </a:spcAft>
               </a:pPr>
               <a:r>
-                <a:rPr sz="768">
+                <a:rPr sz="882">
                   <a:solidFill>
-                    <a:srgbClr val="4D4D4D">
+                    <a:srgbClr val="262626">
                       <a:alpha val="100000"/>
                     </a:srgbClr>
                   </a:solidFill>
                   <a:latin typeface="Helvetica"/>
                   <a:cs typeface="Helvetica"/>
                 </a:rPr>
-                <a:t>efu_90_rrt = 1</a:t>
+                <a:t>Liver transplant: n = 13</a:t>
               </a:r>
             </a:p>
           </p:txBody>
         </p:sp>
         <p:sp>
           <p:nvSpPr>
-            <p:cNvPr id="43" name="tx42"/>
+            <p:cNvPr id="60" name="tx59"/>
             <p:cNvSpPr/>
             <p:nvPr/>
           </p:nvSpPr>
           <p:spPr>
             <a:xfrm>
-              <a:off x="3389348" y="5188566"/>
-              <a:ext cx="845362" cy="69860"/>
+              <a:off x="6342795" y="3412793"/>
+              <a:ext cx="1763877" cy="80284"/>
             </a:xfrm>
             <a:prstGeom prst="rect">
               <a:avLst/>
@@ -3948,7 +9053,7 @@
             <a:p>
               <a:pPr algn="l" marL="0" marR="0" indent="0">
                 <a:lnSpc>
-                  <a:spcPts val="768"/>
+                  <a:spcPts val="882"/>
                 </a:lnSpc>
                 <a:spcBef>
                   <a:spcPts val="0"/>
@@ -3958,30 +9063,30 @@
                 </a:spcAft>
               </a:pPr>
               <a:r>
-                <a:rPr sz="768">
+                <a:rPr sz="882">
                   <a:solidFill>
-                    <a:srgbClr val="4D4D4D">
+                    <a:srgbClr val="262626">
                       <a:alpha val="100000"/>
                     </a:srgbClr>
                   </a:solidFill>
                   <a:latin typeface="Helvetica"/>
                   <a:cs typeface="Helvetica"/>
                 </a:rPr>
-                <a:t>transplant_lt_status</a:t>
+                <a:t>RRT at 90 days: n = 1 (missing: 14)</a:t>
               </a:r>
             </a:p>
           </p:txBody>
         </p:sp>
         <p:sp>
           <p:nvSpPr>
-            <p:cNvPr id="44" name="tx43"/>
+            <p:cNvPr id="61" name="tx60"/>
             <p:cNvSpPr/>
             <p:nvPr/>
           </p:nvSpPr>
           <p:spPr>
             <a:xfrm>
-              <a:off x="3645425" y="5293936"/>
-              <a:ext cx="333207" cy="69860"/>
+              <a:off x="6342795" y="4003058"/>
+              <a:ext cx="675284" cy="80284"/>
             </a:xfrm>
             <a:prstGeom prst="rect">
               <a:avLst/>
@@ -3994,7 +9099,7 @@
             <a:p>
               <a:pPr algn="l" marL="0" marR="0" indent="0">
                 <a:lnSpc>
-                  <a:spcPts val="768"/>
+                  <a:spcPts val="882"/>
                 </a:lnSpc>
                 <a:spcBef>
                   <a:spcPts val="0"/>
@@ -4004,30 +9109,30 @@
                 </a:spcAft>
               </a:pPr>
               <a:r>
-                <a:rPr sz="768">
+                <a:rPr sz="882">
                   <a:solidFill>
-                    <a:srgbClr val="4D4D4D">
+                    <a:srgbClr val="262626">
                       <a:alpha val="100000"/>
                     </a:srgbClr>
                   </a:solidFill>
                   <a:latin typeface="Helvetica"/>
                   <a:cs typeface="Helvetica"/>
                 </a:rPr>
-                <a:t>= 1 or 2</a:t>
+                <a:t>Death: n = 14</a:t>
               </a:r>
             </a:p>
           </p:txBody>
         </p:sp>
         <p:sp>
           <p:nvSpPr>
-            <p:cNvPr id="45" name="tx44"/>
+            <p:cNvPr id="62" name="tx61"/>
             <p:cNvSpPr/>
             <p:nvPr/>
           </p:nvSpPr>
           <p:spPr>
             <a:xfrm>
-              <a:off x="4783284" y="5241251"/>
-              <a:ext cx="1097371" cy="69860"/>
+              <a:off x="6342795" y="4247802"/>
+              <a:ext cx="1079723" cy="80284"/>
             </a:xfrm>
             <a:prstGeom prst="rect">
               <a:avLst/>
@@ -4040,7 +9145,7 @@
             <a:p>
               <a:pPr algn="l" marL="0" marR="0" indent="0">
                 <a:lnSpc>
-                  <a:spcPts val="768"/>
+                  <a:spcPts val="882"/>
                 </a:lnSpc>
                 <a:spcBef>
                   <a:spcPts val="0"/>
@@ -4050,30 +9155,30 @@
                 </a:spcAft>
               </a:pPr>
               <a:r>
-                <a:rPr sz="768">
+                <a:rPr sz="882">
                   <a:solidFill>
-                    <a:srgbClr val="4D4D4D">
+                    <a:srgbClr val="262626">
                       <a:alpha val="100000"/>
                     </a:srgbClr>
                   </a:solidFill>
                   <a:latin typeface="Helvetica"/>
                   <a:cs typeface="Helvetica"/>
                 </a:rPr>
-                <a:t>time_to_death_status = 1</a:t>
+                <a:t>Liver transplant: n = 8</a:t>
               </a:r>
             </a:p>
           </p:txBody>
         </p:sp>
         <p:sp>
           <p:nvSpPr>
-            <p:cNvPr id="46" name="tx45"/>
+            <p:cNvPr id="63" name="tx62"/>
             <p:cNvSpPr/>
             <p:nvPr/>
           </p:nvSpPr>
           <p:spPr>
             <a:xfrm>
-              <a:off x="6315800" y="5241251"/>
-              <a:ext cx="609630" cy="69860"/>
+              <a:off x="6342795" y="4492546"/>
+              <a:ext cx="1701606" cy="80284"/>
             </a:xfrm>
             <a:prstGeom prst="rect">
               <a:avLst/>
@@ -4086,7 +9191,7 @@
             <a:p>
               <a:pPr algn="l" marL="0" marR="0" indent="0">
                 <a:lnSpc>
-                  <a:spcPts val="768"/>
+                  <a:spcPts val="882"/>
                 </a:lnSpc>
                 <a:spcBef>
                   <a:spcPts val="0"/>
@@ -4096,30 +9201,30 @@
                 </a:spcAft>
               </a:pPr>
               <a:r>
-                <a:rPr sz="768">
+                <a:rPr sz="882">
                   <a:solidFill>
-                    <a:srgbClr val="4D4D4D">
+                    <a:srgbClr val="262626">
                       <a:alpha val="100000"/>
                     </a:srgbClr>
                   </a:solidFill>
                   <a:latin typeface="Helvetica"/>
                   <a:cs typeface="Helvetica"/>
                 </a:rPr>
-                <a:t>efu_90_rrt = 1</a:t>
+                <a:t>RRT at 90 days: n = 0 (missing: 6)</a:t>
               </a:r>
             </a:p>
           </p:txBody>
         </p:sp>
         <p:sp>
           <p:nvSpPr>
-            <p:cNvPr id="47" name="tx46"/>
+            <p:cNvPr id="64" name="tx63"/>
             <p:cNvSpPr/>
             <p:nvPr/>
           </p:nvSpPr>
           <p:spPr>
             <a:xfrm>
-              <a:off x="7486580" y="5188566"/>
-              <a:ext cx="845362" cy="69860"/>
+              <a:off x="6342795" y="5082811"/>
+              <a:ext cx="675284" cy="80284"/>
             </a:xfrm>
             <a:prstGeom prst="rect">
               <a:avLst/>
@@ -4132,7 +9237,7 @@
             <a:p>
               <a:pPr algn="l" marL="0" marR="0" indent="0">
                 <a:lnSpc>
-                  <a:spcPts val="768"/>
+                  <a:spcPts val="882"/>
                 </a:lnSpc>
                 <a:spcBef>
                   <a:spcPts val="0"/>
@@ -4142,30 +9247,30 @@
                 </a:spcAft>
               </a:pPr>
               <a:r>
-                <a:rPr sz="768">
+                <a:rPr sz="882">
                   <a:solidFill>
-                    <a:srgbClr val="4D4D4D">
+                    <a:srgbClr val="262626">
                       <a:alpha val="100000"/>
                     </a:srgbClr>
                   </a:solidFill>
                   <a:latin typeface="Helvetica"/>
                   <a:cs typeface="Helvetica"/>
                 </a:rPr>
-                <a:t>transplant_lt_status</a:t>
+                <a:t>Death: n = 25</a:t>
               </a:r>
             </a:p>
           </p:txBody>
         </p:sp>
         <p:sp>
           <p:nvSpPr>
-            <p:cNvPr id="48" name="tx47"/>
+            <p:cNvPr id="65" name="tx64"/>
             <p:cNvSpPr/>
             <p:nvPr/>
           </p:nvSpPr>
           <p:spPr>
             <a:xfrm>
-              <a:off x="7742657" y="5293936"/>
-              <a:ext cx="333207" cy="69860"/>
+              <a:off x="6342795" y="5327555"/>
+              <a:ext cx="1141994" cy="80284"/>
             </a:xfrm>
             <a:prstGeom prst="rect">
               <a:avLst/>
@@ -4178,7 +9283,7 @@
             <a:p>
               <a:pPr algn="l" marL="0" marR="0" indent="0">
                 <a:lnSpc>
-                  <a:spcPts val="768"/>
+                  <a:spcPts val="882"/>
                 </a:lnSpc>
                 <a:spcBef>
                   <a:spcPts val="0"/>
@@ -4188,30 +9293,30 @@
                 </a:spcAft>
               </a:pPr>
               <a:r>
-                <a:rPr sz="768">
+                <a:rPr sz="882">
                   <a:solidFill>
-                    <a:srgbClr val="4D4D4D">
+                    <a:srgbClr val="262626">
                       <a:alpha val="100000"/>
                     </a:srgbClr>
                   </a:solidFill>
                   <a:latin typeface="Helvetica"/>
                   <a:cs typeface="Helvetica"/>
                 </a:rPr>
-                <a:t>= 1 or 2</a:t>
+                <a:t>Liver transplant: n = 27</a:t>
               </a:r>
             </a:p>
           </p:txBody>
         </p:sp>
         <p:sp>
           <p:nvSpPr>
-            <p:cNvPr id="49" name="tx48"/>
+            <p:cNvPr id="66" name="tx65"/>
             <p:cNvSpPr/>
             <p:nvPr/>
           </p:nvSpPr>
           <p:spPr>
             <a:xfrm>
-              <a:off x="4328906" y="1883281"/>
-              <a:ext cx="486186" cy="103692"/>
+              <a:off x="6342795" y="5572299"/>
+              <a:ext cx="1763877" cy="80284"/>
             </a:xfrm>
             <a:prstGeom prst="rect">
               <a:avLst/>
@@ -4224,7 +9329,7 @@
             <a:p>
               <a:pPr algn="l" marL="0" marR="0" indent="0">
                 <a:lnSpc>
-                  <a:spcPts val="1138"/>
+                  <a:spcPts val="882"/>
                 </a:lnSpc>
                 <a:spcBef>
                   <a:spcPts val="0"/>
@@ -4234,30 +9339,30 @@
                 </a:spcAft>
               </a:pPr>
               <a:r>
-                <a:rPr sz="1138">
+                <a:rPr sz="882">
                   <a:solidFill>
-                    <a:srgbClr val="000000">
+                    <a:srgbClr val="262626">
                       <a:alpha val="100000"/>
                     </a:srgbClr>
                   </a:solidFill>
                   <a:latin typeface="Helvetica"/>
                   <a:cs typeface="Helvetica"/>
                 </a:rPr>
-                <a:t>n = 184</a:t>
+                <a:t>RRT at 90 days: n = 4 (missing: 26)</a:t>
               </a:r>
             </a:p>
           </p:txBody>
         </p:sp>
         <p:sp>
           <p:nvSpPr>
-            <p:cNvPr id="50" name="tx49"/>
+            <p:cNvPr id="67" name="tx66"/>
             <p:cNvSpPr/>
             <p:nvPr/>
           </p:nvSpPr>
           <p:spPr>
             <a:xfrm>
-              <a:off x="2320478" y="3569134"/>
-              <a:ext cx="405810" cy="103692"/>
+              <a:off x="6636698" y="1403075"/>
+              <a:ext cx="1269370" cy="111831"/>
             </a:xfrm>
             <a:prstGeom prst="rect">
               <a:avLst/>
@@ -4270,7 +9375,7 @@
             <a:p>
               <a:pPr algn="l" marL="0" marR="0" indent="0">
                 <a:lnSpc>
-                  <a:spcPts val="1138"/>
+                  <a:spcPts val="1223"/>
                 </a:lnSpc>
                 <a:spcBef>
                   <a:spcPts val="0"/>
@@ -4280,30 +9385,30 @@
                 </a:spcAft>
               </a:pPr>
               <a:r>
-                <a:rPr sz="1138">
+                <a:rPr sz="1223" b="1">
                   <a:solidFill>
-                    <a:srgbClr val="000000">
+                    <a:srgbClr val="1F1F1F">
                       <a:alpha val="100000"/>
                     </a:srgbClr>
                   </a:solidFill>
                   <a:latin typeface="Helvetica"/>
                   <a:cs typeface="Helvetica"/>
                 </a:rPr>
-                <a:t>n = 78</a:t>
+                <a:t>90-day outcomes</a:t>
               </a:r>
             </a:p>
           </p:txBody>
         </p:sp>
         <p:sp>
           <p:nvSpPr>
-            <p:cNvPr id="51" name="tx50"/>
+            <p:cNvPr id="68" name="tx67"/>
             <p:cNvSpPr/>
             <p:nvPr/>
           </p:nvSpPr>
           <p:spPr>
             <a:xfrm>
-              <a:off x="6377522" y="3569134"/>
-              <a:ext cx="486186" cy="103692"/>
+              <a:off x="576912" y="5941171"/>
+              <a:ext cx="6390650" cy="63825"/>
             </a:xfrm>
             <a:prstGeom prst="rect">
               <a:avLst/>
@@ -4316,7 +9421,7 @@
             <a:p>
               <a:pPr algn="l" marL="0" marR="0" indent="0">
                 <a:lnSpc>
-                  <a:spcPts val="1138"/>
+                  <a:spcPts val="700"/>
                 </a:lnSpc>
                 <a:spcBef>
                   <a:spcPts val="0"/>
@@ -4326,30 +9431,30 @@
                 </a:spcAft>
               </a:pPr>
               <a:r>
-                <a:rPr sz="1138">
+                <a:rPr sz="700">
                   <a:solidFill>
-                    <a:srgbClr val="000000">
+                    <a:srgbClr val="4D4D4D">
                       <a:alpha val="100000"/>
                     </a:srgbClr>
                   </a:solidFill>
                   <a:latin typeface="Helvetica"/>
                   <a:cs typeface="Helvetica"/>
                 </a:rPr>
-                <a:t>n = 106</a:t>
+                <a:t>RRT during hospitalization: rrt = 1 (no RRT: rrt = 0 or 2). Death: time_to_death_status = 1. Liver transplant: transplant_lt_status = 1 or 2 (through 1-year follow-up).</a:t>
               </a:r>
             </a:p>
           </p:txBody>
         </p:sp>
         <p:sp>
           <p:nvSpPr>
-            <p:cNvPr id="52" name="tx51"/>
+            <p:cNvPr id="69" name="tx68"/>
             <p:cNvSpPr/>
             <p:nvPr/>
           </p:nvSpPr>
           <p:spPr>
             <a:xfrm>
-              <a:off x="1057253" y="5598649"/>
-              <a:ext cx="354970" cy="90708"/>
+              <a:off x="576912" y="6058519"/>
+              <a:ext cx="5856914" cy="63825"/>
             </a:xfrm>
             <a:prstGeom prst="rect">
               <a:avLst/>
@@ -4362,7 +9467,7 @@
             <a:p>
               <a:pPr algn="l" marL="0" marR="0" indent="0">
                 <a:lnSpc>
-                  <a:spcPts val="995"/>
+                  <a:spcPts val="700"/>
                 </a:lnSpc>
                 <a:spcBef>
                   <a:spcPts val="0"/>
@@ -4372,375 +9477,7 @@
                 </a:spcAft>
               </a:pPr>
               <a:r>
-                <a:rPr sz="995">
-                  <a:solidFill>
-                    <a:srgbClr val="000000">
-                      <a:alpha val="100000"/>
-                    </a:srgbClr>
-                  </a:solidFill>
-                  <a:latin typeface="Helvetica"/>
-                  <a:cs typeface="Helvetica"/>
-                </a:rPr>
-                <a:t>n = 36</a:t>
-              </a:r>
-            </a:p>
-          </p:txBody>
-        </p:sp>
-        <p:sp>
-          <p:nvSpPr>
-            <p:cNvPr id="53" name="tx52"/>
-            <p:cNvSpPr/>
-            <p:nvPr/>
-          </p:nvSpPr>
-          <p:spPr>
-            <a:xfrm>
-              <a:off x="2381057" y="5530354"/>
-              <a:ext cx="284652" cy="90708"/>
-            </a:xfrm>
-            <a:prstGeom prst="rect">
-              <a:avLst/>
-            </a:prstGeom>
-            <a:noFill/>
-          </p:spPr>
-          <p:txBody>
-            <a:bodyPr lIns="0" rIns="0" tIns="0" bIns="0" anchorCtr="1" anchor="ctr" wrap="none"/>
-            <a:lstStyle/>
-            <a:p>
-              <a:pPr algn="l" marL="0" marR="0" indent="0">
-                <a:lnSpc>
-                  <a:spcPts val="995"/>
-                </a:lnSpc>
-                <a:spcBef>
-                  <a:spcPts val="0"/>
-                </a:spcBef>
-                <a:spcAft>
-                  <a:spcPts val="0"/>
-                </a:spcAft>
-              </a:pPr>
-              <a:r>
-                <a:rPr sz="995">
-                  <a:solidFill>
-                    <a:srgbClr val="000000">
-                      <a:alpha val="100000"/>
-                    </a:srgbClr>
-                  </a:solidFill>
-                  <a:latin typeface="Helvetica"/>
-                  <a:cs typeface="Helvetica"/>
-                </a:rPr>
-                <a:t>n = 4</a:t>
-              </a:r>
-            </a:p>
-          </p:txBody>
-        </p:sp>
-        <p:sp>
-          <p:nvSpPr>
-            <p:cNvPr id="54" name="tx53"/>
-            <p:cNvSpPr/>
-            <p:nvPr/>
-          </p:nvSpPr>
-          <p:spPr>
-            <a:xfrm>
-              <a:off x="2161647" y="5666944"/>
-              <a:ext cx="723473" cy="90708"/>
-            </a:xfrm>
-            <a:prstGeom prst="rect">
-              <a:avLst/>
-            </a:prstGeom>
-            <a:noFill/>
-          </p:spPr>
-          <p:txBody>
-            <a:bodyPr lIns="0" rIns="0" tIns="0" bIns="0" anchorCtr="1" anchor="ctr" wrap="none"/>
-            <a:lstStyle/>
-            <a:p>
-              <a:pPr algn="l" marL="0" marR="0" indent="0">
-                <a:lnSpc>
-                  <a:spcPts val="995"/>
-                </a:lnSpc>
-                <a:spcBef>
-                  <a:spcPts val="0"/>
-                </a:spcBef>
-                <a:spcAft>
-                  <a:spcPts val="0"/>
-                </a:spcAft>
-              </a:pPr>
-              <a:r>
-                <a:rPr sz="995">
-                  <a:solidFill>
-                    <a:srgbClr val="000000">
-                      <a:alpha val="100000"/>
-                    </a:srgbClr>
-                  </a:solidFill>
-                  <a:latin typeface="Helvetica"/>
-                  <a:cs typeface="Helvetica"/>
-                </a:rPr>
-                <a:t>(missing: 31)</a:t>
-              </a:r>
-            </a:p>
-          </p:txBody>
-        </p:sp>
-        <p:sp>
-          <p:nvSpPr>
-            <p:cNvPr id="55" name="tx54"/>
-            <p:cNvSpPr/>
-            <p:nvPr/>
-          </p:nvSpPr>
-          <p:spPr>
-            <a:xfrm>
-              <a:off x="3634544" y="5598649"/>
-              <a:ext cx="354970" cy="90708"/>
-            </a:xfrm>
-            <a:prstGeom prst="rect">
-              <a:avLst/>
-            </a:prstGeom>
-            <a:noFill/>
-          </p:spPr>
-          <p:txBody>
-            <a:bodyPr lIns="0" rIns="0" tIns="0" bIns="0" anchorCtr="1" anchor="ctr" wrap="none"/>
-            <a:lstStyle/>
-            <a:p>
-              <a:pPr algn="l" marL="0" marR="0" indent="0">
-                <a:lnSpc>
-                  <a:spcPts val="995"/>
-                </a:lnSpc>
-                <a:spcBef>
-                  <a:spcPts val="0"/>
-                </a:spcBef>
-                <a:spcAft>
-                  <a:spcPts val="0"/>
-                </a:spcAft>
-              </a:pPr>
-              <a:r>
-                <a:rPr sz="995">
-                  <a:solidFill>
-                    <a:srgbClr val="000000">
-                      <a:alpha val="100000"/>
-                    </a:srgbClr>
-                  </a:solidFill>
-                  <a:latin typeface="Helvetica"/>
-                  <a:cs typeface="Helvetica"/>
-                </a:rPr>
-                <a:t>n = 28</a:t>
-              </a:r>
-            </a:p>
-          </p:txBody>
-        </p:sp>
-        <p:sp>
-          <p:nvSpPr>
-            <p:cNvPr id="56" name="tx55"/>
-            <p:cNvSpPr/>
-            <p:nvPr/>
-          </p:nvSpPr>
-          <p:spPr>
-            <a:xfrm>
-              <a:off x="5154485" y="5598649"/>
-              <a:ext cx="354970" cy="90708"/>
-            </a:xfrm>
-            <a:prstGeom prst="rect">
-              <a:avLst/>
-            </a:prstGeom>
-            <a:noFill/>
-          </p:spPr>
-          <p:txBody>
-            <a:bodyPr lIns="0" rIns="0" tIns="0" bIns="0" anchorCtr="1" anchor="ctr" wrap="none"/>
-            <a:lstStyle/>
-            <a:p>
-              <a:pPr algn="l" marL="0" marR="0" indent="0">
-                <a:lnSpc>
-                  <a:spcPts val="995"/>
-                </a:lnSpc>
-                <a:spcBef>
-                  <a:spcPts val="0"/>
-                </a:spcBef>
-                <a:spcAft>
-                  <a:spcPts val="0"/>
-                </a:spcAft>
-              </a:pPr>
-              <a:r>
-                <a:rPr sz="995">
-                  <a:solidFill>
-                    <a:srgbClr val="000000">
-                      <a:alpha val="100000"/>
-                    </a:srgbClr>
-                  </a:solidFill>
-                  <a:latin typeface="Helvetica"/>
-                  <a:cs typeface="Helvetica"/>
-                </a:rPr>
-                <a:t>n = 39</a:t>
-              </a:r>
-            </a:p>
-          </p:txBody>
-        </p:sp>
-        <p:sp>
-          <p:nvSpPr>
-            <p:cNvPr id="57" name="tx56"/>
-            <p:cNvSpPr/>
-            <p:nvPr/>
-          </p:nvSpPr>
-          <p:spPr>
-            <a:xfrm>
-              <a:off x="6478289" y="5530354"/>
-              <a:ext cx="284652" cy="90708"/>
-            </a:xfrm>
-            <a:prstGeom prst="rect">
-              <a:avLst/>
-            </a:prstGeom>
-            <a:noFill/>
-          </p:spPr>
-          <p:txBody>
-            <a:bodyPr lIns="0" rIns="0" tIns="0" bIns="0" anchorCtr="1" anchor="ctr" wrap="none"/>
-            <a:lstStyle/>
-            <a:p>
-              <a:pPr algn="l" marL="0" marR="0" indent="0">
-                <a:lnSpc>
-                  <a:spcPts val="995"/>
-                </a:lnSpc>
-                <a:spcBef>
-                  <a:spcPts val="0"/>
-                </a:spcBef>
-                <a:spcAft>
-                  <a:spcPts val="0"/>
-                </a:spcAft>
-              </a:pPr>
-              <a:r>
-                <a:rPr sz="995">
-                  <a:solidFill>
-                    <a:srgbClr val="000000">
-                      <a:alpha val="100000"/>
-                    </a:srgbClr>
-                  </a:solidFill>
-                  <a:latin typeface="Helvetica"/>
-                  <a:cs typeface="Helvetica"/>
-                </a:rPr>
-                <a:t>n = 4</a:t>
-              </a:r>
-            </a:p>
-          </p:txBody>
-        </p:sp>
-        <p:sp>
-          <p:nvSpPr>
-            <p:cNvPr id="58" name="tx57"/>
-            <p:cNvSpPr/>
-            <p:nvPr/>
-          </p:nvSpPr>
-          <p:spPr>
-            <a:xfrm>
-              <a:off x="6258879" y="5666944"/>
-              <a:ext cx="723473" cy="90708"/>
-            </a:xfrm>
-            <a:prstGeom prst="rect">
-              <a:avLst/>
-            </a:prstGeom>
-            <a:noFill/>
-          </p:spPr>
-          <p:txBody>
-            <a:bodyPr lIns="0" rIns="0" tIns="0" bIns="0" anchorCtr="1" anchor="ctr" wrap="none"/>
-            <a:lstStyle/>
-            <a:p>
-              <a:pPr algn="l" marL="0" marR="0" indent="0">
-                <a:lnSpc>
-                  <a:spcPts val="995"/>
-                </a:lnSpc>
-                <a:spcBef>
-                  <a:spcPts val="0"/>
-                </a:spcBef>
-                <a:spcAft>
-                  <a:spcPts val="0"/>
-                </a:spcAft>
-              </a:pPr>
-              <a:r>
-                <a:rPr sz="995">
-                  <a:solidFill>
-                    <a:srgbClr val="000000">
-                      <a:alpha val="100000"/>
-                    </a:srgbClr>
-                  </a:solidFill>
-                  <a:latin typeface="Helvetica"/>
-                  <a:cs typeface="Helvetica"/>
-                </a:rPr>
-                <a:t>(missing: 32)</a:t>
-              </a:r>
-            </a:p>
-          </p:txBody>
-        </p:sp>
-        <p:sp>
-          <p:nvSpPr>
-            <p:cNvPr id="59" name="tx58"/>
-            <p:cNvSpPr/>
-            <p:nvPr/>
-          </p:nvSpPr>
-          <p:spPr>
-            <a:xfrm>
-              <a:off x="7731776" y="5598649"/>
-              <a:ext cx="354970" cy="90708"/>
-            </a:xfrm>
-            <a:prstGeom prst="rect">
-              <a:avLst/>
-            </a:prstGeom>
-            <a:noFill/>
-          </p:spPr>
-          <p:txBody>
-            <a:bodyPr lIns="0" rIns="0" tIns="0" bIns="0" anchorCtr="1" anchor="ctr" wrap="none"/>
-            <a:lstStyle/>
-            <a:p>
-              <a:pPr algn="l" marL="0" marR="0" indent="0">
-                <a:lnSpc>
-                  <a:spcPts val="995"/>
-                </a:lnSpc>
-                <a:spcBef>
-                  <a:spcPts val="0"/>
-                </a:spcBef>
-                <a:spcAft>
-                  <a:spcPts val="0"/>
-                </a:spcAft>
-              </a:pPr>
-              <a:r>
-                <a:rPr sz="995">
-                  <a:solidFill>
-                    <a:srgbClr val="000000">
-                      <a:alpha val="100000"/>
-                    </a:srgbClr>
-                  </a:solidFill>
-                  <a:latin typeface="Helvetica"/>
-                  <a:cs typeface="Helvetica"/>
-                </a:rPr>
-                <a:t>n = 35</a:t>
-              </a:r>
-            </a:p>
-          </p:txBody>
-        </p:sp>
-        <p:sp>
-          <p:nvSpPr>
-            <p:cNvPr id="60" name="tx59"/>
-            <p:cNvSpPr/>
-            <p:nvPr/>
-          </p:nvSpPr>
-          <p:spPr>
-            <a:xfrm>
-              <a:off x="1394688" y="6059959"/>
-              <a:ext cx="6354622" cy="82021"/>
-            </a:xfrm>
-            <a:prstGeom prst="rect">
-              <a:avLst/>
-            </a:prstGeom>
-            <a:noFill/>
-          </p:spPr>
-          <p:txBody>
-            <a:bodyPr lIns="0" rIns="0" tIns="0" bIns="0" anchorCtr="1" anchor="ctr" wrap="none"/>
-            <a:lstStyle/>
-            <a:p>
-              <a:pPr algn="l" marL="0" marR="0" indent="0">
-                <a:lnSpc>
-                  <a:spcPts val="900"/>
-                </a:lnSpc>
-                <a:spcBef>
-                  <a:spcPts val="0"/>
-                </a:spcBef>
-                <a:spcAft>
-                  <a:spcPts val="0"/>
-                </a:spcAft>
-              </a:pPr>
-              <a:r>
-                <a:rPr sz="900" i="1">
+                <a:rPr sz="700">
                   <a:solidFill>
                     <a:srgbClr val="4D4D4D">
                       <a:alpha val="100000"/>
@@ -4749,7 +9486,7 @@
                   <a:latin typeface="Helvetica"/>
                   <a:cs typeface="Helvetica"/>
                 </a:rPr>
-                <a:t>Outcome boxes can overlap. RRT at 90 days is from the extended follow-up data (missing = no EFU record or field left blank).</a:t>
+                <a:t>RRT at 90 days: efu_90_rrt = 1 from the extended follow-up (missing = no EFU record or field left blank). A patient can have more than one outcome.</a:t>
               </a:r>
             </a:p>
           </p:txBody>
